--- a/docs/AMC_RFP_Orchestrator_Project_Phase01_Phase02_Phase03.pptx
+++ b/docs/AMC_RFP_Orchestrator_Project_Phase01_Phase02_Phase03.pptx
@@ -13,6 +13,8 @@
     <p:sldId id="261" r:id="rId12"/>
     <p:sldId id="262" r:id="rId13"/>
     <p:sldId id="263" r:id="rId14"/>
+    <p:sldId id="272" r:id="rId23"/>
+    <p:sldId id="271" r:id="rId22"/>
     <p:sldId id="264" r:id="rId15"/>
     <p:sldId id="265" r:id="rId16"/>
     <p:sldId id="266" r:id="rId17"/>
@@ -3690,14 +3692,6 @@
 <file path=ppt/slides/slide10.xml><?xml version="1.0" encoding="utf-8"?>
 <p:sld xmlns:a="http://schemas.openxmlformats.org/drawingml/2006/main" xmlns:p="http://schemas.openxmlformats.org/presentationml/2006/main" xmlns:r="http://schemas.openxmlformats.org/officeDocument/2006/relationships">
   <p:cSld>
-    <p:bg>
-      <p:bgPr>
-        <a:solidFill>
-          <a:srgbClr val="FFFFFF"/>
-        </a:solidFill>
-        <a:effectLst/>
-      </p:bgPr>
-    </p:bg>
     <p:spTree>
       <p:nvGrpSpPr>
         <p:cNvPr id="1" name=""/>
@@ -3827,7 +3821,7 @@
                 </a:solidFill>
                 <a:latin typeface="Calibri"/>
               </a:rPr>
-              <a:t>SECTION 14 · PHASE 03</a:t>
+              <a:t>SECTION 14 · PHASE 01</a:t>
             </a:r>
           </a:p>
         </p:txBody>
@@ -3866,7 +3860,7 @@
                 </a:solidFill>
                 <a:latin typeface="Calibri"/>
               </a:rPr>
-              <a:t>CI/CD Automation on GitHub Actions</a:t>
+              <a:t>Local Development Architecture — DEV Stack</a:t>
             </a:r>
           </a:p>
         </p:txBody>
@@ -3918,11 +3912,13 @@
         </p:nvSpPr>
         <p:spPr>
           <a:xfrm>
-            <a:off x="457200" y="1188720"/>
-            <a:ext cx="5394960" cy="457200"/>
+            <a:off x="320040" y="1170432"/>
+            <a:ext cx="2788920" cy="566928"/>
           </a:xfrm>
           <a:prstGeom prst="roundRect">
-            <a:avLst/>
+            <a:avLst>
+              <a:gd name="adj" fmla="val 8000"/>
+            </a:avLst>
           </a:prstGeom>
           <a:solidFill>
             <a:srgbClr val="146EB4"/>
@@ -3947,22 +3943,34 @@
           </a:fontRef>
         </p:style>
         <p:txBody>
-          <a:bodyPr rtlCol="0" anchor="ctr" wrap="square" lIns="50800" rIns="50800" tIns="38100" bIns="38100"/>
-          <a:lstStyle/>
+          <a:bodyPr rtlCol="0" anchor="ctr" wrap="square" lIns="76200" rIns="76200" tIns="50800" bIns="50800"/>
+          <a:lstStyle/>
+          <a:p>
+            <a:pPr algn="ctr"/>
+            <a:r>
+              <a:rPr sz="1050" b="1">
+                <a:solidFill>
+                  <a:srgbClr val="FFFFFF"/>
+                </a:solidFill>
+                <a:latin typeface="Calibri"/>
+              </a:rPr>
+              <a:t>CLI (cli.py) / FastAPI REST API</a:t>
+            </a:r>
+          </a:p>
           <a:p>
             <a:pPr algn="ctr">
-              <a:lnSpc>
-                <a:spcPct val="100000"/>
-              </a:lnSpc>
-            </a:pPr>
-            <a:r>
-              <a:rPr sz="1250" b="1">
-                <a:solidFill>
-                  <a:srgbClr val="FFFFFF"/>
-                </a:solidFill>
-                <a:latin typeface="Calibri"/>
-              </a:rPr>
-              <a:t>pr-validate.yml  —  AUTOMATIC on every pull request</a:t>
+              <a:spcBef>
+                <a:spcPts val="200"/>
+              </a:spcBef>
+            </a:pPr>
+            <a:r>
+              <a:rPr sz="800" b="0">
+                <a:solidFill>
+                  <a:srgbClr val="E6EEF6"/>
+                </a:solidFill>
+                <a:latin typeface="Calibri"/>
+              </a:rPr>
+              <a:t>POST /api/v1/rfp  ·  GET /health, /health/ready</a:t>
             </a:r>
           </a:p>
         </p:txBody>
@@ -3975,16 +3983,16 @@
         </p:nvSpPr>
         <p:spPr>
           <a:xfrm>
-            <a:off x="457200" y="1810512"/>
-            <a:ext cx="5394960" cy="566928"/>
+            <a:off x="9098280" y="1170432"/>
+            <a:ext cx="2788920" cy="502920"/>
           </a:xfrm>
           <a:prstGeom prst="roundRect">
             <a:avLst>
-              <a:gd name="adj" fmla="val 12000"/>
+              <a:gd name="adj" fmla="val 8000"/>
             </a:avLst>
           </a:prstGeom>
           <a:solidFill>
-            <a:srgbClr val="F2F3F5"/>
+            <a:srgbClr val="2E4157"/>
           </a:solidFill>
           <a:ln>
             <a:noFill/>
@@ -4006,80 +4014,56 @@
           </a:fontRef>
         </p:style>
         <p:txBody>
-          <a:bodyPr rtlCol="0" anchor="ctr" wrap="square" lIns="50800" rIns="50800" tIns="38100" bIns="38100"/>
-          <a:lstStyle/>
-          <a:p>
-            <a:pPr algn="l">
-              <a:lnSpc>
-                <a:spcPct val="100000"/>
-              </a:lnSpc>
-            </a:pPr>
-            <a:r>
-              <a:rPr sz="1050" b="0">
-                <a:solidFill>
-                  <a:srgbClr val="22272B"/>
-                </a:solidFill>
-                <a:latin typeface="Calibri"/>
-              </a:rPr>
-              <a:t>Pull request opened / updated against main</a:t>
-            </a:r>
-          </a:p>
-        </p:txBody>
-      </p:sp>
-      <p:cxnSp>
-        <p:nvCxnSpPr>
-          <p:cNvPr id="9" name="Connector 8"/>
-          <p:cNvCxnSpPr/>
-          <p:nvPr/>
-        </p:nvCxnSpPr>
-        <p:spPr>
-          <a:xfrm>
-            <a:off x="3154680" y="2377440"/>
-            <a:ext cx="0" cy="146304"/>
-          </a:xfrm>
-          <a:prstGeom prst="line">
-            <a:avLst/>
-          </a:prstGeom>
-          <a:ln w="22225">
-            <a:solidFill>
-              <a:srgbClr val="146EB4"/>
-            </a:solidFill>
-            <a:tailEnd type="triangle" w="med" len="med"/>
-          </a:ln>
-        </p:spPr>
-        <p:style>
-          <a:lnRef idx="2">
-            <a:schemeClr val="accent1"/>
-          </a:lnRef>
-          <a:fillRef idx="0">
-            <a:schemeClr val="accent1"/>
-          </a:fillRef>
-          <a:effectRef idx="1">
-            <a:schemeClr val="accent1"/>
-          </a:effectRef>
-          <a:fontRef idx="minor">
-            <a:schemeClr val="tx1"/>
-          </a:fontRef>
-        </p:style>
-      </p:cxnSp>
-      <p:sp>
-        <p:nvSpPr>
-          <p:cNvPr id="10" name="Rounded Rectangle 9"/>
+          <a:bodyPr rtlCol="0" anchor="ctr" wrap="square" lIns="76200" rIns="76200" tIns="50800" bIns="50800"/>
+          <a:lstStyle/>
+          <a:p>
+            <a:pPr algn="ctr"/>
+            <a:r>
+              <a:rPr sz="1050" b="1">
+                <a:solidFill>
+                  <a:srgbClr val="FFFFFF"/>
+                </a:solidFill>
+                <a:latin typeface="Calibri"/>
+              </a:rPr>
+              <a:t>Ollama — qwen2.5:7b-instruct</a:t>
+            </a:r>
+          </a:p>
+          <a:p>
+            <a:pPr algn="ctr">
+              <a:spcBef>
+                <a:spcPts val="200"/>
+              </a:spcBef>
+            </a:pPr>
+            <a:r>
+              <a:rPr sz="800" b="0">
+                <a:solidFill>
+                  <a:srgbClr val="E6EEF6"/>
+                </a:solidFill>
+                <a:latin typeface="Calibri"/>
+              </a:rPr>
+              <a:t>Default · free · local · CPU-only</a:t>
+            </a:r>
+          </a:p>
+        </p:txBody>
+      </p:sp>
+      <p:sp>
+        <p:nvSpPr>
+          <p:cNvPr id="9" name="Rounded Rectangle 8"/>
           <p:cNvSpPr/>
           <p:nvPr/>
         </p:nvSpPr>
         <p:spPr>
           <a:xfrm>
-            <a:off x="457200" y="2523744"/>
-            <a:ext cx="5394960" cy="566928"/>
+            <a:off x="9098280" y="1874519"/>
+            <a:ext cx="2788920" cy="502920"/>
           </a:xfrm>
           <a:prstGeom prst="roundRect">
             <a:avLst>
-              <a:gd name="adj" fmla="val 12000"/>
+              <a:gd name="adj" fmla="val 8000"/>
             </a:avLst>
           </a:prstGeom>
           <a:solidFill>
-            <a:srgbClr val="F2F3F5"/>
+            <a:srgbClr val="2E4157"/>
           </a:solidFill>
           <a:ln>
             <a:noFill/>
@@ -4101,324 +4085,53 @@
           </a:fontRef>
         </p:style>
         <p:txBody>
-          <a:bodyPr rtlCol="0" anchor="ctr" wrap="square" lIns="50800" rIns="50800" tIns="38100" bIns="38100"/>
-          <a:lstStyle/>
-          <a:p>
-            <a:pPr algn="l">
-              <a:lnSpc>
-                <a:spcPct val="100000"/>
-              </a:lnSpc>
-            </a:pPr>
-            <a:r>
-              <a:rPr sz="1050" b="0">
-                <a:solidFill>
-                  <a:srgbClr val="22272B"/>
-                </a:solidFill>
-                <a:latin typeface="Calibri"/>
-              </a:rPr>
-              <a:t>Ruff / mypy + fast pytest unit suite (app changes)</a:t>
-            </a:r>
-          </a:p>
-        </p:txBody>
-      </p:sp>
-      <p:cxnSp>
-        <p:nvCxnSpPr>
-          <p:cNvPr id="11" name="Connector 10"/>
-          <p:cNvCxnSpPr/>
-          <p:nvPr/>
-        </p:nvCxnSpPr>
-        <p:spPr>
-          <a:xfrm>
-            <a:off x="3154680" y="3090672"/>
-            <a:ext cx="0" cy="146304"/>
-          </a:xfrm>
-          <a:prstGeom prst="line">
-            <a:avLst/>
-          </a:prstGeom>
-          <a:ln w="22225">
-            <a:solidFill>
-              <a:srgbClr val="146EB4"/>
-            </a:solidFill>
-            <a:tailEnd type="triangle" w="med" len="med"/>
-          </a:ln>
-        </p:spPr>
-        <p:style>
-          <a:lnRef idx="2">
-            <a:schemeClr val="accent1"/>
-          </a:lnRef>
-          <a:fillRef idx="0">
-            <a:schemeClr val="accent1"/>
-          </a:fillRef>
-          <a:effectRef idx="1">
-            <a:schemeClr val="accent1"/>
-          </a:effectRef>
-          <a:fontRef idx="minor">
-            <a:schemeClr val="tx1"/>
-          </a:fontRef>
-        </p:style>
-      </p:cxnSp>
-      <p:sp>
-        <p:nvSpPr>
-          <p:cNvPr id="12" name="Rounded Rectangle 11"/>
+          <a:bodyPr rtlCol="0" anchor="ctr" wrap="square" lIns="76200" rIns="76200" tIns="50800" bIns="50800"/>
+          <a:lstStyle/>
+          <a:p>
+            <a:pPr algn="ctr"/>
+            <a:r>
+              <a:rPr sz="1050" b="1">
+                <a:solidFill>
+                  <a:srgbClr val="FFFFFF"/>
+                </a:solidFill>
+                <a:latin typeface="Calibri"/>
+              </a:rPr>
+              <a:t>AWS Bedrock (opt-in per run)</a:t>
+            </a:r>
+          </a:p>
+          <a:p>
+            <a:pPr algn="ctr">
+              <a:spcBef>
+                <a:spcPts val="200"/>
+              </a:spcBef>
+            </a:pPr>
+            <a:r>
+              <a:rPr sz="800" b="0">
+                <a:solidFill>
+                  <a:srgbClr val="E6EEF6"/>
+                </a:solidFill>
+                <a:latin typeface="Calibri"/>
+              </a:rPr>
+              <a:t>MODEL_PROVIDER=bedrock — zero agent-code change</a:t>
+            </a:r>
+          </a:p>
+        </p:txBody>
+      </p:sp>
+      <p:sp>
+        <p:nvSpPr>
+          <p:cNvPr id="10" name="Rounded Rectangle 9"/>
           <p:cNvSpPr/>
           <p:nvPr/>
         </p:nvSpPr>
         <p:spPr>
           <a:xfrm>
-            <a:off x="457200" y="3236976"/>
-            <a:ext cx="5394960" cy="566928"/>
+            <a:off x="3794760" y="1783080"/>
+            <a:ext cx="4709160" cy="1051560"/>
           </a:xfrm>
           <a:prstGeom prst="roundRect">
             <a:avLst>
-              <a:gd name="adj" fmla="val 12000"/>
+              <a:gd name="adj" fmla="val 8000"/>
             </a:avLst>
-          </a:prstGeom>
-          <a:solidFill>
-            <a:srgbClr val="F2F3F5"/>
-          </a:solidFill>
-          <a:ln>
-            <a:noFill/>
-          </a:ln>
-          <a:effectLst/>
-        </p:spPr>
-        <p:style>
-          <a:lnRef idx="1">
-            <a:schemeClr val="accent1"/>
-          </a:lnRef>
-          <a:fillRef idx="3">
-            <a:schemeClr val="accent1"/>
-          </a:fillRef>
-          <a:effectRef idx="2">
-            <a:schemeClr val="accent1"/>
-          </a:effectRef>
-          <a:fontRef idx="minor">
-            <a:schemeClr val="lt1"/>
-          </a:fontRef>
-        </p:style>
-        <p:txBody>
-          <a:bodyPr rtlCol="0" anchor="ctr" wrap="square" lIns="50800" rIns="50800" tIns="38100" bIns="38100"/>
-          <a:lstStyle/>
-          <a:p>
-            <a:pPr algn="l">
-              <a:lnSpc>
-                <a:spcPct val="100000"/>
-              </a:lnSpc>
-            </a:pPr>
-            <a:r>
-              <a:rPr sz="1050" b="0">
-                <a:solidFill>
-                  <a:srgbClr val="22272B"/>
-                </a:solidFill>
-                <a:latin typeface="Calibri"/>
-              </a:rPr>
-              <a:t>arm64 Docker build sanity check (cache-only, never pushes)</a:t>
-            </a:r>
-          </a:p>
-        </p:txBody>
-      </p:sp>
-      <p:cxnSp>
-        <p:nvCxnSpPr>
-          <p:cNvPr id="13" name="Connector 12"/>
-          <p:cNvCxnSpPr/>
-          <p:nvPr/>
-        </p:nvCxnSpPr>
-        <p:spPr>
-          <a:xfrm>
-            <a:off x="3154680" y="3803904"/>
-            <a:ext cx="0" cy="146304"/>
-          </a:xfrm>
-          <a:prstGeom prst="line">
-            <a:avLst/>
-          </a:prstGeom>
-          <a:ln w="22225">
-            <a:solidFill>
-              <a:srgbClr val="146EB4"/>
-            </a:solidFill>
-            <a:tailEnd type="triangle" w="med" len="med"/>
-          </a:ln>
-        </p:spPr>
-        <p:style>
-          <a:lnRef idx="2">
-            <a:schemeClr val="accent1"/>
-          </a:lnRef>
-          <a:fillRef idx="0">
-            <a:schemeClr val="accent1"/>
-          </a:fillRef>
-          <a:effectRef idx="1">
-            <a:schemeClr val="accent1"/>
-          </a:effectRef>
-          <a:fontRef idx="minor">
-            <a:schemeClr val="tx1"/>
-          </a:fontRef>
-        </p:style>
-      </p:cxnSp>
-      <p:sp>
-        <p:nvSpPr>
-          <p:cNvPr id="14" name="Rounded Rectangle 13"/>
-          <p:cNvSpPr/>
-          <p:nvPr/>
-        </p:nvSpPr>
-        <p:spPr>
-          <a:xfrm>
-            <a:off x="457200" y="3950208"/>
-            <a:ext cx="5394960" cy="566928"/>
-          </a:xfrm>
-          <a:prstGeom prst="roundRect">
-            <a:avLst>
-              <a:gd name="adj" fmla="val 12000"/>
-            </a:avLst>
-          </a:prstGeom>
-          <a:solidFill>
-            <a:srgbClr val="F2F3F5"/>
-          </a:solidFill>
-          <a:ln>
-            <a:noFill/>
-          </a:ln>
-          <a:effectLst/>
-        </p:spPr>
-        <p:style>
-          <a:lnRef idx="1">
-            <a:schemeClr val="accent1"/>
-          </a:lnRef>
-          <a:fillRef idx="3">
-            <a:schemeClr val="accent1"/>
-          </a:fillRef>
-          <a:effectRef idx="2">
-            <a:schemeClr val="accent1"/>
-          </a:effectRef>
-          <a:fontRef idx="minor">
-            <a:schemeClr val="lt1"/>
-          </a:fontRef>
-        </p:style>
-        <p:txBody>
-          <a:bodyPr rtlCol="0" anchor="ctr" wrap="square" lIns="50800" rIns="50800" tIns="38100" bIns="38100"/>
-          <a:lstStyle/>
-          <a:p>
-            <a:pPr algn="l">
-              <a:lnSpc>
-                <a:spcPct val="100000"/>
-              </a:lnSpc>
-            </a:pPr>
-            <a:r>
-              <a:rPr sz="1050" b="0">
-                <a:solidFill>
-                  <a:srgbClr val="22272B"/>
-                </a:solidFill>
-                <a:latin typeface="Calibri"/>
-              </a:rPr>
-              <a:t>terraform fmt / validate + plan via READ-ONLY OIDC role</a:t>
-            </a:r>
-          </a:p>
-        </p:txBody>
-      </p:sp>
-      <p:cxnSp>
-        <p:nvCxnSpPr>
-          <p:cNvPr id="15" name="Connector 14"/>
-          <p:cNvCxnSpPr/>
-          <p:nvPr/>
-        </p:nvCxnSpPr>
-        <p:spPr>
-          <a:xfrm>
-            <a:off x="3154680" y="4517136"/>
-            <a:ext cx="0" cy="146304"/>
-          </a:xfrm>
-          <a:prstGeom prst="line">
-            <a:avLst/>
-          </a:prstGeom>
-          <a:ln w="22225">
-            <a:solidFill>
-              <a:srgbClr val="146EB4"/>
-            </a:solidFill>
-            <a:tailEnd type="triangle" w="med" len="med"/>
-          </a:ln>
-        </p:spPr>
-        <p:style>
-          <a:lnRef idx="2">
-            <a:schemeClr val="accent1"/>
-          </a:lnRef>
-          <a:fillRef idx="0">
-            <a:schemeClr val="accent1"/>
-          </a:fillRef>
-          <a:effectRef idx="1">
-            <a:schemeClr val="accent1"/>
-          </a:effectRef>
-          <a:fontRef idx="minor">
-            <a:schemeClr val="tx1"/>
-          </a:fontRef>
-        </p:style>
-      </p:cxnSp>
-      <p:sp>
-        <p:nvSpPr>
-          <p:cNvPr id="16" name="Rounded Rectangle 15"/>
-          <p:cNvSpPr/>
-          <p:nvPr/>
-        </p:nvSpPr>
-        <p:spPr>
-          <a:xfrm>
-            <a:off x="457200" y="4663440"/>
-            <a:ext cx="5394960" cy="566928"/>
-          </a:xfrm>
-          <a:prstGeom prst="roundRect">
-            <a:avLst>
-              <a:gd name="adj" fmla="val 12000"/>
-            </a:avLst>
-          </a:prstGeom>
-          <a:solidFill>
-            <a:srgbClr val="F2F3F5"/>
-          </a:solidFill>
-          <a:ln>
-            <a:noFill/>
-          </a:ln>
-          <a:effectLst/>
-        </p:spPr>
-        <p:style>
-          <a:lnRef idx="1">
-            <a:schemeClr val="accent1"/>
-          </a:lnRef>
-          <a:fillRef idx="3">
-            <a:schemeClr val="accent1"/>
-          </a:fillRef>
-          <a:effectRef idx="2">
-            <a:schemeClr val="accent1"/>
-          </a:effectRef>
-          <a:fontRef idx="minor">
-            <a:schemeClr val="lt1"/>
-          </a:fontRef>
-        </p:style>
-        <p:txBody>
-          <a:bodyPr rtlCol="0" anchor="ctr" wrap="square" lIns="50800" rIns="50800" tIns="38100" bIns="38100"/>
-          <a:lstStyle/>
-          <a:p>
-            <a:pPr algn="l">
-              <a:lnSpc>
-                <a:spcPct val="100000"/>
-              </a:lnSpc>
-            </a:pPr>
-            <a:r>
-              <a:rPr sz="1050" b="0">
-                <a:solidFill>
-                  <a:srgbClr val="22272B"/>
-                </a:solidFill>
-                <a:latin typeface="Calibri"/>
-              </a:rPr>
-              <a:t>Plan posted as a PR comment — zero AWS mutation, ever</a:t>
-            </a:r>
-          </a:p>
-        </p:txBody>
-      </p:sp>
-      <p:sp>
-        <p:nvSpPr>
-          <p:cNvPr id="17" name="Rounded Rectangle 16"/>
-          <p:cNvSpPr/>
-          <p:nvPr/>
-        </p:nvSpPr>
-        <p:spPr>
-          <a:xfrm>
-            <a:off x="6263640" y="1188720"/>
-            <a:ext cx="5440680" cy="457200"/>
-          </a:xfrm>
-          <a:prstGeom prst="roundRect">
-            <a:avLst/>
           </a:prstGeom>
           <a:solidFill>
             <a:srgbClr val="E87B00"/>
@@ -4443,102 +4156,55 @@
           </a:fontRef>
         </p:style>
         <p:txBody>
-          <a:bodyPr rtlCol="0" anchor="ctr" wrap="square" lIns="50800" rIns="50800" tIns="38100" bIns="38100"/>
-          <a:lstStyle/>
+          <a:bodyPr rtlCol="0" anchor="ctr" wrap="square" lIns="76200" rIns="76200" tIns="50800" bIns="50800"/>
+          <a:lstStyle/>
+          <a:p>
+            <a:pPr algn="ctr"/>
+            <a:r>
+              <a:rPr sz="1300" b="1">
+                <a:solidFill>
+                  <a:srgbClr val="FFFFFF"/>
+                </a:solidFill>
+                <a:latin typeface="Calibri"/>
+              </a:rPr>
+              <a:t>Strands Agents Graph — 5 Agents</a:t>
+            </a:r>
+          </a:p>
           <a:p>
             <a:pPr algn="ctr">
-              <a:lnSpc>
-                <a:spcPct val="100000"/>
-              </a:lnSpc>
-            </a:pPr>
-            <a:r>
-              <a:rPr sz="1250" b="1">
-                <a:solidFill>
-                  <a:srgbClr val="FFFFFF"/>
-                </a:solidFill>
-                <a:latin typeface="Calibri"/>
-              </a:rPr>
-              <a:t>deploy.yml  —  MANUAL, workflow_dispatch only</a:t>
-            </a:r>
-          </a:p>
-        </p:txBody>
-      </p:sp>
-      <p:sp>
-        <p:nvSpPr>
-          <p:cNvPr id="18" name="Rounded Rectangle 17"/>
-          <p:cNvSpPr/>
-          <p:nvPr/>
-        </p:nvSpPr>
-        <p:spPr>
-          <a:xfrm>
-            <a:off x="6263640" y="1810512"/>
-            <a:ext cx="5440680" cy="566928"/>
-          </a:xfrm>
-          <a:prstGeom prst="roundRect">
-            <a:avLst>
-              <a:gd name="adj" fmla="val 12000"/>
-            </a:avLst>
-          </a:prstGeom>
-          <a:solidFill>
-            <a:srgbClr val="F2F3F5"/>
-          </a:solidFill>
-          <a:ln>
-            <a:noFill/>
-          </a:ln>
-          <a:effectLst/>
-        </p:spPr>
-        <p:style>
-          <a:lnRef idx="1">
-            <a:schemeClr val="accent1"/>
-          </a:lnRef>
-          <a:fillRef idx="3">
-            <a:schemeClr val="accent1"/>
-          </a:fillRef>
-          <a:effectRef idx="2">
-            <a:schemeClr val="accent1"/>
-          </a:effectRef>
-          <a:fontRef idx="minor">
-            <a:schemeClr val="lt1"/>
-          </a:fontRef>
-        </p:style>
-        <p:txBody>
-          <a:bodyPr rtlCol="0" anchor="ctr" wrap="square" lIns="50800" rIns="50800" tIns="38100" bIns="38100"/>
-          <a:lstStyle/>
-          <a:p>
-            <a:pPr algn="l">
-              <a:lnSpc>
-                <a:spcPct val="100000"/>
-              </a:lnSpc>
-            </a:pPr>
-            <a:r>
-              <a:rPr sz="1000" b="0">
-                <a:solidFill>
-                  <a:srgbClr val="22272B"/>
-                </a:solidFill>
-                <a:latin typeface="Calibri"/>
-              </a:rPr>
-              <a:t>Operator dispatches: environment = dev / staging / prod</a:t>
+              <a:spcBef>
+                <a:spcPts val="200"/>
+              </a:spcBef>
+            </a:pPr>
+            <a:r>
+              <a:rPr sz="950" b="0">
+                <a:solidFill>
+                  <a:srgbClr val="E6EEF6"/>
+                </a:solidFill>
+                <a:latin typeface="Calibri"/>
+              </a:rPr>
+              <a:t>quant + qual (parallel)  →  compliance (LLM-as-Judge)  →  revise / synthesize</a:t>
             </a:r>
           </a:p>
         </p:txBody>
       </p:sp>
       <p:cxnSp>
         <p:nvCxnSpPr>
-          <p:cNvPr id="19" name="Connector 18"/>
+          <p:cNvPr id="11" name="Connector 10"/>
           <p:cNvCxnSpPr/>
           <p:nvPr/>
         </p:nvCxnSpPr>
         <p:spPr>
           <a:xfrm>
-            <a:off x="8961120" y="2377440"/>
-            <a:ext cx="0" cy="146304"/>
+            <a:off x="3108960" y="1453896"/>
+            <a:ext cx="685800" cy="854964"/>
           </a:xfrm>
           <a:prstGeom prst="line">
             <a:avLst/>
           </a:prstGeom>
           <a:ln w="22225">
             <a:solidFill>
-              <a:srgbClr val="E87B00"/>
+              <a:srgbClr val="146EB4"/>
             </a:solidFill>
             <a:tailEnd type="triangle" w="med" len="med"/>
           </a:ln>
@@ -4560,44 +4226,24 @@
       </p:cxnSp>
       <p:sp>
         <p:nvSpPr>
-          <p:cNvPr id="20" name="Rounded Rectangle 19"/>
-          <p:cNvSpPr/>
-          <p:nvPr/>
-        </p:nvSpPr>
-        <p:spPr>
-          <a:xfrm>
-            <a:off x="6263640" y="2523744"/>
-            <a:ext cx="5440680" cy="566928"/>
-          </a:xfrm>
-          <a:prstGeom prst="roundRect">
-            <a:avLst>
-              <a:gd name="adj" fmla="val 12000"/>
-            </a:avLst>
-          </a:prstGeom>
-          <a:solidFill>
-            <a:srgbClr val="F2F3F5"/>
-          </a:solidFill>
-          <a:ln>
-            <a:noFill/>
-          </a:ln>
-          <a:effectLst/>
-        </p:spPr>
-        <p:style>
-          <a:lnRef idx="1">
-            <a:schemeClr val="accent1"/>
-          </a:lnRef>
-          <a:fillRef idx="3">
-            <a:schemeClr val="accent1"/>
-          </a:fillRef>
-          <a:effectRef idx="2">
-            <a:schemeClr val="accent1"/>
-          </a:effectRef>
-          <a:fontRef idx="minor">
-            <a:schemeClr val="lt1"/>
-          </a:fontRef>
-        </p:style>
-        <p:txBody>
-          <a:bodyPr rtlCol="0" anchor="ctr" wrap="square" lIns="50800" rIns="50800" tIns="38100" bIns="38100"/>
+          <p:cNvPr id="12" name="TextBox 11"/>
+          <p:cNvSpPr txBox="1"/>
+          <p:nvPr/>
+        </p:nvSpPr>
+        <p:spPr>
+          <a:xfrm>
+            <a:off x="1188720" y="1737360"/>
+            <a:ext cx="2651760" cy="228600"/>
+          </a:xfrm>
+          <a:prstGeom prst="rect">
+            <a:avLst/>
+          </a:prstGeom>
+          <a:noFill/>
+        </p:spPr>
+        <p:txBody>
+          <a:bodyPr wrap="square" anchor="ctr" lIns="0" rIns="0" tIns="0" bIns="0">
+            <a:spAutoFit/>
+          </a:bodyPr>
           <a:lstStyle/>
           <a:p>
             <a:pPr algn="l">
@@ -4606,34 +4252,34 @@
               </a:lnSpc>
             </a:pPr>
             <a:r>
-              <a:rPr sz="1000" b="0">
-                <a:solidFill>
-                  <a:srgbClr val="22272B"/>
-                </a:solidFill>
-                <a:latin typeface="Calibri"/>
-              </a:rPr>
-              <a:t>ensure-ecr — idempotent, creates the registry if missing</a:t>
+              <a:rPr sz="850" b="1" i="0">
+                <a:solidFill>
+                  <a:srgbClr val="146EB4"/>
+                </a:solidFill>
+                <a:latin typeface="Calibri"/>
+              </a:rPr>
+              <a:t>graph(question) — in-process call</a:t>
             </a:r>
           </a:p>
         </p:txBody>
       </p:sp>
       <p:cxnSp>
         <p:nvCxnSpPr>
-          <p:cNvPr id="21" name="Connector 20"/>
+          <p:cNvPr id="13" name="Connector 12"/>
           <p:cNvCxnSpPr/>
           <p:nvPr/>
         </p:nvCxnSpPr>
         <p:spPr>
           <a:xfrm>
-            <a:off x="8961120" y="3090672"/>
-            <a:ext cx="0" cy="146304"/>
+            <a:off x="9098280" y="1421892"/>
+            <a:ext cx="0" cy="704087"/>
           </a:xfrm>
           <a:prstGeom prst="line">
             <a:avLst/>
           </a:prstGeom>
-          <a:ln w="22225">
+          <a:ln w="19050">
             <a:solidFill>
-              <a:srgbClr val="E87B00"/>
+              <a:srgbClr val="2E4157"/>
             </a:solidFill>
             <a:tailEnd type="triangle" w="med" len="med"/>
           </a:ln>
@@ -4653,82 +4299,23 @@
           </a:fontRef>
         </p:style>
       </p:cxnSp>
-      <p:sp>
-        <p:nvSpPr>
-          <p:cNvPr id="22" name="Rounded Rectangle 21"/>
-          <p:cNvSpPr/>
-          <p:nvPr/>
-        </p:nvSpPr>
-        <p:spPr>
-          <a:xfrm>
-            <a:off x="6263640" y="3236976"/>
-            <a:ext cx="5440680" cy="566928"/>
-          </a:xfrm>
-          <a:prstGeom prst="roundRect">
-            <a:avLst>
-              <a:gd name="adj" fmla="val 12000"/>
-            </a:avLst>
-          </a:prstGeom>
-          <a:solidFill>
-            <a:srgbClr val="F2F3F5"/>
-          </a:solidFill>
-          <a:ln>
-            <a:noFill/>
-          </a:ln>
-          <a:effectLst/>
-        </p:spPr>
-        <p:style>
-          <a:lnRef idx="1">
-            <a:schemeClr val="accent1"/>
-          </a:lnRef>
-          <a:fillRef idx="3">
-            <a:schemeClr val="accent1"/>
-          </a:fillRef>
-          <a:effectRef idx="2">
-            <a:schemeClr val="accent1"/>
-          </a:effectRef>
-          <a:fontRef idx="minor">
-            <a:schemeClr val="lt1"/>
-          </a:fontRef>
-        </p:style>
-        <p:txBody>
-          <a:bodyPr rtlCol="0" anchor="ctr" wrap="square" lIns="50800" rIns="50800" tIns="38100" bIns="38100"/>
-          <a:lstStyle/>
-          <a:p>
-            <a:pPr algn="l">
-              <a:lnSpc>
-                <a:spcPct val="100000"/>
-              </a:lnSpc>
-            </a:pPr>
-            <a:r>
-              <a:rPr sz="1000" b="0">
-                <a:solidFill>
-                  <a:srgbClr val="22272B"/>
-                </a:solidFill>
-                <a:latin typeface="Calibri"/>
-              </a:rPr>
-              <a:t>build-and-push (dev, from source) OR promote (crane copy, byte-identical image → staging/prod)</a:t>
-            </a:r>
-          </a:p>
-        </p:txBody>
-      </p:sp>
       <p:cxnSp>
         <p:nvCxnSpPr>
-          <p:cNvPr id="23" name="Connector 22"/>
+          <p:cNvPr id="14" name="Connector 13"/>
           <p:cNvCxnSpPr/>
           <p:nvPr/>
         </p:nvCxnSpPr>
         <p:spPr>
-          <a:xfrm>
-            <a:off x="8961120" y="3803904"/>
-            <a:ext cx="0" cy="146304"/>
+          <a:xfrm flipH="1">
+            <a:off x="8503920" y="2125979"/>
+            <a:ext cx="594360" cy="182881"/>
           </a:xfrm>
           <a:prstGeom prst="line">
             <a:avLst/>
           </a:prstGeom>
           <a:ln w="22225">
             <a:solidFill>
-              <a:srgbClr val="E87B00"/>
+              <a:srgbClr val="2E4157"/>
             </a:solidFill>
             <a:tailEnd type="triangle" w="med" len="med"/>
           </a:ln>
@@ -4750,22 +4337,61 @@
       </p:cxnSp>
       <p:sp>
         <p:nvSpPr>
-          <p:cNvPr id="24" name="Rounded Rectangle 23"/>
+          <p:cNvPr id="15" name="TextBox 14"/>
+          <p:cNvSpPr txBox="1"/>
+          <p:nvPr/>
+        </p:nvSpPr>
+        <p:spPr>
+          <a:xfrm>
+            <a:off x="7360920" y="2148840"/>
+            <a:ext cx="1691640" cy="228600"/>
+          </a:xfrm>
+          <a:prstGeom prst="rect">
+            <a:avLst/>
+          </a:prstGeom>
+          <a:noFill/>
+        </p:spPr>
+        <p:txBody>
+          <a:bodyPr wrap="square" anchor="ctr" lIns="0" rIns="0" tIns="0" bIns="0">
+            <a:spAutoFit/>
+          </a:bodyPr>
+          <a:lstStyle/>
+          <a:p>
+            <a:pPr algn="r">
+              <a:lnSpc>
+                <a:spcPct val="100000"/>
+              </a:lnSpc>
+            </a:pPr>
+            <a:r>
+              <a:rPr sz="850" b="1" i="0">
+                <a:solidFill>
+                  <a:srgbClr val="2E4157"/>
+                </a:solidFill>
+                <a:latin typeface="Calibri"/>
+              </a:rPr>
+              <a:t>get_model()</a:t>
+            </a:r>
+          </a:p>
+        </p:txBody>
+      </p:sp>
+      <p:sp>
+        <p:nvSpPr>
+          <p:cNvPr id="16" name="Rounded Rectangle 15"/>
           <p:cNvSpPr/>
           <p:nvPr/>
         </p:nvSpPr>
         <p:spPr>
           <a:xfrm>
-            <a:off x="6263640" y="3950208"/>
-            <a:ext cx="5440680" cy="566928"/>
+            <a:off x="320040" y="3291840"/>
+            <a:ext cx="2697480" cy="822960"/>
           </a:xfrm>
           <a:prstGeom prst="roundRect">
             <a:avLst>
-              <a:gd name="adj" fmla="val 12000"/>
+              <a:gd name="adj" fmla="val 8000"/>
             </a:avLst>
           </a:prstGeom>
           <a:solidFill>
-            <a:srgbClr val="F2F3F5"/>
+            <a:srgbClr val="146EB4"/>
           </a:solidFill>
           <a:ln>
             <a:noFill/>
@@ -4787,43 +4413,199 @@
           </a:fontRef>
         </p:style>
         <p:txBody>
-          <a:bodyPr rtlCol="0" anchor="ctr" wrap="square" lIns="50800" rIns="50800" tIns="38100" bIns="38100"/>
-          <a:lstStyle/>
-          <a:p>
-            <a:pPr algn="l">
-              <a:lnSpc>
-                <a:spcPct val="100000"/>
-              </a:lnSpc>
-            </a:pPr>
-            <a:r>
-              <a:rPr sz="1000" b="0">
-                <a:solidFill>
-                  <a:srgbClr val="22272B"/>
-                </a:solidFill>
-                <a:latin typeface="Calibri"/>
-              </a:rPr>
-              <a:t>terraform-apply — environment-scoped OIDC deploy role</a:t>
+          <a:bodyPr rtlCol="0" anchor="ctr" wrap="square" lIns="76200" rIns="76200" tIns="50800" bIns="50800"/>
+          <a:lstStyle/>
+          <a:p>
+            <a:pPr algn="ctr"/>
+            <a:r>
+              <a:rPr sz="1150" b="1">
+                <a:solidFill>
+                  <a:srgbClr val="FFFFFF"/>
+                </a:solidFill>
+                <a:latin typeface="Calibri"/>
+              </a:rPr>
+              <a:t>SQLite</a:t>
+            </a:r>
+          </a:p>
+          <a:p>
+            <a:pPr algn="ctr">
+              <a:spcBef>
+                <a:spcPts val="200"/>
+              </a:spcBef>
+            </a:pPr>
+            <a:r>
+              <a:rPr sz="850" b="0">
+                <a:solidFill>
+                  <a:srgbClr val="E6EEF6"/>
+                </a:solidFill>
+                <a:latin typeface="Calibri"/>
+              </a:rPr>
+              <a:t>Quantitative fund metrics
+(local_dev.db)</a:t>
+            </a:r>
+          </a:p>
+        </p:txBody>
+      </p:sp>
+      <p:sp>
+        <p:nvSpPr>
+          <p:cNvPr id="17" name="Rounded Rectangle 16"/>
+          <p:cNvSpPr/>
+          <p:nvPr/>
+        </p:nvSpPr>
+        <p:spPr>
+          <a:xfrm>
+            <a:off x="3429000" y="3291840"/>
+            <a:ext cx="5166360" cy="822960"/>
+          </a:xfrm>
+          <a:prstGeom prst="roundRect">
+            <a:avLst>
+              <a:gd name="adj" fmla="val 8000"/>
+            </a:avLst>
+          </a:prstGeom>
+          <a:solidFill>
+            <a:srgbClr val="146EB4"/>
+          </a:solidFill>
+          <a:ln>
+            <a:noFill/>
+          </a:ln>
+          <a:effectLst/>
+        </p:spPr>
+        <p:style>
+          <a:lnRef idx="1">
+            <a:schemeClr val="accent1"/>
+          </a:lnRef>
+          <a:fillRef idx="3">
+            <a:schemeClr val="accent1"/>
+          </a:fillRef>
+          <a:effectRef idx="2">
+            <a:schemeClr val="accent1"/>
+          </a:effectRef>
+          <a:fontRef idx="minor">
+            <a:schemeClr val="lt1"/>
+          </a:fontRef>
+        </p:style>
+        <p:txBody>
+          <a:bodyPr rtlCol="0" anchor="ctr" wrap="square" lIns="76200" rIns="76200" tIns="50800" bIns="50800"/>
+          <a:lstStyle/>
+          <a:p>
+            <a:pPr algn="ctr"/>
+            <a:r>
+              <a:rPr sz="1050" b="1">
+                <a:solidFill>
+                  <a:srgbClr val="FFFFFF"/>
+                </a:solidFill>
+                <a:latin typeface="Calibri"/>
+              </a:rPr>
+              <a:t>ChromaDB (persistent, on-disk)</a:t>
+            </a:r>
+          </a:p>
+          <a:p>
+            <a:pPr algn="ctr">
+              <a:spcBef>
+                <a:spcPts val="200"/>
+              </a:spcBef>
+            </a:pPr>
+            <a:r>
+              <a:rPr sz="850" b="0">
+                <a:solidFill>
+                  <a:srgbClr val="E6EEF6"/>
+                </a:solidFill>
+                <a:latin typeface="Calibri"/>
+              </a:rPr>
+              <a:t>RAG — qualitative fund-manager commentary  ·  data/chroma/  ·  all-MiniLM-L6-v2 embeddings</a:t>
+            </a:r>
+          </a:p>
+        </p:txBody>
+      </p:sp>
+      <p:sp>
+        <p:nvSpPr>
+          <p:cNvPr id="18" name="Rounded Rectangle 17"/>
+          <p:cNvSpPr/>
+          <p:nvPr/>
+        </p:nvSpPr>
+        <p:spPr>
+          <a:xfrm>
+            <a:off x="9006840" y="3291840"/>
+            <a:ext cx="2880360" cy="822960"/>
+          </a:xfrm>
+          <a:prstGeom prst="roundRect">
+            <a:avLst>
+              <a:gd name="adj" fmla="val 8000"/>
+            </a:avLst>
+          </a:prstGeom>
+          <a:solidFill>
+            <a:srgbClr val="146EB4"/>
+          </a:solidFill>
+          <a:ln>
+            <a:noFill/>
+          </a:ln>
+          <a:effectLst/>
+        </p:spPr>
+        <p:style>
+          <a:lnRef idx="1">
+            <a:schemeClr val="accent1"/>
+          </a:lnRef>
+          <a:fillRef idx="3">
+            <a:schemeClr val="accent1"/>
+          </a:fillRef>
+          <a:effectRef idx="2">
+            <a:schemeClr val="accent1"/>
+          </a:effectRef>
+          <a:fontRef idx="minor">
+            <a:schemeClr val="lt1"/>
+          </a:fontRef>
+        </p:style>
+        <p:txBody>
+          <a:bodyPr rtlCol="0" anchor="ctr" wrap="square" lIns="76200" rIns="76200" tIns="50800" bIns="50800"/>
+          <a:lstStyle/>
+          <a:p>
+            <a:pPr algn="ctr"/>
+            <a:r>
+              <a:rPr sz="1150" b="1">
+                <a:solidFill>
+                  <a:srgbClr val="FFFFFF"/>
+                </a:solidFill>
+                <a:latin typeface="Calibri"/>
+              </a:rPr>
+              <a:t>structlog</a:t>
+            </a:r>
+          </a:p>
+          <a:p>
+            <a:pPr algn="ctr">
+              <a:spcBef>
+                <a:spcPts val="200"/>
+              </a:spcBef>
+            </a:pPr>
+            <a:r>
+              <a:rPr sz="850" b="0">
+                <a:solidFill>
+                  <a:srgbClr val="E6EEF6"/>
+                </a:solidFill>
+                <a:latin typeface="Calibri"/>
+              </a:rPr>
+              <a:t>JSON/console logs, correlated
+via lifecycle hooks</a:t>
             </a:r>
           </a:p>
         </p:txBody>
       </p:sp>
       <p:cxnSp>
         <p:nvCxnSpPr>
-          <p:cNvPr id="25" name="Connector 24"/>
+          <p:cNvPr id="19" name="Connector 18"/>
           <p:cNvCxnSpPr/>
           <p:nvPr/>
         </p:nvCxnSpPr>
         <p:spPr>
-          <a:xfrm>
-            <a:off x="8961120" y="4517136"/>
-            <a:ext cx="0" cy="146304"/>
+          <a:xfrm flipH="1">
+            <a:off x="1668780" y="2834639"/>
+            <a:ext cx="4480560" cy="457201"/>
           </a:xfrm>
           <a:prstGeom prst="line">
             <a:avLst/>
           </a:prstGeom>
-          <a:ln w="22225">
+          <a:ln w="19050">
             <a:solidFill>
-              <a:srgbClr val="E87B00"/>
+              <a:srgbClr val="5A636E"/>
             </a:solidFill>
             <a:tailEnd type="triangle" w="med" len="med"/>
           </a:ln>
@@ -4843,24 +4625,96 @@
           </a:fontRef>
         </p:style>
       </p:cxnSp>
-      <p:sp>
-        <p:nvSpPr>
-          <p:cNvPr id="26" name="Rounded Rectangle 25"/>
+      <p:cxnSp>
+        <p:nvCxnSpPr>
+          <p:cNvPr id="20" name="Connector 19"/>
+          <p:cNvCxnSpPr/>
+          <p:nvPr/>
+        </p:nvCxnSpPr>
+        <p:spPr>
+          <a:xfrm flipH="1">
+            <a:off x="6012180" y="2834639"/>
+            <a:ext cx="137160" cy="457201"/>
+          </a:xfrm>
+          <a:prstGeom prst="line">
+            <a:avLst/>
+          </a:prstGeom>
+          <a:ln w="19050">
+            <a:solidFill>
+              <a:srgbClr val="5A636E"/>
+            </a:solidFill>
+            <a:tailEnd type="triangle" w="med" len="med"/>
+          </a:ln>
+        </p:spPr>
+        <p:style>
+          <a:lnRef idx="2">
+            <a:schemeClr val="accent1"/>
+          </a:lnRef>
+          <a:fillRef idx="0">
+            <a:schemeClr val="accent1"/>
+          </a:fillRef>
+          <a:effectRef idx="1">
+            <a:schemeClr val="accent1"/>
+          </a:effectRef>
+          <a:fontRef idx="minor">
+            <a:schemeClr val="tx1"/>
+          </a:fontRef>
+        </p:style>
+      </p:cxnSp>
+      <p:cxnSp>
+        <p:nvCxnSpPr>
+          <p:cNvPr id="21" name="Connector 20"/>
+          <p:cNvCxnSpPr/>
+          <p:nvPr/>
+        </p:nvCxnSpPr>
+        <p:spPr>
+          <a:xfrm>
+            <a:off x="6149340" y="2834639"/>
+            <a:ext cx="4297679" cy="457201"/>
+          </a:xfrm>
+          <a:prstGeom prst="line">
+            <a:avLst/>
+          </a:prstGeom>
+          <a:ln w="19050">
+            <a:solidFill>
+              <a:srgbClr val="5A636E"/>
+            </a:solidFill>
+            <a:tailEnd type="triangle" w="med" len="med"/>
+          </a:ln>
+        </p:spPr>
+        <p:style>
+          <a:lnRef idx="2">
+            <a:schemeClr val="accent1"/>
+          </a:lnRef>
+          <a:fillRef idx="0">
+            <a:schemeClr val="accent1"/>
+          </a:fillRef>
+          <a:effectRef idx="1">
+            <a:schemeClr val="accent1"/>
+          </a:effectRef>
+          <a:fontRef idx="minor">
+            <a:schemeClr val="tx1"/>
+          </a:fontRef>
+        </p:style>
+      </p:cxnSp>
+      <p:sp>
+        <p:nvSpPr>
+          <p:cNvPr id="22" name="Rounded Rectangle 21"/>
           <p:cNvSpPr/>
           <p:nvPr/>
         </p:nvSpPr>
         <p:spPr>
           <a:xfrm>
-            <a:off x="6263640" y="4663440"/>
-            <a:ext cx="5440680" cy="566928"/>
+            <a:off x="320040" y="4526280"/>
+            <a:ext cx="1737360" cy="731520"/>
           </a:xfrm>
           <a:prstGeom prst="roundRect">
             <a:avLst>
-              <a:gd name="adj" fmla="val 12000"/>
+              <a:gd name="adj" fmla="val 8000"/>
             </a:avLst>
           </a:prstGeom>
           <a:solidFill>
-            <a:srgbClr val="F2F3F5"/>
+            <a:srgbClr val="2E7D32"/>
           </a:solidFill>
           <a:ln>
             <a:noFill/>
@@ -4882,40 +4736,233 @@
           </a:fontRef>
         </p:style>
         <p:txBody>
-          <a:bodyPr rtlCol="0" anchor="ctr" wrap="square" lIns="50800" rIns="50800" tIns="38100" bIns="38100"/>
-          <a:lstStyle/>
-          <a:p>
-            <a:pPr algn="l">
-              <a:lnSpc>
-                <a:spcPct val="100000"/>
-              </a:lnSpc>
-            </a:pPr>
-            <a:r>
-              <a:rPr sz="1000" b="0">
-                <a:solidFill>
-                  <a:srgbClr val="22272B"/>
-                </a:solidFill>
-                <a:latin typeface="Calibri"/>
-              </a:rPr>
-              <a:t>GitHub Environment: deployment-branch restricted to main</a:t>
-            </a:r>
-          </a:p>
-        </p:txBody>
-      </p:sp>
-      <p:sp>
-        <p:nvSpPr>
-          <p:cNvPr id="27" name="Rounded Rectangle 26"/>
+          <a:bodyPr rtlCol="0" anchor="ctr" wrap="square" lIns="76200" rIns="76200" tIns="50800" bIns="50800"/>
+          <a:lstStyle/>
+          <a:p>
+            <a:pPr algn="ctr"/>
+            <a:r>
+              <a:rPr sz="1000" b="1">
+                <a:solidFill>
+                  <a:srgbClr val="FFFFFF"/>
+                </a:solidFill>
+                <a:latin typeface="Calibri"/>
+              </a:rPr>
+              <a:t>pydantic Settings</a:t>
+            </a:r>
+          </a:p>
+          <a:p>
+            <a:pPr algn="ctr">
+              <a:spcBef>
+                <a:spcPts val="200"/>
+              </a:spcBef>
+            </a:pPr>
+            <a:r>
+              <a:rPr sz="800" b="0">
+                <a:solidFill>
+                  <a:srgbClr val="E6EEF6"/>
+                </a:solidFill>
+                <a:latin typeface="Calibri"/>
+              </a:rPr>
+              <a:t>.env.dev (gitignored)</a:t>
+            </a:r>
+          </a:p>
+        </p:txBody>
+      </p:sp>
+      <p:sp>
+        <p:nvSpPr>
+          <p:cNvPr id="23" name="Rounded Rectangle 22"/>
           <p:cNvSpPr/>
           <p:nvPr/>
         </p:nvSpPr>
         <p:spPr>
           <a:xfrm>
-            <a:off x="457200" y="5440680"/>
-            <a:ext cx="11247120" cy="777240"/>
+            <a:off x="2194560" y="4526280"/>
+            <a:ext cx="1691640" cy="731520"/>
           </a:xfrm>
           <a:prstGeom prst="roundRect">
             <a:avLst>
-              <a:gd name="adj" fmla="val 6000"/>
+              <a:gd name="adj" fmla="val 8000"/>
+            </a:avLst>
+          </a:prstGeom>
+          <a:solidFill>
+            <a:srgbClr val="2E7D32"/>
+          </a:solidFill>
+          <a:ln>
+            <a:noFill/>
+          </a:ln>
+          <a:effectLst/>
+        </p:spPr>
+        <p:style>
+          <a:lnRef idx="1">
+            <a:schemeClr val="accent1"/>
+          </a:lnRef>
+          <a:fillRef idx="3">
+            <a:schemeClr val="accent1"/>
+          </a:fillRef>
+          <a:effectRef idx="2">
+            <a:schemeClr val="accent1"/>
+          </a:effectRef>
+          <a:fontRef idx="minor">
+            <a:schemeClr val="lt1"/>
+          </a:fontRef>
+        </p:style>
+        <p:txBody>
+          <a:bodyPr rtlCol="0" anchor="ctr" wrap="square" lIns="76200" rIns="76200" tIns="50800" bIns="50800"/>
+          <a:lstStyle/>
+          <a:p>
+            <a:pPr algn="ctr"/>
+            <a:r>
+              <a:rPr sz="1000" b="1">
+                <a:solidFill>
+                  <a:srgbClr val="FFFFFF"/>
+                </a:solidFill>
+                <a:latin typeface="Calibri"/>
+              </a:rPr>
+              <a:t>Lifecycle Hooks</a:t>
+            </a:r>
+          </a:p>
+          <a:p>
+            <a:pPr algn="ctr">
+              <a:spcBef>
+                <a:spcPts val="200"/>
+              </a:spcBef>
+            </a:pPr>
+            <a:r>
+              <a:rPr sz="800" b="0">
+                <a:solidFill>
+                  <a:srgbClr val="E6EEF6"/>
+                </a:solidFill>
+                <a:latin typeface="Calibri"/>
+              </a:rPr>
+              <a:t>observability/hooks.py</a:t>
+            </a:r>
+          </a:p>
+        </p:txBody>
+      </p:sp>
+      <p:sp>
+        <p:nvSpPr>
+          <p:cNvPr id="24" name="Rounded Rectangle 23"/>
+          <p:cNvSpPr/>
+          <p:nvPr/>
+        </p:nvSpPr>
+        <p:spPr>
+          <a:xfrm>
+            <a:off x="4023360" y="4526280"/>
+            <a:ext cx="1965960" cy="731520"/>
+          </a:xfrm>
+          <a:prstGeom prst="roundRect">
+            <a:avLst>
+              <a:gd name="adj" fmla="val 8000"/>
+            </a:avLst>
+          </a:prstGeom>
+          <a:solidFill>
+            <a:srgbClr val="2E7D32"/>
+          </a:solidFill>
+          <a:ln>
+            <a:noFill/>
+          </a:ln>
+          <a:effectLst/>
+        </p:spPr>
+        <p:style>
+          <a:lnRef idx="1">
+            <a:schemeClr val="accent1"/>
+          </a:lnRef>
+          <a:fillRef idx="3">
+            <a:schemeClr val="accent1"/>
+          </a:fillRef>
+          <a:effectRef idx="2">
+            <a:schemeClr val="accent1"/>
+          </a:effectRef>
+          <a:fontRef idx="minor">
+            <a:schemeClr val="lt1"/>
+          </a:fontRef>
+        </p:style>
+        <p:txBody>
+          <a:bodyPr rtlCol="0" anchor="ctr" wrap="square" lIns="76200" rIns="76200" tIns="50800" bIns="50800"/>
+          <a:lstStyle/>
+          <a:p>
+            <a:pPr algn="ctr"/>
+            <a:r>
+              <a:rPr sz="1000" b="1">
+                <a:solidFill>
+                  <a:srgbClr val="FFFFFF"/>
+                </a:solidFill>
+                <a:latin typeface="Calibri"/>
+              </a:rPr>
+              <a:t>Mock Fund Data</a:t>
+            </a:r>
+          </a:p>
+          <a:p>
+            <a:pPr algn="ctr">
+              <a:spcBef>
+                <a:spcPts val="200"/>
+              </a:spcBef>
+            </a:pPr>
+            <a:r>
+              <a:rPr sz="800" b="0">
+                <a:solidFill>
+                  <a:srgbClr val="E6EEF6"/>
+                </a:solidFill>
+                <a:latin typeface="Calibri"/>
+              </a:rPr>
+              <a:t>4 funds, seeded on startup</a:t>
+            </a:r>
+          </a:p>
+        </p:txBody>
+      </p:sp>
+      <p:sp>
+        <p:nvSpPr>
+          <p:cNvPr id="28" name="TextBox 27"/>
+          <p:cNvSpPr txBox="1"/>
+          <p:nvPr/>
+        </p:nvSpPr>
+        <p:spPr>
+          <a:xfrm>
+            <a:off x="320040" y="5303520"/>
+            <a:ext cx="3840480" cy="228600"/>
+          </a:xfrm>
+          <a:prstGeom prst="rect">
+            <a:avLst/>
+          </a:prstGeom>
+          <a:noFill/>
+        </p:spPr>
+        <p:txBody>
+          <a:bodyPr wrap="square" anchor="ctr" lIns="0" rIns="0" tIns="0" bIns="0">
+            <a:spAutoFit/>
+          </a:bodyPr>
+          <a:lstStyle/>
+          <a:p>
+            <a:pPr algn="l">
+              <a:lnSpc>
+                <a:spcPct val="100000"/>
+              </a:lnSpc>
+            </a:pPr>
+            <a:r>
+              <a:rPr sz="850" b="1" i="0">
+                <a:solidFill>
+                  <a:srgbClr val="2E7D32"/>
+                </a:solidFill>
+                <a:latin typeface="Calibri"/>
+              </a:rPr>
+              <a:t>loaded once at process startup — no external services required</a:t>
+            </a:r>
+          </a:p>
+        </p:txBody>
+      </p:sp>
+      <p:sp>
+        <p:nvSpPr>
+          <p:cNvPr id="31" name="Rounded Rectangle 30"/>
+          <p:cNvSpPr/>
+          <p:nvPr/>
+        </p:nvSpPr>
+        <p:spPr>
+          <a:xfrm>
+            <a:off x="320040" y="5623560"/>
+            <a:ext cx="11567160" cy="566928"/>
+          </a:xfrm>
+          <a:prstGeom prst="roundRect">
+            <a:avLst>
+              <a:gd name="adj" fmla="val 12000"/>
             </a:avLst>
           </a:prstGeom>
           <a:solidFill>
@@ -4944,7 +4991,7 @@
           <a:bodyPr rtlCol="0" anchor="ctr" wrap="square" lIns="50800" rIns="50800" tIns="38100" bIns="38100"/>
           <a:lstStyle/>
           <a:p>
-            <a:pPr algn="l">
+            <a:pPr algn="ctr">
               <a:lnSpc>
                 <a:spcPct val="100000"/>
               </a:lnSpc>
@@ -4956,21 +5003,21 @@
                 </a:solidFill>
                 <a:latin typeface="Calibri"/>
               </a:rPr>
-              <a:t>OIDC federated auth — no long-lived AWS keys ever stored in GitHub. One shared read-only plan role (repo-level) for PRs; one write-scoped deploy-&lt;env&gt; role per environment, trusted only for that environment's own workflow_dispatch job — proven end-to-end on Dev, incl. a cold-start redeploy from zero resources.</a:t>
-            </a:r>
-          </a:p>
-        </p:txBody>
-      </p:sp>
-      <p:sp>
-        <p:nvSpPr>
-          <p:cNvPr id="28" name="TextBox 27"/>
+              <a:t>pytest — unit suite (no LLM) + integration suite (marker `integration`, auto-skips if Ollama unreachable)      |      config.settings.get_settings() — single source of config, never os.getenv() directly</a:t>
+            </a:r>
+          </a:p>
+        </p:txBody>
+      </p:sp>
+      <p:sp>
+        <p:nvSpPr>
+          <p:cNvPr id="32" name="TextBox 31"/>
           <p:cNvSpPr txBox="1"/>
           <p:nvPr/>
         </p:nvSpPr>
         <p:spPr>
           <a:xfrm>
-            <a:off x="457200" y="6565392"/>
-            <a:ext cx="5486400" cy="256032"/>
+            <a:off x="320040" y="6309360"/>
+            <a:ext cx="11567160" cy="256032"/>
           </a:xfrm>
           <a:prstGeom prst="rect">
             <a:avLst/>
@@ -4989,27 +5036,27 @@
               </a:lnSpc>
             </a:pPr>
             <a:r>
-              <a:rPr sz="900" b="0" i="0">
+              <a:rPr sz="900" b="0" i="1">
                 <a:solidFill>
                   <a:srgbClr val="5A636E"/>
                 </a:solidFill>
                 <a:latin typeface="Calibri"/>
               </a:rPr>
-              <a:t>AMC RFP &amp; Portfolio Insight Orchestrator</a:t>
-            </a:r>
-          </a:p>
-        </p:txBody>
-      </p:sp>
-      <p:sp>
-        <p:nvSpPr>
-          <p:cNvPr id="29" name="TextBox 28"/>
+              <a:t>Same agent and tool code promotes unchanged to Phase 02 — only config.model_factory.get_model() and the data-layer facade change, nothing else.</a:t>
+            </a:r>
+          </a:p>
+        </p:txBody>
+      </p:sp>
+      <p:sp>
+        <p:nvSpPr>
+          <p:cNvPr id="33" name="TextBox 32"/>
           <p:cNvSpPr txBox="1"/>
           <p:nvPr/>
         </p:nvSpPr>
         <p:spPr>
           <a:xfrm>
-            <a:off x="9875520" y="6565392"/>
-            <a:ext cx="1874519" cy="256032"/>
+            <a:off x="457200" y="6565392"/>
+            <a:ext cx="5486400" cy="256032"/>
           </a:xfrm>
           <a:prstGeom prst="rect">
             <a:avLst/>
@@ -5022,6 +5069,45 @@
           </a:bodyPr>
           <a:lstStyle/>
           <a:p>
+            <a:pPr algn="l">
+              <a:lnSpc>
+                <a:spcPct val="100000"/>
+              </a:lnSpc>
+            </a:pPr>
+            <a:r>
+              <a:rPr sz="900" b="0" i="0">
+                <a:solidFill>
+                  <a:srgbClr val="5A636E"/>
+                </a:solidFill>
+                <a:latin typeface="Calibri"/>
+              </a:rPr>
+              <a:t>AMC RFP &amp; Portfolio Insight Orchestrator</a:t>
+            </a:r>
+          </a:p>
+        </p:txBody>
+      </p:sp>
+      <p:sp>
+        <p:nvSpPr>
+          <p:cNvPr id="34" name="TextBox 33"/>
+          <p:cNvSpPr txBox="1"/>
+          <p:nvPr/>
+        </p:nvSpPr>
+        <p:spPr>
+          <a:xfrm>
+            <a:off x="9875520" y="6565392"/>
+            <a:ext cx="1874519" cy="256032"/>
+          </a:xfrm>
+          <a:prstGeom prst="rect">
+            <a:avLst/>
+          </a:prstGeom>
+          <a:noFill/>
+        </p:spPr>
+        <p:txBody>
+          <a:bodyPr wrap="square" anchor="t" lIns="0" rIns="0" tIns="0" bIns="0">
+            <a:spAutoFit/>
+          </a:bodyPr>
+          <a:lstStyle/>
+          <a:p>
             <a:pPr algn="r">
               <a:lnSpc>
                 <a:spcPct val="100000"/>
@@ -5034,7 +5120,7 @@
                 </a:solidFill>
                 <a:latin typeface="Calibri"/>
               </a:rPr>
-              <a:t>10 / 15</a:t>
+              <a:t>10 / 17</a:t>
             </a:r>
           </a:p>
         </p:txBody>
@@ -5187,7 +5273,7 @@
                 </a:solidFill>
                 <a:latin typeface="Calibri"/>
               </a:rPr>
-              <a:t>SECTION 7</a:t>
+              <a:t>SECTION 15 · PHASE 02</a:t>
             </a:r>
           </a:p>
         </p:txBody>
@@ -5226,7 +5312,7 @@
                 </a:solidFill>
                 <a:latin typeface="Calibri"/>
               </a:rPr>
-              <a:t>Technology Stack &amp; Environment Strategy</a:t>
+              <a:t>Cloud Architecture — AWS Resources</a:t>
             </a:r>
           </a:p>
         </p:txBody>
@@ -5266,6 +5352,3049 @@
                 <a:latin typeface="Calibri"/>
               </a:rPr>
               <a:t>11</a:t>
+            </a:r>
+          </a:p>
+        </p:txBody>
+      </p:sp>
+      <p:sp>
+        <p:nvSpPr>
+          <p:cNvPr id="7" name="Rounded Rectangle 6"/>
+          <p:cNvSpPr/>
+          <p:nvPr/>
+        </p:nvSpPr>
+        <p:spPr>
+          <a:xfrm>
+            <a:off x="320040" y="1170432"/>
+            <a:ext cx="2788920" cy="566928"/>
+          </a:xfrm>
+          <a:prstGeom prst="roundRect">
+            <a:avLst>
+              <a:gd name="adj" fmla="val 8000"/>
+            </a:avLst>
+          </a:prstGeom>
+          <a:solidFill>
+            <a:srgbClr val="146EB4"/>
+          </a:solidFill>
+          <a:ln>
+            <a:noFill/>
+          </a:ln>
+          <a:effectLst/>
+        </p:spPr>
+        <p:style>
+          <a:lnRef idx="1">
+            <a:schemeClr val="accent1"/>
+          </a:lnRef>
+          <a:fillRef idx="3">
+            <a:schemeClr val="accent1"/>
+          </a:fillRef>
+          <a:effectRef idx="2">
+            <a:schemeClr val="accent1"/>
+          </a:effectRef>
+          <a:fontRef idx="minor">
+            <a:schemeClr val="lt1"/>
+          </a:fontRef>
+        </p:style>
+        <p:txBody>
+          <a:bodyPr rtlCol="0" anchor="ctr" wrap="square" lIns="76200" rIns="76200" tIns="50800" bIns="50800"/>
+          <a:lstStyle/>
+          <a:p>
+            <a:pPr algn="ctr"/>
+            <a:r>
+              <a:rPr sz="1050" b="1">
+                <a:solidFill>
+                  <a:srgbClr val="FFFFFF"/>
+                </a:solidFill>
+                <a:latin typeface="Calibri"/>
+              </a:rPr>
+              <a:t>Client Apps / Browser UI / REST API</a:t>
+            </a:r>
+          </a:p>
+          <a:p>
+            <a:pPr algn="ctr">
+              <a:spcBef>
+                <a:spcPts val="200"/>
+              </a:spcBef>
+            </a:pPr>
+            <a:r>
+              <a:rPr sz="800" b="0">
+                <a:solidFill>
+                  <a:srgbClr val="E6EEF6"/>
+                </a:solidFill>
+                <a:latin typeface="Calibri"/>
+              </a:rPr>
+              <a:t>boto3 invoke_agent_runtime (SigV4)</a:t>
+            </a:r>
+          </a:p>
+        </p:txBody>
+      </p:sp>
+      <p:sp>
+        <p:nvSpPr>
+          <p:cNvPr id="8" name="Rounded Rectangle 7"/>
+          <p:cNvSpPr/>
+          <p:nvPr/>
+        </p:nvSpPr>
+        <p:spPr>
+          <a:xfrm>
+            <a:off x="9098280" y="1170432"/>
+            <a:ext cx="2788920" cy="502920"/>
+          </a:xfrm>
+          <a:prstGeom prst="roundRect">
+            <a:avLst>
+              <a:gd name="adj" fmla="val 8000"/>
+            </a:avLst>
+          </a:prstGeom>
+          <a:solidFill>
+            <a:srgbClr val="2E4157"/>
+          </a:solidFill>
+          <a:ln>
+            <a:noFill/>
+          </a:ln>
+          <a:effectLst/>
+        </p:spPr>
+        <p:style>
+          <a:lnRef idx="1">
+            <a:schemeClr val="accent1"/>
+          </a:lnRef>
+          <a:fillRef idx="3">
+            <a:schemeClr val="accent1"/>
+          </a:fillRef>
+          <a:effectRef idx="2">
+            <a:schemeClr val="accent1"/>
+          </a:effectRef>
+          <a:fontRef idx="minor">
+            <a:schemeClr val="lt1"/>
+          </a:fontRef>
+        </p:style>
+        <p:txBody>
+          <a:bodyPr rtlCol="0" anchor="ctr" wrap="square" lIns="76200" rIns="76200" tIns="50800" bIns="50800"/>
+          <a:lstStyle/>
+          <a:p>
+            <a:pPr algn="ctr"/>
+            <a:r>
+              <a:rPr sz="1050" b="1">
+                <a:solidFill>
+                  <a:srgbClr val="FFFFFF"/>
+                </a:solidFill>
+                <a:latin typeface="Calibri"/>
+              </a:rPr>
+              <a:t>GitHub Actions CI/CD</a:t>
+            </a:r>
+          </a:p>
+          <a:p>
+            <a:pPr algn="ctr">
+              <a:spcBef>
+                <a:spcPts val="200"/>
+              </a:spcBef>
+            </a:pPr>
+            <a:r>
+              <a:rPr sz="800" b="0">
+                <a:solidFill>
+                  <a:srgbClr val="E6EEF6"/>
+                </a:solidFill>
+                <a:latin typeface="Calibri"/>
+              </a:rPr>
+              <a:t>OIDC — short-lived AWS credentials</a:t>
+            </a:r>
+          </a:p>
+        </p:txBody>
+      </p:sp>
+      <p:sp>
+        <p:nvSpPr>
+          <p:cNvPr id="9" name="Rounded Rectangle 8"/>
+          <p:cNvSpPr/>
+          <p:nvPr/>
+        </p:nvSpPr>
+        <p:spPr>
+          <a:xfrm>
+            <a:off x="9098280" y="1874519"/>
+            <a:ext cx="2788920" cy="502920"/>
+          </a:xfrm>
+          <a:prstGeom prst="roundRect">
+            <a:avLst>
+              <a:gd name="adj" fmla="val 8000"/>
+            </a:avLst>
+          </a:prstGeom>
+          <a:solidFill>
+            <a:srgbClr val="2E4157"/>
+          </a:solidFill>
+          <a:ln>
+            <a:noFill/>
+          </a:ln>
+          <a:effectLst/>
+        </p:spPr>
+        <p:style>
+          <a:lnRef idx="1">
+            <a:schemeClr val="accent1"/>
+          </a:lnRef>
+          <a:fillRef idx="3">
+            <a:schemeClr val="accent1"/>
+          </a:fillRef>
+          <a:effectRef idx="2">
+            <a:schemeClr val="accent1"/>
+          </a:effectRef>
+          <a:fontRef idx="minor">
+            <a:schemeClr val="lt1"/>
+          </a:fontRef>
+        </p:style>
+        <p:txBody>
+          <a:bodyPr rtlCol="0" anchor="ctr" wrap="square" lIns="76200" rIns="76200" tIns="50800" bIns="50800"/>
+          <a:lstStyle/>
+          <a:p>
+            <a:pPr algn="ctr"/>
+            <a:r>
+              <a:rPr sz="1050" b="1">
+                <a:solidFill>
+                  <a:srgbClr val="FFFFFF"/>
+                </a:solidFill>
+                <a:latin typeface="Calibri"/>
+              </a:rPr>
+              <a:t>Amazon ECR</a:t>
+            </a:r>
+          </a:p>
+          <a:p>
+            <a:pPr algn="ctr">
+              <a:spcBef>
+                <a:spcPts val="200"/>
+              </a:spcBef>
+            </a:pPr>
+            <a:r>
+              <a:rPr sz="800" b="0">
+                <a:solidFill>
+                  <a:srgbClr val="E6EEF6"/>
+                </a:solidFill>
+                <a:latin typeface="Calibri"/>
+              </a:rPr>
+              <a:t>Container images (build once, promote)</a:t>
+            </a:r>
+          </a:p>
+        </p:txBody>
+      </p:sp>
+      <p:sp>
+        <p:nvSpPr>
+          <p:cNvPr id="10" name="Rounded Rectangle 9"/>
+          <p:cNvSpPr/>
+          <p:nvPr/>
+        </p:nvSpPr>
+        <p:spPr>
+          <a:xfrm>
+            <a:off x="3794760" y="1783080"/>
+            <a:ext cx="4709160" cy="1051560"/>
+          </a:xfrm>
+          <a:prstGeom prst="roundRect">
+            <a:avLst>
+              <a:gd name="adj" fmla="val 8000"/>
+            </a:avLst>
+          </a:prstGeom>
+          <a:solidFill>
+            <a:srgbClr val="E87B00"/>
+          </a:solidFill>
+          <a:ln>
+            <a:noFill/>
+          </a:ln>
+          <a:effectLst/>
+        </p:spPr>
+        <p:style>
+          <a:lnRef idx="1">
+            <a:schemeClr val="accent1"/>
+          </a:lnRef>
+          <a:fillRef idx="3">
+            <a:schemeClr val="accent1"/>
+          </a:fillRef>
+          <a:effectRef idx="2">
+            <a:schemeClr val="accent1"/>
+          </a:effectRef>
+          <a:fontRef idx="minor">
+            <a:schemeClr val="lt1"/>
+          </a:fontRef>
+        </p:style>
+        <p:txBody>
+          <a:bodyPr rtlCol="0" anchor="ctr" wrap="square" lIns="76200" rIns="76200" tIns="50800" bIns="50800"/>
+          <a:lstStyle/>
+          <a:p>
+            <a:pPr algn="ctr"/>
+            <a:r>
+              <a:rPr sz="1300" b="1">
+                <a:solidFill>
+                  <a:srgbClr val="FFFFFF"/>
+                </a:solidFill>
+                <a:latin typeface="Calibri"/>
+              </a:rPr>
+              <a:t>Amazon Bedrock AgentCore Runtime</a:t>
+            </a:r>
+          </a:p>
+          <a:p>
+            <a:pPr algn="ctr">
+              <a:spcBef>
+                <a:spcPts val="200"/>
+              </a:spcBef>
+            </a:pPr>
+            <a:r>
+              <a:rPr sz="950" b="0">
+                <a:solidFill>
+                  <a:srgbClr val="E6EEF6"/>
+                </a:solidFill>
+                <a:latin typeface="Calibri"/>
+              </a:rPr>
+              <a:t>5-agent graph  ·  Public network mode  ·  IAM (SigV4) secured</a:t>
+            </a:r>
+          </a:p>
+        </p:txBody>
+      </p:sp>
+      <p:cxnSp>
+        <p:nvCxnSpPr>
+          <p:cNvPr id="11" name="Connector 10"/>
+          <p:cNvCxnSpPr/>
+          <p:nvPr/>
+        </p:nvCxnSpPr>
+        <p:spPr>
+          <a:xfrm>
+            <a:off x="3108960" y="1453896"/>
+            <a:ext cx="685800" cy="854964"/>
+          </a:xfrm>
+          <a:prstGeom prst="line">
+            <a:avLst/>
+          </a:prstGeom>
+          <a:ln w="22225">
+            <a:solidFill>
+              <a:srgbClr val="146EB4"/>
+            </a:solidFill>
+            <a:tailEnd type="triangle" w="med" len="med"/>
+          </a:ln>
+        </p:spPr>
+        <p:style>
+          <a:lnRef idx="2">
+            <a:schemeClr val="accent1"/>
+          </a:lnRef>
+          <a:fillRef idx="0">
+            <a:schemeClr val="accent1"/>
+          </a:fillRef>
+          <a:effectRef idx="1">
+            <a:schemeClr val="accent1"/>
+          </a:effectRef>
+          <a:fontRef idx="minor">
+            <a:schemeClr val="tx1"/>
+          </a:fontRef>
+        </p:style>
+      </p:cxnSp>
+      <p:sp>
+        <p:nvSpPr>
+          <p:cNvPr id="12" name="TextBox 11"/>
+          <p:cNvSpPr txBox="1"/>
+          <p:nvPr/>
+        </p:nvSpPr>
+        <p:spPr>
+          <a:xfrm>
+            <a:off x="1188720" y="1737360"/>
+            <a:ext cx="2651760" cy="228600"/>
+          </a:xfrm>
+          <a:prstGeom prst="rect">
+            <a:avLst/>
+          </a:prstGeom>
+          <a:noFill/>
+        </p:spPr>
+        <p:txBody>
+          <a:bodyPr wrap="square" anchor="ctr" lIns="0" rIns="0" tIns="0" bIns="0">
+            <a:spAutoFit/>
+          </a:bodyPr>
+          <a:lstStyle/>
+          <a:p>
+            <a:pPr algn="l">
+              <a:lnSpc>
+                <a:spcPct val="100000"/>
+              </a:lnSpc>
+            </a:pPr>
+            <a:r>
+              <a:rPr sz="850" b="1" i="0">
+                <a:solidFill>
+                  <a:srgbClr val="146EB4"/>
+                </a:solidFill>
+                <a:latin typeface="Calibri"/>
+              </a:rPr>
+              <a:t>SigV4 / IAM auth</a:t>
+            </a:r>
+          </a:p>
+        </p:txBody>
+      </p:sp>
+      <p:cxnSp>
+        <p:nvCxnSpPr>
+          <p:cNvPr id="13" name="Connector 12"/>
+          <p:cNvCxnSpPr/>
+          <p:nvPr/>
+        </p:nvCxnSpPr>
+        <p:spPr>
+          <a:xfrm>
+            <a:off x="9098280" y="1421892"/>
+            <a:ext cx="0" cy="704087"/>
+          </a:xfrm>
+          <a:prstGeom prst="line">
+            <a:avLst/>
+          </a:prstGeom>
+          <a:ln w="19050">
+            <a:solidFill>
+              <a:srgbClr val="2E4157"/>
+            </a:solidFill>
+            <a:tailEnd type="triangle" w="med" len="med"/>
+          </a:ln>
+        </p:spPr>
+        <p:style>
+          <a:lnRef idx="2">
+            <a:schemeClr val="accent1"/>
+          </a:lnRef>
+          <a:fillRef idx="0">
+            <a:schemeClr val="accent1"/>
+          </a:fillRef>
+          <a:effectRef idx="1">
+            <a:schemeClr val="accent1"/>
+          </a:effectRef>
+          <a:fontRef idx="minor">
+            <a:schemeClr val="tx1"/>
+          </a:fontRef>
+        </p:style>
+      </p:cxnSp>
+      <p:cxnSp>
+        <p:nvCxnSpPr>
+          <p:cNvPr id="14" name="Connector 13"/>
+          <p:cNvCxnSpPr/>
+          <p:nvPr/>
+        </p:nvCxnSpPr>
+        <p:spPr>
+          <a:xfrm flipH="1">
+            <a:off x="8503920" y="2125979"/>
+            <a:ext cx="594360" cy="182881"/>
+          </a:xfrm>
+          <a:prstGeom prst="line">
+            <a:avLst/>
+          </a:prstGeom>
+          <a:ln w="22225">
+            <a:solidFill>
+              <a:srgbClr val="2E4157"/>
+            </a:solidFill>
+            <a:tailEnd type="triangle" w="med" len="med"/>
+          </a:ln>
+        </p:spPr>
+        <p:style>
+          <a:lnRef idx="2">
+            <a:schemeClr val="accent1"/>
+          </a:lnRef>
+          <a:fillRef idx="0">
+            <a:schemeClr val="accent1"/>
+          </a:fillRef>
+          <a:effectRef idx="1">
+            <a:schemeClr val="accent1"/>
+          </a:effectRef>
+          <a:fontRef idx="minor">
+            <a:schemeClr val="tx1"/>
+          </a:fontRef>
+        </p:style>
+      </p:cxnSp>
+      <p:sp>
+        <p:nvSpPr>
+          <p:cNvPr id="15" name="TextBox 14"/>
+          <p:cNvSpPr txBox="1"/>
+          <p:nvPr/>
+        </p:nvSpPr>
+        <p:spPr>
+          <a:xfrm>
+            <a:off x="7360920" y="2148840"/>
+            <a:ext cx="1691640" cy="228600"/>
+          </a:xfrm>
+          <a:prstGeom prst="rect">
+            <a:avLst/>
+          </a:prstGeom>
+          <a:noFill/>
+        </p:spPr>
+        <p:txBody>
+          <a:bodyPr wrap="square" anchor="ctr" lIns="0" rIns="0" tIns="0" bIns="0">
+            <a:spAutoFit/>
+          </a:bodyPr>
+          <a:lstStyle/>
+          <a:p>
+            <a:pPr algn="r">
+              <a:lnSpc>
+                <a:spcPct val="100000"/>
+              </a:lnSpc>
+            </a:pPr>
+            <a:r>
+              <a:rPr sz="850" b="1" i="0">
+                <a:solidFill>
+                  <a:srgbClr val="2E4157"/>
+                </a:solidFill>
+                <a:latin typeface="Calibri"/>
+              </a:rPr>
+              <a:t>pull image</a:t>
+            </a:r>
+          </a:p>
+        </p:txBody>
+      </p:sp>
+      <p:sp>
+        <p:nvSpPr>
+          <p:cNvPr id="16" name="Rounded Rectangle 15"/>
+          <p:cNvSpPr/>
+          <p:nvPr/>
+        </p:nvSpPr>
+        <p:spPr>
+          <a:xfrm>
+            <a:off x="320040" y="3291840"/>
+            <a:ext cx="2697480" cy="822960"/>
+          </a:xfrm>
+          <a:prstGeom prst="roundRect">
+            <a:avLst>
+              <a:gd name="adj" fmla="val 8000"/>
+            </a:avLst>
+          </a:prstGeom>
+          <a:solidFill>
+            <a:srgbClr val="146EB4"/>
+          </a:solidFill>
+          <a:ln>
+            <a:noFill/>
+          </a:ln>
+          <a:effectLst/>
+        </p:spPr>
+        <p:style>
+          <a:lnRef idx="1">
+            <a:schemeClr val="accent1"/>
+          </a:lnRef>
+          <a:fillRef idx="3">
+            <a:schemeClr val="accent1"/>
+          </a:fillRef>
+          <a:effectRef idx="2">
+            <a:schemeClr val="accent1"/>
+          </a:effectRef>
+          <a:fontRef idx="minor">
+            <a:schemeClr val="lt1"/>
+          </a:fontRef>
+        </p:style>
+        <p:txBody>
+          <a:bodyPr rtlCol="0" anchor="ctr" wrap="square" lIns="76200" rIns="76200" tIns="50800" bIns="50800"/>
+          <a:lstStyle/>
+          <a:p>
+            <a:pPr algn="ctr"/>
+            <a:r>
+              <a:rPr sz="1150" b="1">
+                <a:solidFill>
+                  <a:srgbClr val="FFFFFF"/>
+                </a:solidFill>
+                <a:latin typeface="Calibri"/>
+              </a:rPr>
+              <a:t>Amazon DynamoDB</a:t>
+            </a:r>
+          </a:p>
+          <a:p>
+            <a:pPr algn="ctr">
+              <a:spcBef>
+                <a:spcPts val="200"/>
+              </a:spcBef>
+            </a:pPr>
+            <a:r>
+              <a:rPr sz="850" b="0">
+                <a:solidFill>
+                  <a:srgbClr val="E6EEF6"/>
+                </a:solidFill>
+                <a:latin typeface="Calibri"/>
+              </a:rPr>
+              <a:t>Quantitative fund metrics
+(pay-per-request)</a:t>
+            </a:r>
+          </a:p>
+        </p:txBody>
+      </p:sp>
+      <p:sp>
+        <p:nvSpPr>
+          <p:cNvPr id="17" name="Rounded Rectangle 16"/>
+          <p:cNvSpPr/>
+          <p:nvPr/>
+        </p:nvSpPr>
+        <p:spPr>
+          <a:xfrm>
+            <a:off x="3429000" y="3291840"/>
+            <a:ext cx="5166360" cy="822960"/>
+          </a:xfrm>
+          <a:prstGeom prst="roundRect">
+            <a:avLst>
+              <a:gd name="adj" fmla="val 8000"/>
+            </a:avLst>
+          </a:prstGeom>
+          <a:solidFill>
+            <a:srgbClr val="146EB4"/>
+          </a:solidFill>
+          <a:ln>
+            <a:noFill/>
+          </a:ln>
+          <a:effectLst/>
+        </p:spPr>
+        <p:style>
+          <a:lnRef idx="1">
+            <a:schemeClr val="accent1"/>
+          </a:lnRef>
+          <a:fillRef idx="3">
+            <a:schemeClr val="accent1"/>
+          </a:fillRef>
+          <a:effectRef idx="2">
+            <a:schemeClr val="accent1"/>
+          </a:effectRef>
+          <a:fontRef idx="minor">
+            <a:schemeClr val="lt1"/>
+          </a:fontRef>
+        </p:style>
+        <p:txBody>
+          <a:bodyPr rtlCol="0" anchor="ctr" wrap="square" lIns="76200" rIns="76200" tIns="50800" bIns="50800"/>
+          <a:lstStyle/>
+          <a:p>
+            <a:pPr algn="ctr"/>
+            <a:r>
+              <a:rPr sz="1050" b="1">
+                <a:solidFill>
+                  <a:srgbClr val="FFFFFF"/>
+                </a:solidFill>
+                <a:latin typeface="Calibri"/>
+              </a:rPr>
+              <a:t>OpenSearch Serverless / Amazon S3 Vectors
++ Amazon Bedrock Knowledge Base</a:t>
+            </a:r>
+          </a:p>
+          <a:p>
+            <a:pPr algn="ctr">
+              <a:spcBef>
+                <a:spcPts val="200"/>
+              </a:spcBef>
+            </a:pPr>
+            <a:r>
+              <a:rPr sz="850" b="0">
+                <a:solidFill>
+                  <a:srgbClr val="E6EEF6"/>
+                </a:solidFill>
+                <a:latin typeface="Calibri"/>
+              </a:rPr>
+              <a:t>RAG — qualitative fund-manager commentary retrieval</a:t>
+            </a:r>
+          </a:p>
+        </p:txBody>
+      </p:sp>
+      <p:sp>
+        <p:nvSpPr>
+          <p:cNvPr id="18" name="Rounded Rectangle 17"/>
+          <p:cNvSpPr/>
+          <p:nvPr/>
+        </p:nvSpPr>
+        <p:spPr>
+          <a:xfrm>
+            <a:off x="9006840" y="3291840"/>
+            <a:ext cx="2880360" cy="822960"/>
+          </a:xfrm>
+          <a:prstGeom prst="roundRect">
+            <a:avLst>
+              <a:gd name="adj" fmla="val 8000"/>
+            </a:avLst>
+          </a:prstGeom>
+          <a:solidFill>
+            <a:srgbClr val="146EB4"/>
+          </a:solidFill>
+          <a:ln>
+            <a:noFill/>
+          </a:ln>
+          <a:effectLst/>
+        </p:spPr>
+        <p:style>
+          <a:lnRef idx="1">
+            <a:schemeClr val="accent1"/>
+          </a:lnRef>
+          <a:fillRef idx="3">
+            <a:schemeClr val="accent1"/>
+          </a:fillRef>
+          <a:effectRef idx="2">
+            <a:schemeClr val="accent1"/>
+          </a:effectRef>
+          <a:fontRef idx="minor">
+            <a:schemeClr val="lt1"/>
+          </a:fontRef>
+        </p:style>
+        <p:txBody>
+          <a:bodyPr rtlCol="0" anchor="ctr" wrap="square" lIns="76200" rIns="76200" tIns="50800" bIns="50800"/>
+          <a:lstStyle/>
+          <a:p>
+            <a:pPr algn="ctr"/>
+            <a:r>
+              <a:rPr sz="1150" b="1">
+                <a:solidFill>
+                  <a:srgbClr val="FFFFFF"/>
+                </a:solidFill>
+                <a:latin typeface="Calibri"/>
+              </a:rPr>
+              <a:t>Amazon Bedrock</a:t>
+            </a:r>
+          </a:p>
+          <a:p>
+            <a:pPr algn="ctr">
+              <a:spcBef>
+                <a:spcPts val="200"/>
+              </a:spcBef>
+            </a:pPr>
+            <a:r>
+              <a:rPr sz="850" b="0">
+                <a:solidFill>
+                  <a:srgbClr val="E6EEF6"/>
+                </a:solidFill>
+                <a:latin typeface="Calibri"/>
+              </a:rPr>
+              <a:t>Foundation models — Claude 3.5
+Sonnet / Amazon Nova Lite</a:t>
+            </a:r>
+          </a:p>
+        </p:txBody>
+      </p:sp>
+      <p:cxnSp>
+        <p:nvCxnSpPr>
+          <p:cNvPr id="19" name="Connector 18"/>
+          <p:cNvCxnSpPr/>
+          <p:nvPr/>
+        </p:nvCxnSpPr>
+        <p:spPr>
+          <a:xfrm flipH="1">
+            <a:off x="1668780" y="2834639"/>
+            <a:ext cx="4480560" cy="457201"/>
+          </a:xfrm>
+          <a:prstGeom prst="line">
+            <a:avLst/>
+          </a:prstGeom>
+          <a:ln w="19050">
+            <a:solidFill>
+              <a:srgbClr val="5A636E"/>
+            </a:solidFill>
+            <a:tailEnd type="triangle" w="med" len="med"/>
+          </a:ln>
+        </p:spPr>
+        <p:style>
+          <a:lnRef idx="2">
+            <a:schemeClr val="accent1"/>
+          </a:lnRef>
+          <a:fillRef idx="0">
+            <a:schemeClr val="accent1"/>
+          </a:fillRef>
+          <a:effectRef idx="1">
+            <a:schemeClr val="accent1"/>
+          </a:effectRef>
+          <a:fontRef idx="minor">
+            <a:schemeClr val="tx1"/>
+          </a:fontRef>
+        </p:style>
+      </p:cxnSp>
+      <p:cxnSp>
+        <p:nvCxnSpPr>
+          <p:cNvPr id="20" name="Connector 19"/>
+          <p:cNvCxnSpPr/>
+          <p:nvPr/>
+        </p:nvCxnSpPr>
+        <p:spPr>
+          <a:xfrm flipH="1">
+            <a:off x="6012180" y="2834639"/>
+            <a:ext cx="137160" cy="457201"/>
+          </a:xfrm>
+          <a:prstGeom prst="line">
+            <a:avLst/>
+          </a:prstGeom>
+          <a:ln w="19050">
+            <a:solidFill>
+              <a:srgbClr val="5A636E"/>
+            </a:solidFill>
+            <a:tailEnd type="triangle" w="med" len="med"/>
+          </a:ln>
+        </p:spPr>
+        <p:style>
+          <a:lnRef idx="2">
+            <a:schemeClr val="accent1"/>
+          </a:lnRef>
+          <a:fillRef idx="0">
+            <a:schemeClr val="accent1"/>
+          </a:fillRef>
+          <a:effectRef idx="1">
+            <a:schemeClr val="accent1"/>
+          </a:effectRef>
+          <a:fontRef idx="minor">
+            <a:schemeClr val="tx1"/>
+          </a:fontRef>
+        </p:style>
+      </p:cxnSp>
+      <p:cxnSp>
+        <p:nvCxnSpPr>
+          <p:cNvPr id="21" name="Connector 20"/>
+          <p:cNvCxnSpPr/>
+          <p:nvPr/>
+        </p:nvCxnSpPr>
+        <p:spPr>
+          <a:xfrm>
+            <a:off x="6149340" y="2834639"/>
+            <a:ext cx="4297679" cy="457201"/>
+          </a:xfrm>
+          <a:prstGeom prst="line">
+            <a:avLst/>
+          </a:prstGeom>
+          <a:ln w="19050">
+            <a:solidFill>
+              <a:srgbClr val="5A636E"/>
+            </a:solidFill>
+            <a:tailEnd type="triangle" w="med" len="med"/>
+          </a:ln>
+        </p:spPr>
+        <p:style>
+          <a:lnRef idx="2">
+            <a:schemeClr val="accent1"/>
+          </a:lnRef>
+          <a:fillRef idx="0">
+            <a:schemeClr val="accent1"/>
+          </a:fillRef>
+          <a:effectRef idx="1">
+            <a:schemeClr val="accent1"/>
+          </a:effectRef>
+          <a:fontRef idx="minor">
+            <a:schemeClr val="tx1"/>
+          </a:fontRef>
+        </p:style>
+      </p:cxnSp>
+      <p:sp>
+        <p:nvSpPr>
+          <p:cNvPr id="22" name="Rounded Rectangle 21"/>
+          <p:cNvSpPr/>
+          <p:nvPr/>
+        </p:nvSpPr>
+        <p:spPr>
+          <a:xfrm>
+            <a:off x="320040" y="4526280"/>
+            <a:ext cx="1737360" cy="731520"/>
+          </a:xfrm>
+          <a:prstGeom prst="roundRect">
+            <a:avLst>
+              <a:gd name="adj" fmla="val 8000"/>
+            </a:avLst>
+          </a:prstGeom>
+          <a:solidFill>
+            <a:srgbClr val="2E7D32"/>
+          </a:solidFill>
+          <a:ln>
+            <a:noFill/>
+          </a:ln>
+          <a:effectLst/>
+        </p:spPr>
+        <p:style>
+          <a:lnRef idx="1">
+            <a:schemeClr val="accent1"/>
+          </a:lnRef>
+          <a:fillRef idx="3">
+            <a:schemeClr val="accent1"/>
+          </a:fillRef>
+          <a:effectRef idx="2">
+            <a:schemeClr val="accent1"/>
+          </a:effectRef>
+          <a:fontRef idx="minor">
+            <a:schemeClr val="lt1"/>
+          </a:fontRef>
+        </p:style>
+        <p:txBody>
+          <a:bodyPr rtlCol="0" anchor="ctr" wrap="square" lIns="76200" rIns="76200" tIns="50800" bIns="50800"/>
+          <a:lstStyle/>
+          <a:p>
+            <a:pPr algn="ctr"/>
+            <a:r>
+              <a:rPr sz="1000" b="1">
+                <a:solidFill>
+                  <a:srgbClr val="FFFFFF"/>
+                </a:solidFill>
+                <a:latin typeface="Calibri"/>
+              </a:rPr>
+              <a:t>S3 Docs Bucket</a:t>
+            </a:r>
+          </a:p>
+          <a:p>
+            <a:pPr algn="ctr">
+              <a:spcBef>
+                <a:spcPts val="200"/>
+              </a:spcBef>
+            </a:pPr>
+            <a:r>
+              <a:rPr sz="800" b="0">
+                <a:solidFill>
+                  <a:srgbClr val="E6EEF6"/>
+                </a:solidFill>
+                <a:latin typeface="Calibri"/>
+              </a:rPr>
+              <a:t>Source commentary docs</a:t>
+            </a:r>
+          </a:p>
+        </p:txBody>
+      </p:sp>
+      <p:sp>
+        <p:nvSpPr>
+          <p:cNvPr id="23" name="Rounded Rectangle 22"/>
+          <p:cNvSpPr/>
+          <p:nvPr/>
+        </p:nvSpPr>
+        <p:spPr>
+          <a:xfrm>
+            <a:off x="2194560" y="4526280"/>
+            <a:ext cx="1691640" cy="731520"/>
+          </a:xfrm>
+          <a:prstGeom prst="roundRect">
+            <a:avLst>
+              <a:gd name="adj" fmla="val 8000"/>
+            </a:avLst>
+          </a:prstGeom>
+          <a:solidFill>
+            <a:srgbClr val="2E7D32"/>
+          </a:solidFill>
+          <a:ln>
+            <a:noFill/>
+          </a:ln>
+          <a:effectLst/>
+        </p:spPr>
+        <p:style>
+          <a:lnRef idx="1">
+            <a:schemeClr val="accent1"/>
+          </a:lnRef>
+          <a:fillRef idx="3">
+            <a:schemeClr val="accent1"/>
+          </a:fillRef>
+          <a:effectRef idx="2">
+            <a:schemeClr val="accent1"/>
+          </a:effectRef>
+          <a:fontRef idx="minor">
+            <a:schemeClr val="lt1"/>
+          </a:fontRef>
+        </p:style>
+        <p:txBody>
+          <a:bodyPr rtlCol="0" anchor="ctr" wrap="square" lIns="76200" rIns="76200" tIns="50800" bIns="50800"/>
+          <a:lstStyle/>
+          <a:p>
+            <a:pPr algn="ctr"/>
+            <a:r>
+              <a:rPr sz="1000" b="1">
+                <a:solidFill>
+                  <a:srgbClr val="FFFFFF"/>
+                </a:solidFill>
+                <a:latin typeface="Calibri"/>
+              </a:rPr>
+              <a:t>SQS Queue + DLQ</a:t>
+            </a:r>
+          </a:p>
+          <a:p>
+            <a:pPr algn="ctr">
+              <a:spcBef>
+                <a:spcPts val="200"/>
+              </a:spcBef>
+            </a:pPr>
+            <a:r>
+              <a:rPr sz="800" b="0">
+                <a:solidFill>
+                  <a:srgbClr val="E6EEF6"/>
+                </a:solidFill>
+                <a:latin typeface="Calibri"/>
+              </a:rPr>
+              <a:t>Batches change events</a:t>
+            </a:r>
+          </a:p>
+        </p:txBody>
+      </p:sp>
+      <p:sp>
+        <p:nvSpPr>
+          <p:cNvPr id="24" name="Rounded Rectangle 23"/>
+          <p:cNvSpPr/>
+          <p:nvPr/>
+        </p:nvSpPr>
+        <p:spPr>
+          <a:xfrm>
+            <a:off x="4023360" y="4526280"/>
+            <a:ext cx="1965960" cy="731520"/>
+          </a:xfrm>
+          <a:prstGeom prst="roundRect">
+            <a:avLst>
+              <a:gd name="adj" fmla="val 8000"/>
+            </a:avLst>
+          </a:prstGeom>
+          <a:solidFill>
+            <a:srgbClr val="2E7D32"/>
+          </a:solidFill>
+          <a:ln>
+            <a:noFill/>
+          </a:ln>
+          <a:effectLst/>
+        </p:spPr>
+        <p:style>
+          <a:lnRef idx="1">
+            <a:schemeClr val="accent1"/>
+          </a:lnRef>
+          <a:fillRef idx="3">
+            <a:schemeClr val="accent1"/>
+          </a:fillRef>
+          <a:effectRef idx="2">
+            <a:schemeClr val="accent1"/>
+          </a:effectRef>
+          <a:fontRef idx="minor">
+            <a:schemeClr val="lt1"/>
+          </a:fontRef>
+        </p:style>
+        <p:txBody>
+          <a:bodyPr rtlCol="0" anchor="ctr" wrap="square" lIns="76200" rIns="76200" tIns="50800" bIns="50800"/>
+          <a:lstStyle/>
+          <a:p>
+            <a:pPr algn="ctr"/>
+            <a:r>
+              <a:rPr sz="1000" b="1">
+                <a:solidFill>
+                  <a:srgbClr val="FFFFFF"/>
+                </a:solidFill>
+                <a:latin typeface="Calibri"/>
+              </a:rPr>
+              <a:t>AWS Lambda</a:t>
+            </a:r>
+          </a:p>
+          <a:p>
+            <a:pPr algn="ctr">
+              <a:spcBef>
+                <a:spcPts val="200"/>
+              </a:spcBef>
+            </a:pPr>
+            <a:r>
+              <a:rPr sz="800" b="0">
+                <a:solidFill>
+                  <a:srgbClr val="E6EEF6"/>
+                </a:solidFill>
+                <a:latin typeface="Calibri"/>
+              </a:rPr>
+              <a:t>Triggers StartIngestionJob</a:t>
+            </a:r>
+          </a:p>
+        </p:txBody>
+      </p:sp>
+      <p:cxnSp>
+        <p:nvCxnSpPr>
+          <p:cNvPr id="25" name="Connector 24"/>
+          <p:cNvCxnSpPr/>
+          <p:nvPr/>
+        </p:nvCxnSpPr>
+        <p:spPr>
+          <a:xfrm>
+            <a:off x="2057400" y="4892040"/>
+            <a:ext cx="137160" cy="0"/>
+          </a:xfrm>
+          <a:prstGeom prst="line">
+            <a:avLst/>
+          </a:prstGeom>
+          <a:ln w="19050">
+            <a:solidFill>
+              <a:srgbClr val="2E7D32"/>
+            </a:solidFill>
+            <a:tailEnd type="triangle" w="med" len="med"/>
+          </a:ln>
+        </p:spPr>
+        <p:style>
+          <a:lnRef idx="2">
+            <a:schemeClr val="accent1"/>
+          </a:lnRef>
+          <a:fillRef idx="0">
+            <a:schemeClr val="accent1"/>
+          </a:fillRef>
+          <a:effectRef idx="1">
+            <a:schemeClr val="accent1"/>
+          </a:effectRef>
+          <a:fontRef idx="minor">
+            <a:schemeClr val="tx1"/>
+          </a:fontRef>
+        </p:style>
+      </p:cxnSp>
+      <p:cxnSp>
+        <p:nvCxnSpPr>
+          <p:cNvPr id="26" name="Connector 25"/>
+          <p:cNvCxnSpPr/>
+          <p:nvPr/>
+        </p:nvCxnSpPr>
+        <p:spPr>
+          <a:xfrm>
+            <a:off x="3886200" y="4892040"/>
+            <a:ext cx="137160" cy="0"/>
+          </a:xfrm>
+          <a:prstGeom prst="line">
+            <a:avLst/>
+          </a:prstGeom>
+          <a:ln w="19050">
+            <a:solidFill>
+              <a:srgbClr val="2E7D32"/>
+            </a:solidFill>
+            <a:tailEnd type="triangle" w="med" len="med"/>
+          </a:ln>
+        </p:spPr>
+        <p:style>
+          <a:lnRef idx="2">
+            <a:schemeClr val="accent1"/>
+          </a:lnRef>
+          <a:fillRef idx="0">
+            <a:schemeClr val="accent1"/>
+          </a:fillRef>
+          <a:effectRef idx="1">
+            <a:schemeClr val="accent1"/>
+          </a:effectRef>
+          <a:fontRef idx="minor">
+            <a:schemeClr val="tx1"/>
+          </a:fontRef>
+        </p:style>
+      </p:cxnSp>
+      <p:cxnSp>
+        <p:nvCxnSpPr>
+          <p:cNvPr id="27" name="Connector 26"/>
+          <p:cNvCxnSpPr/>
+          <p:nvPr/>
+        </p:nvCxnSpPr>
+        <p:spPr>
+          <a:xfrm flipH="1" flipV="1">
+            <a:off x="4526280" y="4114800"/>
+            <a:ext cx="480060" cy="411480"/>
+          </a:xfrm>
+          <a:prstGeom prst="line">
+            <a:avLst/>
+          </a:prstGeom>
+          <a:ln w="19050">
+            <a:solidFill>
+              <a:srgbClr val="2E7D32"/>
+            </a:solidFill>
+            <a:prstDash val="dash"/>
+            <a:tailEnd type="triangle" w="med" len="med"/>
+          </a:ln>
+        </p:spPr>
+        <p:style>
+          <a:lnRef idx="2">
+            <a:schemeClr val="accent1"/>
+          </a:lnRef>
+          <a:fillRef idx="0">
+            <a:schemeClr val="accent1"/>
+          </a:fillRef>
+          <a:effectRef idx="1">
+            <a:schemeClr val="accent1"/>
+          </a:effectRef>
+          <a:fontRef idx="minor">
+            <a:schemeClr val="tx1"/>
+          </a:fontRef>
+        </p:style>
+      </p:cxnSp>
+      <p:sp>
+        <p:nvSpPr>
+          <p:cNvPr id="28" name="TextBox 27"/>
+          <p:cNvSpPr txBox="1"/>
+          <p:nvPr/>
+        </p:nvSpPr>
+        <p:spPr>
+          <a:xfrm>
+            <a:off x="320040" y="5303520"/>
+            <a:ext cx="3840480" cy="228600"/>
+          </a:xfrm>
+          <a:prstGeom prst="rect">
+            <a:avLst/>
+          </a:prstGeom>
+          <a:noFill/>
+        </p:spPr>
+        <p:txBody>
+          <a:bodyPr wrap="square" anchor="ctr" lIns="0" rIns="0" tIns="0" bIns="0">
+            <a:spAutoFit/>
+          </a:bodyPr>
+          <a:lstStyle/>
+          <a:p>
+            <a:pPr algn="l">
+              <a:lnSpc>
+                <a:spcPct val="100000"/>
+              </a:lnSpc>
+            </a:pPr>
+            <a:r>
+              <a:rPr sz="850" b="1" i="0">
+                <a:solidFill>
+                  <a:srgbClr val="2E7D32"/>
+                </a:solidFill>
+                <a:latin typeface="Calibri"/>
+              </a:rPr>
+              <a:t>auto-sync ingestion (batched, async)</a:t>
+            </a:r>
+          </a:p>
+        </p:txBody>
+      </p:sp>
+      <p:sp>
+        <p:nvSpPr>
+          <p:cNvPr id="29" name="Rounded Rectangle 28"/>
+          <p:cNvSpPr/>
+          <p:nvPr/>
+        </p:nvSpPr>
+        <p:spPr>
+          <a:xfrm>
+            <a:off x="6446520" y="4526280"/>
+            <a:ext cx="2514600" cy="731520"/>
+          </a:xfrm>
+          <a:prstGeom prst="roundRect">
+            <a:avLst>
+              <a:gd name="adj" fmla="val 10000"/>
+            </a:avLst>
+          </a:prstGeom>
+          <a:solidFill>
+            <a:srgbClr val="FFFFFF"/>
+          </a:solidFill>
+          <a:ln w="15875">
+            <a:solidFill>
+              <a:srgbClr val="2E4157"/>
+            </a:solidFill>
+            <a:prstDash val="dash"/>
+          </a:ln>
+          <a:effectLst/>
+        </p:spPr>
+        <p:style>
+          <a:lnRef idx="1">
+            <a:schemeClr val="accent1"/>
+          </a:lnRef>
+          <a:fillRef idx="3">
+            <a:schemeClr val="accent1"/>
+          </a:fillRef>
+          <a:effectRef idx="2">
+            <a:schemeClr val="accent1"/>
+          </a:effectRef>
+          <a:fontRef idx="minor">
+            <a:schemeClr val="lt1"/>
+          </a:fontRef>
+        </p:style>
+        <p:txBody>
+          <a:bodyPr rtlCol="0" anchor="ctr" wrap="square" lIns="50800" rIns="50800" tIns="38100" bIns="38100"/>
+          <a:lstStyle/>
+          <a:p>
+            <a:pPr algn="ctr">
+              <a:lnSpc>
+                <a:spcPct val="100000"/>
+              </a:lnSpc>
+            </a:pPr>
+            <a:r>
+              <a:rPr sz="950" b="1">
+                <a:solidFill>
+                  <a:srgbClr val="2E4157"/>
+                </a:solidFill>
+                <a:latin typeface="Calibri"/>
+              </a:rPr>
+              <a:t>AgentCore Gateway + Lambda Targets</a:t>
+            </a:r>
+          </a:p>
+          <a:p>
+            <a:pPr algn="ctr">
+              <a:lnSpc>
+                <a:spcPct val="100000"/>
+              </a:lnSpc>
+            </a:pPr>
+            <a:r>
+              <a:rPr sz="950" b="1">
+                <a:solidFill>
+                  <a:srgbClr val="2E4157"/>
+                </a:solidFill>
+                <a:latin typeface="Calibri"/>
+              </a:rPr>
+              <a:t>(provisioned, not yet wired in)</a:t>
+            </a:r>
+          </a:p>
+        </p:txBody>
+      </p:sp>
+      <p:sp>
+        <p:nvSpPr>
+          <p:cNvPr id="30" name="Rounded Rectangle 29"/>
+          <p:cNvSpPr/>
+          <p:nvPr/>
+        </p:nvSpPr>
+        <p:spPr>
+          <a:xfrm>
+            <a:off x="9189720" y="4526280"/>
+            <a:ext cx="2697480" cy="731520"/>
+          </a:xfrm>
+          <a:prstGeom prst="roundRect">
+            <a:avLst>
+              <a:gd name="adj" fmla="val 10000"/>
+            </a:avLst>
+          </a:prstGeom>
+          <a:solidFill>
+            <a:srgbClr val="FFFFFF"/>
+          </a:solidFill>
+          <a:ln w="15875">
+            <a:solidFill>
+              <a:srgbClr val="2E4157"/>
+            </a:solidFill>
+            <a:prstDash val="dash"/>
+          </a:ln>
+          <a:effectLst/>
+        </p:spPr>
+        <p:style>
+          <a:lnRef idx="1">
+            <a:schemeClr val="accent1"/>
+          </a:lnRef>
+          <a:fillRef idx="3">
+            <a:schemeClr val="accent1"/>
+          </a:fillRef>
+          <a:effectRef idx="2">
+            <a:schemeClr val="accent1"/>
+          </a:effectRef>
+          <a:fontRef idx="minor">
+            <a:schemeClr val="lt1"/>
+          </a:fontRef>
+        </p:style>
+        <p:txBody>
+          <a:bodyPr rtlCol="0" anchor="ctr" wrap="square" lIns="50800" rIns="50800" tIns="38100" bIns="38100"/>
+          <a:lstStyle/>
+          <a:p>
+            <a:pPr algn="ctr">
+              <a:lnSpc>
+                <a:spcPct val="100000"/>
+              </a:lnSpc>
+            </a:pPr>
+            <a:r>
+              <a:rPr sz="950" b="1">
+                <a:solidFill>
+                  <a:srgbClr val="2E4157"/>
+                </a:solidFill>
+                <a:latin typeface="Calibri"/>
+              </a:rPr>
+              <a:t>AgentCore Memory</a:t>
+            </a:r>
+          </a:p>
+          <a:p>
+            <a:pPr algn="ctr">
+              <a:lnSpc>
+                <a:spcPct val="100000"/>
+              </a:lnSpc>
+            </a:pPr>
+            <a:r>
+              <a:rPr sz="950" b="1">
+                <a:solidFill>
+                  <a:srgbClr val="2E4157"/>
+                </a:solidFill>
+                <a:latin typeface="Calibri"/>
+              </a:rPr>
+              <a:t>(provisioned, not yet wired in)</a:t>
+            </a:r>
+          </a:p>
+        </p:txBody>
+      </p:sp>
+      <p:sp>
+        <p:nvSpPr>
+          <p:cNvPr id="31" name="Rounded Rectangle 30"/>
+          <p:cNvSpPr/>
+          <p:nvPr/>
+        </p:nvSpPr>
+        <p:spPr>
+          <a:xfrm>
+            <a:off x="320040" y="5623560"/>
+            <a:ext cx="11567160" cy="566928"/>
+          </a:xfrm>
+          <a:prstGeom prst="roundRect">
+            <a:avLst>
+              <a:gd name="adj" fmla="val 12000"/>
+            </a:avLst>
+          </a:prstGeom>
+          <a:solidFill>
+            <a:srgbClr val="232F3E"/>
+          </a:solidFill>
+          <a:ln>
+            <a:noFill/>
+          </a:ln>
+          <a:effectLst/>
+        </p:spPr>
+        <p:style>
+          <a:lnRef idx="1">
+            <a:schemeClr val="accent1"/>
+          </a:lnRef>
+          <a:fillRef idx="3">
+            <a:schemeClr val="accent1"/>
+          </a:fillRef>
+          <a:effectRef idx="2">
+            <a:schemeClr val="accent1"/>
+          </a:effectRef>
+          <a:fontRef idx="minor">
+            <a:schemeClr val="lt1"/>
+          </a:fontRef>
+        </p:style>
+        <p:txBody>
+          <a:bodyPr rtlCol="0" anchor="ctr" wrap="square" lIns="50800" rIns="50800" tIns="38100" bIns="38100"/>
+          <a:lstStyle/>
+          <a:p>
+            <a:pPr algn="ctr">
+              <a:lnSpc>
+                <a:spcPct val="100000"/>
+              </a:lnSpc>
+            </a:pPr>
+            <a:r>
+              <a:rPr sz="1050" b="0">
+                <a:solidFill>
+                  <a:srgbClr val="FFFFFF"/>
+                </a:solidFill>
+                <a:latin typeface="Calibri"/>
+              </a:rPr>
+              <a:t>Amazon CloudWatch — log groups, dashboard, error/throttle alarms      |      AWS IAM — one least-privilege role per component (Runtime, Knowledge Base, Lambda, CI/CD)</a:t>
+            </a:r>
+          </a:p>
+        </p:txBody>
+      </p:sp>
+      <p:sp>
+        <p:nvSpPr>
+          <p:cNvPr id="32" name="TextBox 31"/>
+          <p:cNvSpPr txBox="1"/>
+          <p:nvPr/>
+        </p:nvSpPr>
+        <p:spPr>
+          <a:xfrm>
+            <a:off x="320040" y="6309360"/>
+            <a:ext cx="11567160" cy="256032"/>
+          </a:xfrm>
+          <a:prstGeom prst="rect">
+            <a:avLst/>
+          </a:prstGeom>
+          <a:noFill/>
+        </p:spPr>
+        <p:txBody>
+          <a:bodyPr wrap="square" anchor="t" lIns="0" rIns="0" tIns="0" bIns="0">
+            <a:spAutoFit/>
+          </a:bodyPr>
+          <a:lstStyle/>
+          <a:p>
+            <a:pPr algn="l">
+              <a:lnSpc>
+                <a:spcPct val="100000"/>
+              </a:lnSpc>
+            </a:pPr>
+            <a:r>
+              <a:rPr sz="900" b="0" i="1">
+                <a:solidFill>
+                  <a:srgbClr val="5A636E"/>
+                </a:solidFill>
+                <a:latin typeface="Calibri"/>
+              </a:rPr>
+              <a:t>Every resource is a reusable Terraform module, instantiated per environment (Dev / Staging / Prod) from identical code — only configuration differs.</a:t>
+            </a:r>
+          </a:p>
+        </p:txBody>
+      </p:sp>
+      <p:sp>
+        <p:nvSpPr>
+          <p:cNvPr id="33" name="TextBox 32"/>
+          <p:cNvSpPr txBox="1"/>
+          <p:nvPr/>
+        </p:nvSpPr>
+        <p:spPr>
+          <a:xfrm>
+            <a:off x="457200" y="6565392"/>
+            <a:ext cx="5486400" cy="256032"/>
+          </a:xfrm>
+          <a:prstGeom prst="rect">
+            <a:avLst/>
+          </a:prstGeom>
+          <a:noFill/>
+        </p:spPr>
+        <p:txBody>
+          <a:bodyPr wrap="square" anchor="t" lIns="0" rIns="0" tIns="0" bIns="0">
+            <a:spAutoFit/>
+          </a:bodyPr>
+          <a:lstStyle/>
+          <a:p>
+            <a:pPr algn="l">
+              <a:lnSpc>
+                <a:spcPct val="100000"/>
+              </a:lnSpc>
+            </a:pPr>
+            <a:r>
+              <a:rPr sz="900" b="0" i="0">
+                <a:solidFill>
+                  <a:srgbClr val="5A636E"/>
+                </a:solidFill>
+                <a:latin typeface="Calibri"/>
+              </a:rPr>
+              <a:t>AMC RFP &amp; Portfolio Insight Orchestrator</a:t>
+            </a:r>
+          </a:p>
+        </p:txBody>
+      </p:sp>
+      <p:sp>
+        <p:nvSpPr>
+          <p:cNvPr id="34" name="TextBox 33"/>
+          <p:cNvSpPr txBox="1"/>
+          <p:nvPr/>
+        </p:nvSpPr>
+        <p:spPr>
+          <a:xfrm>
+            <a:off x="9875520" y="6565392"/>
+            <a:ext cx="1874519" cy="256032"/>
+          </a:xfrm>
+          <a:prstGeom prst="rect">
+            <a:avLst/>
+          </a:prstGeom>
+          <a:noFill/>
+        </p:spPr>
+        <p:txBody>
+          <a:bodyPr wrap="square" anchor="t" lIns="0" rIns="0" tIns="0" bIns="0">
+            <a:spAutoFit/>
+          </a:bodyPr>
+          <a:lstStyle/>
+          <a:p>
+            <a:pPr algn="r">
+              <a:lnSpc>
+                <a:spcPct val="100000"/>
+              </a:lnSpc>
+            </a:pPr>
+            <a:r>
+              <a:rPr sz="900" b="0" i="0">
+                <a:solidFill>
+                  <a:srgbClr val="5A636E"/>
+                </a:solidFill>
+                <a:latin typeface="Calibri"/>
+              </a:rPr>
+              <a:t>11 / 17</a:t>
+            </a:r>
+          </a:p>
+        </p:txBody>
+      </p:sp>
+    </p:spTree>
+  </p:cSld>
+  <p:clrMapOvr>
+    <a:masterClrMapping/>
+  </p:clrMapOvr>
+</p:sld>
+</file>
+
+<file path=ppt/slides/slide12.xml><?xml version="1.0" encoding="utf-8"?>
+<p:sld xmlns:a="http://schemas.openxmlformats.org/drawingml/2006/main" xmlns:p="http://schemas.openxmlformats.org/presentationml/2006/main" xmlns:r="http://schemas.openxmlformats.org/officeDocument/2006/relationships">
+  <p:cSld>
+    <p:bg>
+      <p:bgPr>
+        <a:solidFill>
+          <a:srgbClr val="FFFFFF"/>
+        </a:solidFill>
+        <a:effectLst/>
+      </p:bgPr>
+    </p:bg>
+    <p:spTree>
+      <p:nvGrpSpPr>
+        <p:cNvPr id="1" name=""/>
+        <p:cNvGrpSpPr/>
+        <p:nvPr/>
+      </p:nvGrpSpPr>
+      <p:grpSpPr/>
+      <p:sp>
+        <p:nvSpPr>
+          <p:cNvPr id="2" name="Rectangle 1"/>
+          <p:cNvSpPr/>
+          <p:nvPr/>
+        </p:nvSpPr>
+        <p:spPr>
+          <a:xfrm>
+            <a:off x="0" y="0"/>
+            <a:ext cx="12191695" cy="960120"/>
+          </a:xfrm>
+          <a:prstGeom prst="rect">
+            <a:avLst/>
+          </a:prstGeom>
+          <a:solidFill>
+            <a:srgbClr val="232F3E"/>
+          </a:solidFill>
+          <a:ln>
+            <a:noFill/>
+          </a:ln>
+          <a:effectLst/>
+        </p:spPr>
+        <p:style>
+          <a:lnRef idx="1">
+            <a:schemeClr val="accent1"/>
+          </a:lnRef>
+          <a:fillRef idx="3">
+            <a:schemeClr val="accent1"/>
+          </a:fillRef>
+          <a:effectRef idx="2">
+            <a:schemeClr val="accent1"/>
+          </a:effectRef>
+          <a:fontRef idx="minor">
+            <a:schemeClr val="lt1"/>
+          </a:fontRef>
+        </p:style>
+        <p:txBody>
+          <a:bodyPr rtlCol="0" anchor="ctr"/>
+          <a:lstStyle/>
+          <a:p>
+            <a:pPr algn="ctr"/>
+          </a:p>
+        </p:txBody>
+      </p:sp>
+      <p:sp>
+        <p:nvSpPr>
+          <p:cNvPr id="3" name="Rectangle 2"/>
+          <p:cNvSpPr/>
+          <p:nvPr/>
+        </p:nvSpPr>
+        <p:spPr>
+          <a:xfrm>
+            <a:off x="0" y="960120"/>
+            <a:ext cx="12191695" cy="38100"/>
+          </a:xfrm>
+          <a:prstGeom prst="rect">
+            <a:avLst/>
+          </a:prstGeom>
+          <a:solidFill>
+            <a:srgbClr val="FF9900"/>
+          </a:solidFill>
+          <a:ln>
+            <a:noFill/>
+          </a:ln>
+          <a:effectLst/>
+        </p:spPr>
+        <p:style>
+          <a:lnRef idx="1">
+            <a:schemeClr val="accent1"/>
+          </a:lnRef>
+          <a:fillRef idx="3">
+            <a:schemeClr val="accent1"/>
+          </a:fillRef>
+          <a:effectRef idx="2">
+            <a:schemeClr val="accent1"/>
+          </a:effectRef>
+          <a:fontRef idx="minor">
+            <a:schemeClr val="lt1"/>
+          </a:fontRef>
+        </p:style>
+        <p:txBody>
+          <a:bodyPr rtlCol="0" anchor="ctr"/>
+          <a:lstStyle/>
+          <a:p>
+            <a:pPr algn="ctr"/>
+          </a:p>
+        </p:txBody>
+      </p:sp>
+      <p:sp>
+        <p:nvSpPr>
+          <p:cNvPr id="4" name="TextBox 3"/>
+          <p:cNvSpPr txBox="1"/>
+          <p:nvPr/>
+        </p:nvSpPr>
+        <p:spPr>
+          <a:xfrm>
+            <a:off x="457200" y="109728"/>
+            <a:ext cx="10058400" cy="292608"/>
+          </a:xfrm>
+          <a:prstGeom prst="rect">
+            <a:avLst/>
+          </a:prstGeom>
+          <a:noFill/>
+        </p:spPr>
+        <p:txBody>
+          <a:bodyPr wrap="square" anchor="t" lIns="0" rIns="0" tIns="0" bIns="0">
+            <a:spAutoFit/>
+          </a:bodyPr>
+          <a:lstStyle/>
+          <a:p>
+            <a:pPr algn="l">
+              <a:lnSpc>
+                <a:spcPct val="100000"/>
+              </a:lnSpc>
+            </a:pPr>
+            <a:r>
+              <a:rPr sz="1200" b="1" i="0">
+                <a:solidFill>
+                  <a:srgbClr val="FF9900"/>
+                </a:solidFill>
+                <a:latin typeface="Calibri"/>
+              </a:rPr>
+              <a:t>SECTION 16 · PHASE 03</a:t>
+            </a:r>
+          </a:p>
+        </p:txBody>
+      </p:sp>
+      <p:sp>
+        <p:nvSpPr>
+          <p:cNvPr id="5" name="TextBox 4"/>
+          <p:cNvSpPr txBox="1"/>
+          <p:nvPr/>
+        </p:nvSpPr>
+        <p:spPr>
+          <a:xfrm>
+            <a:off x="457200" y="384048"/>
+            <a:ext cx="10332720" cy="548640"/>
+          </a:xfrm>
+          <a:prstGeom prst="rect">
+            <a:avLst/>
+          </a:prstGeom>
+          <a:noFill/>
+        </p:spPr>
+        <p:txBody>
+          <a:bodyPr wrap="square" anchor="t" lIns="0" rIns="0" tIns="0" bIns="0">
+            <a:spAutoFit/>
+          </a:bodyPr>
+          <a:lstStyle/>
+          <a:p>
+            <a:pPr algn="l">
+              <a:lnSpc>
+                <a:spcPct val="100000"/>
+              </a:lnSpc>
+            </a:pPr>
+            <a:r>
+              <a:rPr sz="2500" b="1" i="0">
+                <a:solidFill>
+                  <a:srgbClr val="FFFFFF"/>
+                </a:solidFill>
+                <a:latin typeface="Calibri"/>
+              </a:rPr>
+              <a:t>CI/CD Pipeline — Trigger to Live AWS Endpoint</a:t>
+            </a:r>
+          </a:p>
+        </p:txBody>
+      </p:sp>
+      <p:sp>
+        <p:nvSpPr>
+          <p:cNvPr id="6" name="TextBox 5"/>
+          <p:cNvSpPr txBox="1"/>
+          <p:nvPr/>
+        </p:nvSpPr>
+        <p:spPr>
+          <a:xfrm>
+            <a:off x="11247120" y="347472"/>
+            <a:ext cx="731520" cy="457200"/>
+          </a:xfrm>
+          <a:prstGeom prst="rect">
+            <a:avLst/>
+          </a:prstGeom>
+          <a:noFill/>
+        </p:spPr>
+        <p:txBody>
+          <a:bodyPr wrap="square" anchor="t" lIns="0" rIns="0" tIns="0" bIns="0">
+            <a:spAutoFit/>
+          </a:bodyPr>
+          <a:lstStyle/>
+          <a:p>
+            <a:pPr algn="r">
+              <a:lnSpc>
+                <a:spcPct val="100000"/>
+              </a:lnSpc>
+            </a:pPr>
+            <a:r>
+              <a:rPr sz="2000" b="1" i="0">
+                <a:solidFill>
+                  <a:srgbClr val="FF9900"/>
+                </a:solidFill>
+                <a:latin typeface="Calibri"/>
+              </a:rPr>
+              <a:t>12</a:t>
+            </a:r>
+          </a:p>
+        </p:txBody>
+      </p:sp>
+      <p:sp>
+        <p:nvSpPr>
+          <p:cNvPr id="30" name="TextBox 29"/>
+          <p:cNvSpPr txBox="1"/>
+          <p:nvPr/>
+        </p:nvSpPr>
+        <p:spPr>
+          <a:xfrm>
+            <a:off x="457200" y="1051560"/>
+            <a:ext cx="11277295" cy="411480"/>
+          </a:xfrm>
+          <a:prstGeom prst="rect">
+            <a:avLst/>
+          </a:prstGeom>
+          <a:noFill/>
+        </p:spPr>
+        <p:txBody>
+          <a:bodyPr wrap="square" lIns="0" rIns="0" tIns="0" bIns="0">
+            <a:spAutoFit/>
+          </a:bodyPr>
+          <a:lstStyle/>
+          <a:p>
+            <a:pPr algn="l"/>
+            <a:r>
+              <a:rPr sz="1200" i="0" b="0">
+                <a:solidFill>
+                  <a:srgbClr val="232F3E"/>
+                </a:solidFill>
+                <a:latin typeface="Calibri"/>
+              </a:rPr>
+              <a:t>From a developer's pull request or an operator's manual dispatch, through OIDC-authenticated Terraform, to a live endpoint end users can call.</a:t>
+            </a:r>
+          </a:p>
+        </p:txBody>
+      </p:sp>
+      <p:sp>
+        <p:nvSpPr>
+          <p:cNvPr id="31" name="Rounded Rectangle 30"/>
+          <p:cNvSpPr/>
+          <p:nvPr/>
+        </p:nvSpPr>
+        <p:spPr>
+          <a:xfrm>
+            <a:off x="457200" y="1554480"/>
+            <a:ext cx="5394960" cy="520000"/>
+          </a:xfrm>
+          <a:prstGeom prst="roundRect">
+            <a:avLst>
+              <a:gd name="adj" fmla="val 8000"/>
+            </a:avLst>
+          </a:prstGeom>
+          <a:solidFill>
+            <a:srgbClr val="146EB4"/>
+          </a:solidFill>
+          <a:ln>
+            <a:noFill/>
+          </a:ln>
+          <a:effectLst/>
+        </p:spPr>
+        <p:style>
+          <a:lnRef idx="1">
+            <a:schemeClr val="accent1"/>
+          </a:lnRef>
+          <a:fillRef idx="3">
+            <a:schemeClr val="accent1"/>
+          </a:fillRef>
+          <a:effectRef idx="2">
+            <a:schemeClr val="accent1"/>
+          </a:effectRef>
+          <a:fontRef idx="minor">
+            <a:schemeClr val="lt1"/>
+          </a:fontRef>
+        </p:style>
+        <p:txBody>
+          <a:bodyPr rtlCol="0" anchor="ctr" wrap="square" lIns="76200" rIns="76200" tIns="50800" bIns="50800"/>
+          <a:lstStyle/>
+          <a:p>
+            <a:pPr algn="ctr"/>
+            <a:r>
+              <a:rPr sz="1300" b="1">
+                <a:solidFill>
+                  <a:srgbClr val="FFFFFF"/>
+                </a:solidFill>
+                <a:latin typeface="Calibri"/>
+              </a:rPr>
+              <a:t>Developer — Pull Request</a:t>
+            </a:r>
+          </a:p>
+          <a:p>
+            <a:pPr algn="ctr"/>
+            <a:r>
+              <a:rPr sz="950" b="0">
+                <a:solidFill>
+                  <a:srgbClr val="E6EEF6"/>
+                </a:solidFill>
+                <a:latin typeface="Calibri"/>
+              </a:rPr>
+              <a:t>opened/updated against main  →  pr-validate.yml (automatic)</a:t>
+            </a:r>
+          </a:p>
+        </p:txBody>
+      </p:sp>
+      <p:sp>
+        <p:nvSpPr>
+          <p:cNvPr id="32" name="Rounded Rectangle 31"/>
+          <p:cNvSpPr/>
+          <p:nvPr/>
+        </p:nvSpPr>
+        <p:spPr>
+          <a:xfrm>
+            <a:off x="6263640" y="1554480"/>
+            <a:ext cx="5440680" cy="520000"/>
+          </a:xfrm>
+          <a:prstGeom prst="roundRect">
+            <a:avLst>
+              <a:gd name="adj" fmla="val 8000"/>
+            </a:avLst>
+          </a:prstGeom>
+          <a:solidFill>
+            <a:srgbClr val="146EB4"/>
+          </a:solidFill>
+          <a:ln>
+            <a:noFill/>
+          </a:ln>
+          <a:effectLst/>
+        </p:spPr>
+        <p:style>
+          <a:lnRef idx="1">
+            <a:schemeClr val="accent1"/>
+          </a:lnRef>
+          <a:fillRef idx="3">
+            <a:schemeClr val="accent1"/>
+          </a:fillRef>
+          <a:effectRef idx="2">
+            <a:schemeClr val="accent1"/>
+          </a:effectRef>
+          <a:fontRef idx="minor">
+            <a:schemeClr val="lt1"/>
+          </a:fontRef>
+        </p:style>
+        <p:txBody>
+          <a:bodyPr rtlCol="0" anchor="ctr" wrap="square" lIns="76200" rIns="76200" tIns="50800" bIns="50800"/>
+          <a:lstStyle/>
+          <a:p>
+            <a:pPr algn="ctr"/>
+            <a:r>
+              <a:rPr sz="1300" b="1">
+                <a:solidFill>
+                  <a:srgbClr val="FFFFFF"/>
+                </a:solidFill>
+                <a:latin typeface="Calibri"/>
+              </a:rPr>
+              <a:t>Operator — Manual Dispatch</a:t>
+            </a:r>
+          </a:p>
+          <a:p>
+            <a:pPr algn="ctr"/>
+            <a:r>
+              <a:rPr sz="950" b="0">
+                <a:solidFill>
+                  <a:srgbClr val="E6EEF6"/>
+                </a:solidFill>
+                <a:latin typeface="Calibri"/>
+              </a:rPr>
+              <a:t>workflow_dispatch: environment = dev / staging / prod  →  deploy.yml</a:t>
+            </a:r>
+          </a:p>
+        </p:txBody>
+      </p:sp>
+      <p:sp>
+        <p:nvSpPr>
+          <p:cNvPr id="33" name="Rounded Rectangle 32"/>
+          <p:cNvSpPr/>
+          <p:nvPr/>
+        </p:nvSpPr>
+        <p:spPr>
+          <a:xfrm>
+            <a:off x="457200" y="2334480"/>
+            <a:ext cx="11247120" cy="560000"/>
+          </a:xfrm>
+          <a:prstGeom prst="roundRect">
+            <a:avLst>
+              <a:gd name="adj" fmla="val 8000"/>
+            </a:avLst>
+          </a:prstGeom>
+          <a:solidFill>
+            <a:srgbClr val="2E4157"/>
+          </a:solidFill>
+          <a:ln>
+            <a:noFill/>
+          </a:ln>
+          <a:effectLst/>
+        </p:spPr>
+        <p:style>
+          <a:lnRef idx="1">
+            <a:schemeClr val="accent1"/>
+          </a:lnRef>
+          <a:fillRef idx="3">
+            <a:schemeClr val="accent1"/>
+          </a:fillRef>
+          <a:effectRef idx="2">
+            <a:schemeClr val="accent1"/>
+          </a:effectRef>
+          <a:fontRef idx="minor">
+            <a:schemeClr val="lt1"/>
+          </a:fontRef>
+        </p:style>
+        <p:txBody>
+          <a:bodyPr rtlCol="0" anchor="ctr" wrap="square" lIns="76200" rIns="76200" tIns="50800" bIns="50800"/>
+          <a:lstStyle/>
+          <a:p>
+            <a:pPr algn="ctr"/>
+            <a:r>
+              <a:rPr sz="1300" b="1">
+                <a:solidFill>
+                  <a:srgbClr val="FFFFFF"/>
+                </a:solidFill>
+                <a:latin typeface="Calibri"/>
+              </a:rPr>
+              <a:t>GitHub Actions — OIDC Federated Auth</a:t>
+            </a:r>
+          </a:p>
+          <a:p>
+            <a:pPr algn="ctr"/>
+            <a:r>
+              <a:rPr sz="950" b="0">
+                <a:solidFill>
+                  <a:srgbClr val="E6EEF6"/>
+                </a:solidFill>
+                <a:latin typeface="Calibri"/>
+              </a:rPr>
+              <a:t>Short-lived AWS credentials via token.actions.githubusercontent.com — no long-lived keys ever stored in GitHub</a:t>
+            </a:r>
+          </a:p>
+        </p:txBody>
+      </p:sp>
+      <p:cxnSp>
+        <p:nvCxnSpPr>
+          <p:cNvPr id="34" name="Connector 33"/>
+          <p:cNvCxnSpPr/>
+          <p:nvPr/>
+        </p:nvCxnSpPr>
+        <p:spPr>
+          <a:xfrm>
+            <a:off x="3154680" y="2074480"/>
+            <a:ext cx="0" cy="260000"/>
+          </a:xfrm>
+          <a:prstGeom prst="line">
+            <a:avLst/>
+          </a:prstGeom>
+          <a:ln w="22225">
+            <a:solidFill>
+              <a:srgbClr val="146EB4"/>
+            </a:solidFill>
+            <a:tailEnd type="triangle" w="med" len="med"/>
+          </a:ln>
+        </p:spPr>
+        <p:style>
+          <a:lnRef idx="2">
+            <a:schemeClr val="accent1"/>
+          </a:lnRef>
+          <a:fillRef idx="0">
+            <a:schemeClr val="accent1"/>
+          </a:fillRef>
+          <a:effectRef idx="1">
+            <a:schemeClr val="accent1"/>
+          </a:effectRef>
+          <a:fontRef idx="minor">
+            <a:schemeClr val="tx1"/>
+          </a:fontRef>
+        </p:style>
+      </p:cxnSp>
+      <p:cxnSp>
+        <p:nvCxnSpPr>
+          <p:cNvPr id="35" name="Connector 34"/>
+          <p:cNvCxnSpPr/>
+          <p:nvPr/>
+        </p:nvCxnSpPr>
+        <p:spPr>
+          <a:xfrm>
+            <a:off x="8983980" y="2074480"/>
+            <a:ext cx="0" cy="260000"/>
+          </a:xfrm>
+          <a:prstGeom prst="line">
+            <a:avLst/>
+          </a:prstGeom>
+          <a:ln w="22225">
+            <a:solidFill>
+              <a:srgbClr val="146EB4"/>
+            </a:solidFill>
+            <a:tailEnd type="triangle" w="med" len="med"/>
+          </a:ln>
+        </p:spPr>
+        <p:style>
+          <a:lnRef idx="2">
+            <a:schemeClr val="accent1"/>
+          </a:lnRef>
+          <a:fillRef idx="0">
+            <a:schemeClr val="accent1"/>
+          </a:fillRef>
+          <a:effectRef idx="1">
+            <a:schemeClr val="accent1"/>
+          </a:effectRef>
+          <a:fontRef idx="minor">
+            <a:schemeClr val="tx1"/>
+          </a:fontRef>
+        </p:style>
+      </p:cxnSp>
+      <p:sp>
+        <p:nvSpPr>
+          <p:cNvPr id="36" name="Rounded Rectangle 35"/>
+          <p:cNvSpPr/>
+          <p:nvPr/>
+        </p:nvSpPr>
+        <p:spPr>
+          <a:xfrm>
+            <a:off x="457200" y="3054480"/>
+            <a:ext cx="11247120" cy="650000"/>
+          </a:xfrm>
+          <a:prstGeom prst="roundRect">
+            <a:avLst>
+              <a:gd name="adj" fmla="val 8000"/>
+            </a:avLst>
+          </a:prstGeom>
+          <a:solidFill>
+            <a:srgbClr val="E87B00"/>
+          </a:solidFill>
+          <a:ln>
+            <a:noFill/>
+          </a:ln>
+          <a:effectLst/>
+        </p:spPr>
+        <p:style>
+          <a:lnRef idx="1">
+            <a:schemeClr val="accent1"/>
+          </a:lnRef>
+          <a:fillRef idx="3">
+            <a:schemeClr val="accent1"/>
+          </a:fillRef>
+          <a:effectRef idx="2">
+            <a:schemeClr val="accent1"/>
+          </a:effectRef>
+          <a:fontRef idx="minor">
+            <a:schemeClr val="lt1"/>
+          </a:fontRef>
+        </p:style>
+        <p:txBody>
+          <a:bodyPr rtlCol="0" anchor="ctr" wrap="square" lIns="76200" rIns="76200" tIns="50800" bIns="50800"/>
+          <a:lstStyle/>
+          <a:p>
+            <a:pPr algn="ctr"/>
+            <a:r>
+              <a:rPr sz="1350" b="1">
+                <a:solidFill>
+                  <a:srgbClr val="FFFFFF"/>
+                </a:solidFill>
+                <a:latin typeface="Calibri"/>
+              </a:rPr>
+              <a:t>ensure-ecr  →  build-and-push (dev) / promote (staging &amp; prod)  →  terraform-apply</a:t>
+            </a:r>
+          </a:p>
+          <a:p>
+            <a:pPr algn="ctr"/>
+            <a:r>
+              <a:rPr sz="950" b="0">
+                <a:solidFill>
+                  <a:srgbClr val="E6EEF6"/>
+                </a:solidFill>
+                <a:latin typeface="Calibri"/>
+              </a:rPr>
+              <a:t>Build once, promote the byte-identical image; Terraform provisions/updates the AWS footprint</a:t>
+            </a:r>
+          </a:p>
+        </p:txBody>
+      </p:sp>
+      <p:cxnSp>
+        <p:nvCxnSpPr>
+          <p:cNvPr id="37" name="Connector 36"/>
+          <p:cNvCxnSpPr/>
+          <p:nvPr/>
+        </p:nvCxnSpPr>
+        <p:spPr>
+          <a:xfrm>
+            <a:off x="6080760" y="2894480"/>
+            <a:ext cx="0" cy="160000"/>
+          </a:xfrm>
+          <a:prstGeom prst="line">
+            <a:avLst/>
+          </a:prstGeom>
+          <a:ln w="22225">
+            <a:solidFill>
+              <a:srgbClr val="2E4157"/>
+            </a:solidFill>
+            <a:tailEnd type="triangle" w="med" len="med"/>
+          </a:ln>
+        </p:spPr>
+        <p:style>
+          <a:lnRef idx="2">
+            <a:schemeClr val="accent1"/>
+          </a:lnRef>
+          <a:fillRef idx="0">
+            <a:schemeClr val="accent1"/>
+          </a:fillRef>
+          <a:effectRef idx="1">
+            <a:schemeClr val="accent1"/>
+          </a:effectRef>
+          <a:fontRef idx="minor">
+            <a:schemeClr val="tx1"/>
+          </a:fontRef>
+        </p:style>
+      </p:cxnSp>
+      <p:sp>
+        <p:nvSpPr>
+          <p:cNvPr id="38" name="Rounded Rectangle 37"/>
+          <p:cNvSpPr/>
+          <p:nvPr/>
+        </p:nvSpPr>
+        <p:spPr>
+          <a:xfrm>
+            <a:off x="457200" y="3954480"/>
+            <a:ext cx="2674620" cy="750000"/>
+          </a:xfrm>
+          <a:prstGeom prst="roundRect">
+            <a:avLst>
+              <a:gd name="adj" fmla="val 8000"/>
+            </a:avLst>
+          </a:prstGeom>
+          <a:solidFill>
+            <a:srgbClr val="146EB4"/>
+          </a:solidFill>
+          <a:ln>
+            <a:noFill/>
+          </a:ln>
+          <a:effectLst/>
+        </p:spPr>
+        <p:style>
+          <a:lnRef idx="1">
+            <a:schemeClr val="accent1"/>
+          </a:lnRef>
+          <a:fillRef idx="3">
+            <a:schemeClr val="accent1"/>
+          </a:fillRef>
+          <a:effectRef idx="2">
+            <a:schemeClr val="accent1"/>
+          </a:effectRef>
+          <a:fontRef idx="minor">
+            <a:schemeClr val="lt1"/>
+          </a:fontRef>
+        </p:style>
+        <p:txBody>
+          <a:bodyPr rtlCol="0" anchor="ctr" wrap="square" lIns="76200" rIns="76200" tIns="50800" bIns="50800"/>
+          <a:lstStyle/>
+          <a:p>
+            <a:pPr algn="ctr"/>
+            <a:r>
+              <a:rPr sz="1100" b="1">
+                <a:solidFill>
+                  <a:srgbClr val="FFFFFF"/>
+                </a:solidFill>
+                <a:latin typeface="Calibri"/>
+              </a:rPr>
+              <a:t>Amazon ECR</a:t>
+            </a:r>
+          </a:p>
+          <a:p>
+            <a:pPr algn="ctr"/>
+            <a:r>
+              <a:rPr sz="850" b="0">
+                <a:solidFill>
+                  <a:srgbClr val="E6EEF6"/>
+                </a:solidFill>
+                <a:latin typeface="Calibri"/>
+              </a:rPr>
+              <a:t>Container images</a:t>
+            </a:r>
+          </a:p>
+        </p:txBody>
+      </p:sp>
+      <p:sp>
+        <p:nvSpPr>
+          <p:cNvPr id="39" name="Rounded Rectangle 38"/>
+          <p:cNvSpPr/>
+          <p:nvPr/>
+        </p:nvSpPr>
+        <p:spPr>
+          <a:xfrm>
+            <a:off x="3314700" y="3954480"/>
+            <a:ext cx="2674620" cy="750000"/>
+          </a:xfrm>
+          <a:prstGeom prst="roundRect">
+            <a:avLst>
+              <a:gd name="adj" fmla="val 8000"/>
+            </a:avLst>
+          </a:prstGeom>
+          <a:solidFill>
+            <a:srgbClr val="146EB4"/>
+          </a:solidFill>
+          <a:ln>
+            <a:noFill/>
+          </a:ln>
+          <a:effectLst/>
+        </p:spPr>
+        <p:style>
+          <a:lnRef idx="1">
+            <a:schemeClr val="accent1"/>
+          </a:lnRef>
+          <a:fillRef idx="3">
+            <a:schemeClr val="accent1"/>
+          </a:fillRef>
+          <a:effectRef idx="2">
+            <a:schemeClr val="accent1"/>
+          </a:effectRef>
+          <a:fontRef idx="minor">
+            <a:schemeClr val="lt1"/>
+          </a:fontRef>
+        </p:style>
+        <p:txBody>
+          <a:bodyPr rtlCol="0" anchor="ctr" wrap="square" lIns="76200" rIns="76200" tIns="50800" bIns="50800"/>
+          <a:lstStyle/>
+          <a:p>
+            <a:pPr algn="ctr"/>
+            <a:r>
+              <a:rPr sz="1100" b="1">
+                <a:solidFill>
+                  <a:srgbClr val="FFFFFF"/>
+                </a:solidFill>
+                <a:latin typeface="Calibri"/>
+              </a:rPr>
+              <a:t>AgentCore Runtime / Gateway / Memory</a:t>
+            </a:r>
+          </a:p>
+          <a:p>
+            <a:pPr algn="ctr"/>
+            <a:r>
+              <a:rPr sz="850" b="0">
+                <a:solidFill>
+                  <a:srgbClr val="E6EEF6"/>
+                </a:solidFill>
+                <a:latin typeface="Calibri"/>
+              </a:rPr>
+              <a:t>The deployed 5-agent system</a:t>
+            </a:r>
+          </a:p>
+        </p:txBody>
+      </p:sp>
+      <p:sp>
+        <p:nvSpPr>
+          <p:cNvPr id="40" name="Rounded Rectangle 39"/>
+          <p:cNvSpPr/>
+          <p:nvPr/>
+        </p:nvSpPr>
+        <p:spPr>
+          <a:xfrm>
+            <a:off x="6172200" y="3954480"/>
+            <a:ext cx="2674620" cy="750000"/>
+          </a:xfrm>
+          <a:prstGeom prst="roundRect">
+            <a:avLst>
+              <a:gd name="adj" fmla="val 8000"/>
+            </a:avLst>
+          </a:prstGeom>
+          <a:solidFill>
+            <a:srgbClr val="146EB4"/>
+          </a:solidFill>
+          <a:ln>
+            <a:noFill/>
+          </a:ln>
+          <a:effectLst/>
+        </p:spPr>
+        <p:style>
+          <a:lnRef idx="1">
+            <a:schemeClr val="accent1"/>
+          </a:lnRef>
+          <a:fillRef idx="3">
+            <a:schemeClr val="accent1"/>
+          </a:fillRef>
+          <a:effectRef idx="2">
+            <a:schemeClr val="accent1"/>
+          </a:effectRef>
+          <a:fontRef idx="minor">
+            <a:schemeClr val="lt1"/>
+          </a:fontRef>
+        </p:style>
+        <p:txBody>
+          <a:bodyPr rtlCol="0" anchor="ctr" wrap="square" lIns="76200" rIns="76200" tIns="50800" bIns="50800"/>
+          <a:lstStyle/>
+          <a:p>
+            <a:pPr algn="ctr"/>
+            <a:r>
+              <a:rPr sz="1100" b="1">
+                <a:solidFill>
+                  <a:srgbClr val="FFFFFF"/>
+                </a:solidFill>
+                <a:latin typeface="Calibri"/>
+              </a:rPr>
+              <a:t>DynamoDB + OpenSearch/S3 Vectors + Bedrock KB</a:t>
+            </a:r>
+          </a:p>
+          <a:p>
+            <a:pPr algn="ctr"/>
+            <a:r>
+              <a:rPr sz="850" b="0">
+                <a:solidFill>
+                  <a:srgbClr val="E6EEF6"/>
+                </a:solidFill>
+                <a:latin typeface="Calibri"/>
+              </a:rPr>
+              <a:t>Quant + qual RAG data layer</a:t>
+            </a:r>
+          </a:p>
+        </p:txBody>
+      </p:sp>
+      <p:sp>
+        <p:nvSpPr>
+          <p:cNvPr id="41" name="Rounded Rectangle 40"/>
+          <p:cNvSpPr/>
+          <p:nvPr/>
+        </p:nvSpPr>
+        <p:spPr>
+          <a:xfrm>
+            <a:off x="9029700" y="3954480"/>
+            <a:ext cx="2674620" cy="750000"/>
+          </a:xfrm>
+          <a:prstGeom prst="roundRect">
+            <a:avLst>
+              <a:gd name="adj" fmla="val 8000"/>
+            </a:avLst>
+          </a:prstGeom>
+          <a:solidFill>
+            <a:srgbClr val="146EB4"/>
+          </a:solidFill>
+          <a:ln>
+            <a:noFill/>
+          </a:ln>
+          <a:effectLst/>
+        </p:spPr>
+        <p:style>
+          <a:lnRef idx="1">
+            <a:schemeClr val="accent1"/>
+          </a:lnRef>
+          <a:fillRef idx="3">
+            <a:schemeClr val="accent1"/>
+          </a:fillRef>
+          <a:effectRef idx="2">
+            <a:schemeClr val="accent1"/>
+          </a:effectRef>
+          <a:fontRef idx="minor">
+            <a:schemeClr val="lt1"/>
+          </a:fontRef>
+        </p:style>
+        <p:txBody>
+          <a:bodyPr rtlCol="0" anchor="ctr" wrap="square" lIns="76200" rIns="76200" tIns="50800" bIns="50800"/>
+          <a:lstStyle/>
+          <a:p>
+            <a:pPr algn="ctr"/>
+            <a:r>
+              <a:rPr sz="1100" b="1">
+                <a:solidFill>
+                  <a:srgbClr val="FFFFFF"/>
+                </a:solidFill>
+                <a:latin typeface="Calibri"/>
+              </a:rPr>
+              <a:t>IAM + CloudWatch</a:t>
+            </a:r>
+          </a:p>
+          <a:p>
+            <a:pPr algn="ctr"/>
+            <a:r>
+              <a:rPr sz="850" b="0">
+                <a:solidFill>
+                  <a:srgbClr val="E6EEF6"/>
+                </a:solidFill>
+                <a:latin typeface="Calibri"/>
+              </a:rPr>
+              <a:t>Least-privilege roles · logs &amp; alarms</a:t>
+            </a:r>
+          </a:p>
+        </p:txBody>
+      </p:sp>
+      <p:cxnSp>
+        <p:nvCxnSpPr>
+          <p:cNvPr id="42" name="Connector 41"/>
+          <p:cNvCxnSpPr/>
+          <p:nvPr/>
+        </p:nvCxnSpPr>
+        <p:spPr>
+          <a:xfrm flipH="1">
+            <a:off x="1794510" y="3704480"/>
+            <a:ext cx="4286250" cy="250000"/>
+          </a:xfrm>
+          <a:prstGeom prst="line">
+            <a:avLst/>
+          </a:prstGeom>
+          <a:ln w="22225">
+            <a:solidFill>
+              <a:srgbClr val="5A636E"/>
+            </a:solidFill>
+            <a:tailEnd type="triangle" w="med" len="med"/>
+          </a:ln>
+        </p:spPr>
+        <p:style>
+          <a:lnRef idx="2">
+            <a:schemeClr val="accent1"/>
+          </a:lnRef>
+          <a:fillRef idx="0">
+            <a:schemeClr val="accent1"/>
+          </a:fillRef>
+          <a:effectRef idx="1">
+            <a:schemeClr val="accent1"/>
+          </a:effectRef>
+          <a:fontRef idx="minor">
+            <a:schemeClr val="tx1"/>
+          </a:fontRef>
+        </p:style>
+      </p:cxnSp>
+      <p:cxnSp>
+        <p:nvCxnSpPr>
+          <p:cNvPr id="43" name="Connector 42"/>
+          <p:cNvCxnSpPr/>
+          <p:nvPr/>
+        </p:nvCxnSpPr>
+        <p:spPr>
+          <a:xfrm flipH="1">
+            <a:off x="4652010" y="3704480"/>
+            <a:ext cx="1428750" cy="250000"/>
+          </a:xfrm>
+          <a:prstGeom prst="line">
+            <a:avLst/>
+          </a:prstGeom>
+          <a:ln w="22225">
+            <a:solidFill>
+              <a:srgbClr val="5A636E"/>
+            </a:solidFill>
+            <a:tailEnd type="triangle" w="med" len="med"/>
+          </a:ln>
+        </p:spPr>
+        <p:style>
+          <a:lnRef idx="2">
+            <a:schemeClr val="accent1"/>
+          </a:lnRef>
+          <a:fillRef idx="0">
+            <a:schemeClr val="accent1"/>
+          </a:fillRef>
+          <a:effectRef idx="1">
+            <a:schemeClr val="accent1"/>
+          </a:effectRef>
+          <a:fontRef idx="minor">
+            <a:schemeClr val="tx1"/>
+          </a:fontRef>
+        </p:style>
+      </p:cxnSp>
+      <p:cxnSp>
+        <p:nvCxnSpPr>
+          <p:cNvPr id="44" name="Connector 43"/>
+          <p:cNvCxnSpPr/>
+          <p:nvPr/>
+        </p:nvCxnSpPr>
+        <p:spPr>
+          <a:xfrm>
+            <a:off x="6080760" y="3704480"/>
+            <a:ext cx="1428750" cy="250000"/>
+          </a:xfrm>
+          <a:prstGeom prst="line">
+            <a:avLst/>
+          </a:prstGeom>
+          <a:ln w="22225">
+            <a:solidFill>
+              <a:srgbClr val="5A636E"/>
+            </a:solidFill>
+            <a:tailEnd type="triangle" w="med" len="med"/>
+          </a:ln>
+        </p:spPr>
+        <p:style>
+          <a:lnRef idx="2">
+            <a:schemeClr val="accent1"/>
+          </a:lnRef>
+          <a:fillRef idx="0">
+            <a:schemeClr val="accent1"/>
+          </a:fillRef>
+          <a:effectRef idx="1">
+            <a:schemeClr val="accent1"/>
+          </a:effectRef>
+          <a:fontRef idx="minor">
+            <a:schemeClr val="tx1"/>
+          </a:fontRef>
+        </p:style>
+      </p:cxnSp>
+      <p:cxnSp>
+        <p:nvCxnSpPr>
+          <p:cNvPr id="45" name="Connector 44"/>
+          <p:cNvCxnSpPr/>
+          <p:nvPr/>
+        </p:nvCxnSpPr>
+        <p:spPr>
+          <a:xfrm>
+            <a:off x="6080760" y="3704480"/>
+            <a:ext cx="4286250" cy="250000"/>
+          </a:xfrm>
+          <a:prstGeom prst="line">
+            <a:avLst/>
+          </a:prstGeom>
+          <a:ln w="22225">
+            <a:solidFill>
+              <a:srgbClr val="5A636E"/>
+            </a:solidFill>
+            <a:tailEnd type="triangle" w="med" len="med"/>
+          </a:ln>
+        </p:spPr>
+        <p:style>
+          <a:lnRef idx="2">
+            <a:schemeClr val="accent1"/>
+          </a:lnRef>
+          <a:fillRef idx="0">
+            <a:schemeClr val="accent1"/>
+          </a:fillRef>
+          <a:effectRef idx="1">
+            <a:schemeClr val="accent1"/>
+          </a:effectRef>
+          <a:fontRef idx="minor">
+            <a:schemeClr val="tx1"/>
+          </a:fontRef>
+        </p:style>
+      </p:cxnSp>
+      <p:sp>
+        <p:nvSpPr>
+          <p:cNvPr id="46" name="Rounded Rectangle 45"/>
+          <p:cNvSpPr/>
+          <p:nvPr/>
+        </p:nvSpPr>
+        <p:spPr>
+          <a:xfrm>
+            <a:off x="457200" y="4954480"/>
+            <a:ext cx="11247120" cy="520000"/>
+          </a:xfrm>
+          <a:prstGeom prst="roundRect">
+            <a:avLst>
+              <a:gd name="adj" fmla="val 8000"/>
+            </a:avLst>
+          </a:prstGeom>
+          <a:solidFill>
+            <a:srgbClr val="146EB4"/>
+          </a:solidFill>
+          <a:ln>
+            <a:noFill/>
+          </a:ln>
+          <a:effectLst/>
+        </p:spPr>
+        <p:style>
+          <a:lnRef idx="1">
+            <a:schemeClr val="accent1"/>
+          </a:lnRef>
+          <a:fillRef idx="3">
+            <a:schemeClr val="accent1"/>
+          </a:fillRef>
+          <a:effectRef idx="2">
+            <a:schemeClr val="accent1"/>
+          </a:effectRef>
+          <a:fontRef idx="minor">
+            <a:schemeClr val="lt1"/>
+          </a:fontRef>
+        </p:style>
+        <p:txBody>
+          <a:bodyPr rtlCol="0" anchor="ctr" wrap="square" lIns="76200" rIns="76200" tIns="50800" bIns="50800"/>
+          <a:lstStyle/>
+          <a:p>
+            <a:pPr algn="ctr"/>
+            <a:r>
+              <a:rPr sz="1300" b="1">
+                <a:solidFill>
+                  <a:srgbClr val="FFFFFF"/>
+                </a:solidFill>
+                <a:latin typeface="Calibri"/>
+              </a:rPr>
+              <a:t>End User / Client Apps</a:t>
+            </a:r>
+          </a:p>
+          <a:p>
+            <a:pPr algn="ctr"/>
+            <a:r>
+              <a:rPr sz="950" b="0">
+                <a:solidFill>
+                  <a:srgbClr val="E6EEF6"/>
+                </a:solidFill>
+                <a:latin typeface="Calibri"/>
+              </a:rPr>
+              <a:t>boto3 invoke_agent_runtime (SigV4) — reaches the Runtime endpoint this pipeline just built/updated</a:t>
+            </a:r>
+          </a:p>
+        </p:txBody>
+      </p:sp>
+      <p:cxnSp>
+        <p:nvCxnSpPr>
+          <p:cNvPr id="47" name="Connector 46"/>
+          <p:cNvCxnSpPr/>
+          <p:nvPr/>
+        </p:nvCxnSpPr>
+        <p:spPr>
+          <a:xfrm flipV="1">
+            <a:off x="4652010" y="4704480"/>
+            <a:ext cx="0" cy="250000"/>
+          </a:xfrm>
+          <a:prstGeom prst="line">
+            <a:avLst/>
+          </a:prstGeom>
+          <a:ln w="22225">
+            <a:solidFill>
+              <a:srgbClr val="146EB4"/>
+            </a:solidFill>
+            <a:tailEnd type="triangle" w="med" len="med"/>
+          </a:ln>
+        </p:spPr>
+        <p:style>
+          <a:lnRef idx="2">
+            <a:schemeClr val="accent1"/>
+          </a:lnRef>
+          <a:fillRef idx="0">
+            <a:schemeClr val="accent1"/>
+          </a:fillRef>
+          <a:effectRef idx="1">
+            <a:schemeClr val="accent1"/>
+          </a:effectRef>
+          <a:fontRef idx="minor">
+            <a:schemeClr val="tx1"/>
+          </a:fontRef>
+        </p:style>
+      </p:cxnSp>
+      <p:sp>
+        <p:nvSpPr>
+          <p:cNvPr id="48" name="Rounded Rectangle 47"/>
+          <p:cNvSpPr/>
+          <p:nvPr/>
+        </p:nvSpPr>
+        <p:spPr>
+          <a:xfrm>
+            <a:off x="457200" y="5620000"/>
+            <a:ext cx="11247120" cy="520000"/>
+          </a:xfrm>
+          <a:prstGeom prst="roundRect">
+            <a:avLst>
+              <a:gd name="adj" fmla="val 12000"/>
+            </a:avLst>
+          </a:prstGeom>
+          <a:solidFill>
+            <a:srgbClr val="232F3E"/>
+          </a:solidFill>
+          <a:ln>
+            <a:noFill/>
+          </a:ln>
+          <a:effectLst/>
+        </p:spPr>
+        <p:style>
+          <a:lnRef idx="1">
+            <a:schemeClr val="accent1"/>
+          </a:lnRef>
+          <a:fillRef idx="3">
+            <a:schemeClr val="accent1"/>
+          </a:fillRef>
+          <a:effectRef idx="2">
+            <a:schemeClr val="accent1"/>
+          </a:effectRef>
+          <a:fontRef idx="minor">
+            <a:schemeClr val="lt1"/>
+          </a:fontRef>
+        </p:style>
+        <p:txBody>
+          <a:bodyPr rtlCol="0" anchor="ctr" wrap="square" lIns="76200" rIns="76200" tIns="50800" bIns="50800"/>
+          <a:lstStyle/>
+          <a:p>
+            <a:pPr algn="ctr"/>
+            <a:r>
+              <a:rPr sz="1050" b="0">
+                <a:solidFill>
+                  <a:srgbClr val="FFFFFF"/>
+                </a:solidFill>
+                <a:latin typeface="Calibri"/>
+              </a:rPr>
+              <a:t>OIDC federated auth — no long-lived AWS keys ever stored in GitHub  ·  one shared read-only plan role for PRs  ·  one write-scoped deploy-&lt;env&gt; role per environment</a:t>
+            </a:r>
+          </a:p>
+        </p:txBody>
+      </p:sp>
+      <p:sp>
+        <p:nvSpPr>
+          <p:cNvPr id="49" name="TextBox 48"/>
+          <p:cNvSpPr txBox="1"/>
+          <p:nvPr/>
+        </p:nvSpPr>
+        <p:spPr>
+          <a:xfrm>
+            <a:off x="457200" y="6180000"/>
+            <a:ext cx="11277295" cy="256032"/>
+          </a:xfrm>
+          <a:prstGeom prst="rect">
+            <a:avLst/>
+          </a:prstGeom>
+          <a:noFill/>
+        </p:spPr>
+        <p:txBody>
+          <a:bodyPr wrap="square" lIns="0" rIns="0" tIns="0" bIns="0">
+            <a:spAutoFit/>
+          </a:bodyPr>
+          <a:lstStyle/>
+          <a:p>
+            <a:pPr algn="l"/>
+            <a:r>
+              <a:rPr sz="900" i="1" b="0">
+                <a:solidFill>
+                  <a:srgbClr val="5A636E"/>
+                </a:solidFill>
+                <a:latin typeface="Calibri"/>
+              </a:rPr>
+              <a:t>Same Terraform modules and container image promoted across dev → staging → prod — only configuration and the deploy-&lt;env&gt; IAM role differ.</a:t>
+            </a:r>
+          </a:p>
+        </p:txBody>
+      </p:sp>
+      <p:sp>
+        <p:nvSpPr>
+          <p:cNvPr id="28" name="TextBox 27"/>
+          <p:cNvSpPr txBox="1"/>
+          <p:nvPr/>
+        </p:nvSpPr>
+        <p:spPr>
+          <a:xfrm>
+            <a:off x="457200" y="6565392"/>
+            <a:ext cx="5486400" cy="256032"/>
+          </a:xfrm>
+          <a:prstGeom prst="rect">
+            <a:avLst/>
+          </a:prstGeom>
+          <a:noFill/>
+        </p:spPr>
+        <p:txBody>
+          <a:bodyPr wrap="square" anchor="t" lIns="0" rIns="0" tIns="0" bIns="0">
+            <a:spAutoFit/>
+          </a:bodyPr>
+          <a:lstStyle/>
+          <a:p>
+            <a:pPr algn="l">
+              <a:lnSpc>
+                <a:spcPct val="100000"/>
+              </a:lnSpc>
+            </a:pPr>
+            <a:r>
+              <a:rPr sz="900" b="0" i="0">
+                <a:solidFill>
+                  <a:srgbClr val="5A636E"/>
+                </a:solidFill>
+                <a:latin typeface="Calibri"/>
+              </a:rPr>
+              <a:t>AMC RFP &amp; Portfolio Insight Orchestrator</a:t>
+            </a:r>
+          </a:p>
+        </p:txBody>
+      </p:sp>
+      <p:sp>
+        <p:nvSpPr>
+          <p:cNvPr id="29" name="TextBox 28"/>
+          <p:cNvSpPr txBox="1"/>
+          <p:nvPr/>
+        </p:nvSpPr>
+        <p:spPr>
+          <a:xfrm>
+            <a:off x="9875520" y="6565392"/>
+            <a:ext cx="1874519" cy="256032"/>
+          </a:xfrm>
+          <a:prstGeom prst="rect">
+            <a:avLst/>
+          </a:prstGeom>
+          <a:noFill/>
+        </p:spPr>
+        <p:txBody>
+          <a:bodyPr wrap="square" anchor="t" lIns="0" rIns="0" tIns="0" bIns="0">
+            <a:spAutoFit/>
+          </a:bodyPr>
+          <a:lstStyle/>
+          <a:p>
+            <a:pPr algn="r">
+              <a:lnSpc>
+                <a:spcPct val="100000"/>
+              </a:lnSpc>
+            </a:pPr>
+            <a:r>
+              <a:rPr sz="900" b="0" i="0">
+                <a:solidFill>
+                  <a:srgbClr val="5A636E"/>
+                </a:solidFill>
+                <a:latin typeface="Calibri"/>
+              </a:rPr>
+              <a:t>12 / 17</a:t>
+            </a:r>
+          </a:p>
+        </p:txBody>
+      </p:sp>
+    </p:spTree>
+  </p:cSld>
+  <p:clrMapOvr>
+    <a:masterClrMapping/>
+  </p:clrMapOvr>
+</p:sld>
+</file>
+
+<file path=ppt/slides/slide13.xml><?xml version="1.0" encoding="utf-8"?>
+<p:sld xmlns:a="http://schemas.openxmlformats.org/drawingml/2006/main" xmlns:p="http://schemas.openxmlformats.org/presentationml/2006/main" xmlns:r="http://schemas.openxmlformats.org/officeDocument/2006/relationships">
+  <p:cSld>
+    <p:bg>
+      <p:bgPr>
+        <a:solidFill>
+          <a:srgbClr val="FFFFFF"/>
+        </a:solidFill>
+        <a:effectLst/>
+      </p:bgPr>
+    </p:bg>
+    <p:spTree>
+      <p:nvGrpSpPr>
+        <p:cNvPr id="1" name=""/>
+        <p:cNvGrpSpPr/>
+        <p:nvPr/>
+      </p:nvGrpSpPr>
+      <p:grpSpPr/>
+      <p:sp>
+        <p:nvSpPr>
+          <p:cNvPr id="2" name="Rectangle 1"/>
+          <p:cNvSpPr/>
+          <p:nvPr/>
+        </p:nvSpPr>
+        <p:spPr>
+          <a:xfrm>
+            <a:off x="0" y="0"/>
+            <a:ext cx="12191695" cy="960120"/>
+          </a:xfrm>
+          <a:prstGeom prst="rect">
+            <a:avLst/>
+          </a:prstGeom>
+          <a:solidFill>
+            <a:srgbClr val="232F3E"/>
+          </a:solidFill>
+          <a:ln>
+            <a:noFill/>
+          </a:ln>
+          <a:effectLst/>
+        </p:spPr>
+        <p:style>
+          <a:lnRef idx="1">
+            <a:schemeClr val="accent1"/>
+          </a:lnRef>
+          <a:fillRef idx="3">
+            <a:schemeClr val="accent1"/>
+          </a:fillRef>
+          <a:effectRef idx="2">
+            <a:schemeClr val="accent1"/>
+          </a:effectRef>
+          <a:fontRef idx="minor">
+            <a:schemeClr val="lt1"/>
+          </a:fontRef>
+        </p:style>
+        <p:txBody>
+          <a:bodyPr rtlCol="0" anchor="ctr"/>
+          <a:lstStyle/>
+          <a:p>
+            <a:pPr algn="ctr"/>
+          </a:p>
+        </p:txBody>
+      </p:sp>
+      <p:sp>
+        <p:nvSpPr>
+          <p:cNvPr id="3" name="Rectangle 2"/>
+          <p:cNvSpPr/>
+          <p:nvPr/>
+        </p:nvSpPr>
+        <p:spPr>
+          <a:xfrm>
+            <a:off x="0" y="960120"/>
+            <a:ext cx="12191695" cy="38100"/>
+          </a:xfrm>
+          <a:prstGeom prst="rect">
+            <a:avLst/>
+          </a:prstGeom>
+          <a:solidFill>
+            <a:srgbClr val="FF9900"/>
+          </a:solidFill>
+          <a:ln>
+            <a:noFill/>
+          </a:ln>
+          <a:effectLst/>
+        </p:spPr>
+        <p:style>
+          <a:lnRef idx="1">
+            <a:schemeClr val="accent1"/>
+          </a:lnRef>
+          <a:fillRef idx="3">
+            <a:schemeClr val="accent1"/>
+          </a:fillRef>
+          <a:effectRef idx="2">
+            <a:schemeClr val="accent1"/>
+          </a:effectRef>
+          <a:fontRef idx="minor">
+            <a:schemeClr val="lt1"/>
+          </a:fontRef>
+        </p:style>
+        <p:txBody>
+          <a:bodyPr rtlCol="0" anchor="ctr"/>
+          <a:lstStyle/>
+          <a:p>
+            <a:pPr algn="ctr"/>
+          </a:p>
+        </p:txBody>
+      </p:sp>
+      <p:sp>
+        <p:nvSpPr>
+          <p:cNvPr id="4" name="TextBox 3"/>
+          <p:cNvSpPr txBox="1"/>
+          <p:nvPr/>
+        </p:nvSpPr>
+        <p:spPr>
+          <a:xfrm>
+            <a:off x="457200" y="109728"/>
+            <a:ext cx="10058400" cy="292608"/>
+          </a:xfrm>
+          <a:prstGeom prst="rect">
+            <a:avLst/>
+          </a:prstGeom>
+          <a:noFill/>
+        </p:spPr>
+        <p:txBody>
+          <a:bodyPr wrap="square" anchor="t" lIns="0" rIns="0" tIns="0" bIns="0">
+            <a:spAutoFit/>
+          </a:bodyPr>
+          <a:lstStyle/>
+          <a:p>
+            <a:pPr algn="l">
+              <a:lnSpc>
+                <a:spcPct val="100000"/>
+              </a:lnSpc>
+            </a:pPr>
+            <a:r>
+              <a:rPr sz="1200" b="1" i="0">
+                <a:solidFill>
+                  <a:srgbClr val="FF9900"/>
+                </a:solidFill>
+                <a:latin typeface="Calibri"/>
+              </a:rPr>
+              <a:t>SECTION 7</a:t>
+            </a:r>
+          </a:p>
+        </p:txBody>
+      </p:sp>
+      <p:sp>
+        <p:nvSpPr>
+          <p:cNvPr id="5" name="TextBox 4"/>
+          <p:cNvSpPr txBox="1"/>
+          <p:nvPr/>
+        </p:nvSpPr>
+        <p:spPr>
+          <a:xfrm>
+            <a:off x="457200" y="384048"/>
+            <a:ext cx="10332720" cy="548640"/>
+          </a:xfrm>
+          <a:prstGeom prst="rect">
+            <a:avLst/>
+          </a:prstGeom>
+          <a:noFill/>
+        </p:spPr>
+        <p:txBody>
+          <a:bodyPr wrap="square" anchor="t" lIns="0" rIns="0" tIns="0" bIns="0">
+            <a:spAutoFit/>
+          </a:bodyPr>
+          <a:lstStyle/>
+          <a:p>
+            <a:pPr algn="l">
+              <a:lnSpc>
+                <a:spcPct val="100000"/>
+              </a:lnSpc>
+            </a:pPr>
+            <a:r>
+              <a:rPr sz="2500" b="1" i="0">
+                <a:solidFill>
+                  <a:srgbClr val="FFFFFF"/>
+                </a:solidFill>
+                <a:latin typeface="Calibri"/>
+              </a:rPr>
+              <a:t>Technology Stack &amp; Environment Strategy</a:t>
+            </a:r>
+          </a:p>
+        </p:txBody>
+      </p:sp>
+      <p:sp>
+        <p:nvSpPr>
+          <p:cNvPr id="6" name="TextBox 5"/>
+          <p:cNvSpPr txBox="1"/>
+          <p:nvPr/>
+        </p:nvSpPr>
+        <p:spPr>
+          <a:xfrm>
+            <a:off x="11247120" y="347472"/>
+            <a:ext cx="731520" cy="457200"/>
+          </a:xfrm>
+          <a:prstGeom prst="rect">
+            <a:avLst/>
+          </a:prstGeom>
+          <a:noFill/>
+        </p:spPr>
+        <p:txBody>
+          <a:bodyPr wrap="square" anchor="t" lIns="0" rIns="0" tIns="0" bIns="0">
+            <a:spAutoFit/>
+          </a:bodyPr>
+          <a:lstStyle/>
+          <a:p>
+            <a:pPr algn="r">
+              <a:lnSpc>
+                <a:spcPct val="100000"/>
+              </a:lnSpc>
+            </a:pPr>
+            <a:r>
+              <a:rPr sz="2000" b="1" i="0">
+                <a:solidFill>
+                  <a:srgbClr val="FF9900"/>
+                </a:solidFill>
+                <a:latin typeface="Calibri"/>
+              </a:rPr>
+              <a:t>13</a:t>
             </a:r>
           </a:p>
         </p:txBody>
@@ -6361,7 +9490,7 @@
                 </a:solidFill>
                 <a:latin typeface="Calibri"/>
               </a:rPr>
-              <a:t>11 / 15</a:t>
+              <a:t>13 / 17</a:t>
             </a:r>
           </a:p>
         </p:txBody>
@@ -6374,7 +9503,7 @@
 </p:sld>
 </file>
 
-<file path=ppt/slides/slide12.xml><?xml version="1.0" encoding="utf-8"?>
+<file path=ppt/slides/slide14.xml><?xml version="1.0" encoding="utf-8"?>
 <p:sld xmlns:a="http://schemas.openxmlformats.org/drawingml/2006/main" xmlns:p="http://schemas.openxmlformats.org/presentationml/2006/main" xmlns:r="http://schemas.openxmlformats.org/officeDocument/2006/relationships">
   <p:cSld>
     <p:bg>
@@ -6592,7 +9721,7 @@
                 </a:solidFill>
                 <a:latin typeface="Calibri"/>
               </a:rPr>
-              <a:t>12</a:t>
+              <a:t>14</a:t>
             </a:r>
           </a:p>
         </p:txBody>
@@ -7856,7 +10985,7 @@
                 </a:solidFill>
                 <a:latin typeface="Calibri"/>
               </a:rPr>
-              <a:t>12 / 15</a:t>
+              <a:t>14 / 17</a:t>
             </a:r>
           </a:p>
         </p:txBody>
@@ -7869,7 +10998,7 @@
 </p:sld>
 </file>
 
-<file path=ppt/slides/slide13.xml><?xml version="1.0" encoding="utf-8"?>
+<file path=ppt/slides/slide15.xml><?xml version="1.0" encoding="utf-8"?>
 <p:sld xmlns:a="http://schemas.openxmlformats.org/drawingml/2006/main" xmlns:p="http://schemas.openxmlformats.org/presentationml/2006/main" xmlns:r="http://schemas.openxmlformats.org/officeDocument/2006/relationships">
   <p:cSld>
     <p:bg>
@@ -8087,7 +11216,7 @@
                 </a:solidFill>
                 <a:latin typeface="Calibri"/>
               </a:rPr>
-              <a:t>13</a:t>
+              <a:t>15</a:t>
             </a:r>
           </a:p>
         </p:txBody>
@@ -9460,7 +12589,7 @@
                 </a:solidFill>
                 <a:latin typeface="Calibri"/>
               </a:rPr>
-              <a:t>13 / 15</a:t>
+              <a:t>15 / 17</a:t>
             </a:r>
           </a:p>
         </p:txBody>
@@ -9473,7 +12602,7 @@
 </p:sld>
 </file>
 
-<file path=ppt/slides/slide14.xml><?xml version="1.0" encoding="utf-8"?>
+<file path=ppt/slides/slide16.xml><?xml version="1.0" encoding="utf-8"?>
 <p:sld xmlns:a="http://schemas.openxmlformats.org/drawingml/2006/main" xmlns:p="http://schemas.openxmlformats.org/presentationml/2006/main" xmlns:r="http://schemas.openxmlformats.org/officeDocument/2006/relationships">
   <p:cSld>
     <p:bg>
@@ -9691,7 +12820,7 @@
                 </a:solidFill>
                 <a:latin typeface="Calibri"/>
               </a:rPr>
-              <a:t>14</a:t>
+              <a:t>16</a:t>
             </a:r>
           </a:p>
         </p:txBody>
@@ -10961,7 +14090,7 @@
                 </a:solidFill>
                 <a:latin typeface="Calibri"/>
               </a:rPr>
-              <a:t>14 / 15</a:t>
+              <a:t>16 / 17</a:t>
             </a:r>
           </a:p>
         </p:txBody>
@@ -10974,7 +14103,7 @@
 </p:sld>
 </file>
 
-<file path=ppt/slides/slide15.xml><?xml version="1.0" encoding="utf-8"?>
+<file path=ppt/slides/slide17.xml><?xml version="1.0" encoding="utf-8"?>
 <p:sld xmlns:a="http://schemas.openxmlformats.org/drawingml/2006/main" xmlns:p="http://schemas.openxmlformats.org/presentationml/2006/main" xmlns:r="http://schemas.openxmlformats.org/officeDocument/2006/relationships">
   <p:cSld>
     <p:bg>
@@ -12940,7 +16069,7 @@
                 </a:solidFill>
                 <a:latin typeface="Calibri"/>
               </a:rPr>
-              <a:t>2 / 15</a:t>
+              <a:t>2 / 17</a:t>
             </a:r>
           </a:p>
         </p:txBody>
@@ -13572,7 +16701,7 @@
                 </a:solidFill>
                 <a:latin typeface="Calibri"/>
               </a:rPr>
-              <a:t>3 / 15</a:t>
+              <a:t>3 / 17</a:t>
             </a:r>
           </a:p>
         </p:txBody>
@@ -15093,7 +18222,7 @@
                 </a:solidFill>
                 <a:latin typeface="Calibri"/>
               </a:rPr>
-              <a:t>4 / 15</a:t>
+              <a:t>4 / 17</a:t>
             </a:r>
           </a:p>
         </p:txBody>
@@ -16461,7 +19590,7 @@
                 </a:solidFill>
                 <a:latin typeface="Calibri"/>
               </a:rPr>
-              <a:t>5 / 15</a:t>
+              <a:t>5 / 17</a:t>
             </a:r>
           </a:p>
         </p:txBody>
@@ -17521,7 +20650,7 @@
                 </a:solidFill>
                 <a:latin typeface="Calibri"/>
               </a:rPr>
-              <a:t>6 / 15</a:t>
+              <a:t>6 / 17</a:t>
             </a:r>
           </a:p>
         </p:txBody>
@@ -18809,7 +21938,7 @@
                 </a:solidFill>
                 <a:latin typeface="Calibri"/>
               </a:rPr>
-              <a:t>7 / 15</a:t>
+              <a:t>7 / 17</a:t>
             </a:r>
           </a:p>
         </p:txBody>
@@ -20072,7 +23201,7 @@
                 </a:solidFill>
                 <a:latin typeface="Calibri"/>
               </a:rPr>
-              <a:t>8 / 15</a:t>
+              <a:t>8 / 17</a:t>
             </a:r>
           </a:p>
         </p:txBody>
@@ -20088,14 +23217,6 @@
 <file path=ppt/slides/slide9.xml><?xml version="1.0" encoding="utf-8"?>
 <p:sld xmlns:a="http://schemas.openxmlformats.org/drawingml/2006/main" xmlns:p="http://schemas.openxmlformats.org/presentationml/2006/main" xmlns:r="http://schemas.openxmlformats.org/officeDocument/2006/relationships">
   <p:cSld>
-    <p:bg>
-      <p:bgPr>
-        <a:solidFill>
-          <a:srgbClr val="FFFFFF"/>
-        </a:solidFill>
-        <a:effectLst/>
-      </p:bgPr>
-    </p:bg>
     <p:spTree>
       <p:nvGrpSpPr>
         <p:cNvPr id="1" name=""/>
@@ -20225,7 +23346,7 @@
                 </a:solidFill>
                 <a:latin typeface="Calibri"/>
               </a:rPr>
-              <a:t>SECTION 13 · PHASE 02</a:t>
+              <a:t>SECTION 13 · PROJECT PHASES</a:t>
             </a:r>
           </a:p>
         </p:txBody>
@@ -20264,7 +23385,7 @@
                 </a:solidFill>
                 <a:latin typeface="Calibri"/>
               </a:rPr>
-              <a:t>Cloud Architecture — AWS Resources</a:t>
+              <a:t>Three-Phase Delivery Journey — What Was Built</a:t>
             </a:r>
           </a:p>
         </p:txBody>
@@ -20310,14 +23431,53 @@
       </p:sp>
       <p:sp>
         <p:nvSpPr>
-          <p:cNvPr id="7" name="Rounded Rectangle 6"/>
+          <p:cNvPr id="100" name="TextBox Intro"/>
+          <p:cNvSpPr txBox="1"/>
+          <p:nvPr/>
+        </p:nvSpPr>
+        <p:spPr>
+          <a:xfrm>
+            <a:off x="457200" y="1051560"/>
+            <a:ext cx="11277295" cy="411480"/>
+          </a:xfrm>
+          <a:prstGeom prst="rect">
+            <a:avLst/>
+          </a:prstGeom>
+          <a:noFill/>
+        </p:spPr>
+        <p:txBody>
+          <a:bodyPr wrap="square" anchor="t" lIns="0" rIns="0" tIns="0" bIns="0">
+            <a:spAutoFit/>
+          </a:bodyPr>
+          <a:lstStyle/>
+          <a:p>
+            <a:pPr algn="l">
+              <a:lnSpc>
+                <a:spcPct val="110000"/>
+              </a:lnSpc>
+            </a:pPr>
+            <a:r>
+              <a:rPr sz="1200" b="0" i="0">
+                <a:solidFill>
+                  <a:srgbClr val="232F3E"/>
+                </a:solidFill>
+                <a:latin typeface="Calibri"/>
+              </a:rPr>
+              <a:t>The same 5-agent system moved through three concrete build phases — free local development, a live AWS deployment, and a fully automated CI/CD pipeline.</a:t>
+            </a:r>
+          </a:p>
+        </p:txBody>
+      </p:sp>
+      <p:sp>
+        <p:nvSpPr>
+          <p:cNvPr id="200" name="Phase Header 0"/>
           <p:cNvSpPr/>
           <p:nvPr/>
         </p:nvSpPr>
         <p:spPr>
           <a:xfrm>
-            <a:off x="320040" y="1170432"/>
-            <a:ext cx="2788920" cy="566928"/>
+            <a:off x="457200" y="1554480"/>
+            <a:ext cx="3606698" cy="600000"/>
           </a:xfrm>
           <a:prstGeom prst="roundRect">
             <a:avLst>
@@ -20352,13 +23512,13 @@
           <a:p>
             <a:pPr algn="ctr"/>
             <a:r>
-              <a:rPr sz="1050" b="1">
+              <a:rPr sz="1400" b="1">
                 <a:solidFill>
                   <a:srgbClr val="FFFFFF"/>
                 </a:solidFill>
                 <a:latin typeface="Calibri"/>
               </a:rPr>
-              <a:t>Client Apps / Browser UI / REST API</a:t>
+              <a:t>PHASE 01</a:t>
             </a:r>
           </a:p>
           <a:p>
@@ -20368,27 +23528,452 @@
               </a:spcBef>
             </a:pPr>
             <a:r>
-              <a:rPr sz="800" b="0">
+              <a:rPr sz="1000" b="0">
                 <a:solidFill>
                   <a:srgbClr val="E6EEF6"/>
                 </a:solidFill>
                 <a:latin typeface="Calibri"/>
               </a:rPr>
-              <a:t>boto3 invoke_agent_runtime (SigV4)</a:t>
-            </a:r>
-          </a:p>
-        </p:txBody>
-      </p:sp>
-      <p:sp>
-        <p:nvSpPr>
-          <p:cNvPr id="8" name="Rounded Rectangle 7"/>
+              <a:t>Local Development (DEV)</a:t>
+            </a:r>
+          </a:p>
+        </p:txBody>
+      </p:sp>
+      <p:sp>
+        <p:nvSpPr>
+          <p:cNvPr id="201" name="Phase Pill 0"/>
           <p:cNvSpPr/>
           <p:nvPr/>
         </p:nvSpPr>
         <p:spPr>
           <a:xfrm>
-            <a:off x="9098280" y="1170432"/>
-            <a:ext cx="2788920" cy="502920"/>
+            <a:off x="610549" y="2234480"/>
+            <a:ext cx="3300000" cy="302640"/>
+          </a:xfrm>
+          <a:prstGeom prst="roundRect">
+            <a:avLst>
+              <a:gd name="adj" fmla="val 50000"/>
+            </a:avLst>
+          </a:prstGeom>
+          <a:solidFill>
+            <a:srgbClr val="2E7D32"/>
+          </a:solidFill>
+          <a:ln>
+            <a:noFill/>
+          </a:ln>
+          <a:effectLst/>
+        </p:spPr>
+        <p:style>
+          <a:lnRef idx="1">
+            <a:schemeClr val="accent1"/>
+          </a:lnRef>
+          <a:fillRef idx="3">
+            <a:schemeClr val="accent1"/>
+          </a:fillRef>
+          <a:effectRef idx="2">
+            <a:schemeClr val="accent1"/>
+          </a:effectRef>
+          <a:fontRef idx="minor">
+            <a:schemeClr val="lt1"/>
+          </a:fontRef>
+        </p:style>
+        <p:txBody>
+          <a:bodyPr rtlCol="0" anchor="ctr" wrap="square" lIns="50800" rIns="50800" tIns="38100" bIns="38100"/>
+          <a:lstStyle/>
+          <a:p>
+            <a:pPr algn="ctr">
+              <a:lnSpc>
+                <a:spcPct val="100000"/>
+              </a:lnSpc>
+            </a:pPr>
+            <a:r>
+              <a:rPr sz="800" b="1">
+                <a:solidFill>
+                  <a:srgbClr val="FFFFFF"/>
+                </a:solidFill>
+                <a:latin typeface="Calibri"/>
+              </a:rPr>
+              <a:t>Complete</a:t>
+            </a:r>
+          </a:p>
+        </p:txBody>
+      </p:sp>
+      <p:sp>
+        <p:nvSpPr>
+          <p:cNvPr id="202" name="Phase Bullets 0"/>
+          <p:cNvSpPr txBox="1"/>
+          <p:nvPr/>
+        </p:nvSpPr>
+        <p:spPr>
+          <a:xfrm>
+            <a:off x="457200" y="2687120"/>
+            <a:ext cx="3606698" cy="3200000"/>
+          </a:xfrm>
+          <a:prstGeom prst="rect">
+            <a:avLst/>
+          </a:prstGeom>
+          <a:noFill/>
+        </p:spPr>
+        <p:txBody>
+          <a:bodyPr wrap="square">
+            <a:spAutoFit/>
+          </a:bodyPr>
+          <a:lstStyle/>
+          <a:p>
+            <a:pPr>
+              <a:lnSpc>
+                <a:spcPct val="105000"/>
+              </a:lnSpc>
+              <a:spcAft>
+                <a:spcPts val="500"/>
+              </a:spcAft>
+            </a:pPr>
+            <a:r>
+              <a:rPr sz="1000" b="0">
+                <a:solidFill>
+                  <a:srgbClr val="22272B"/>
+                </a:solidFill>
+                <a:latin typeface="Calibri"/>
+              </a:rPr>
+              <a:t>▪  Built the 5-agent Strands graph — quant, qual, compliance, revisor, synthesizer</a:t>
+            </a:r>
+          </a:p>
+          <a:p>
+            <a:pPr>
+              <a:lnSpc>
+                <a:spcPct val="105000"/>
+              </a:lnSpc>
+              <a:spcAft>
+                <a:spcPts val="500"/>
+              </a:spcAft>
+            </a:pPr>
+            <a:r>
+              <a:rPr sz="1000" b="0">
+                <a:solidFill>
+                  <a:srgbClr val="22272B"/>
+                </a:solidFill>
+                <a:latin typeface="Calibri"/>
+              </a:rPr>
+              <a:t>▪  Self-correcting compliance loop — LLM-as-a-Judge with structured, typed verdicts</a:t>
+            </a:r>
+          </a:p>
+          <a:p>
+            <a:pPr>
+              <a:lnSpc>
+                <a:spcPct val="105000"/>
+              </a:lnSpc>
+              <a:spcAft>
+                <a:spcPts val="500"/>
+              </a:spcAft>
+            </a:pPr>
+            <a:r>
+              <a:rPr sz="1000" b="0">
+                <a:solidFill>
+                  <a:srgbClr val="22272B"/>
+                </a:solidFill>
+                <a:latin typeface="Calibri"/>
+              </a:rPr>
+              <a:t>▪  SQLite + on-disk ChromaDB data layer; Ollama (free, local) by default</a:t>
+            </a:r>
+          </a:p>
+          <a:p>
+            <a:pPr>
+              <a:lnSpc>
+                <a:spcPct val="105000"/>
+              </a:lnSpc>
+              <a:spcAft>
+                <a:spcPts val="500"/>
+              </a:spcAft>
+            </a:pPr>
+            <a:r>
+              <a:rPr sz="1000" b="0">
+                <a:solidFill>
+                  <a:srgbClr val="22272B"/>
+                </a:solidFill>
+                <a:latin typeface="Calibri"/>
+              </a:rPr>
+              <a:t>▪  FastAPI REST API (/api/v1/rfp, /health) + CLI, full unit + integration test suite</a:t>
+            </a:r>
+          </a:p>
+          <a:p>
+            <a:pPr>
+              <a:lnSpc>
+                <a:spcPct val="105000"/>
+              </a:lnSpc>
+              <a:spcAft>
+                <a:spcPts val="500"/>
+              </a:spcAft>
+            </a:pPr>
+            <a:r>
+              <a:rPr sz="1000" b="0">
+                <a:solidFill>
+                  <a:srgbClr val="22272B"/>
+                </a:solidFill>
+                <a:latin typeface="Calibri"/>
+              </a:rPr>
+              <a:t>▪  Hardened for resilience — never crashes, always a well-formed outcome</a:t>
+            </a:r>
+          </a:p>
+        </p:txBody>
+      </p:sp>
+      <p:sp>
+        <p:nvSpPr>
+          <p:cNvPr id="203" name="Phase Header 1"/>
+          <p:cNvSpPr/>
+          <p:nvPr/>
+        </p:nvSpPr>
+        <p:spPr>
+          <a:xfrm>
+            <a:off x="4292498" y="1554480"/>
+            <a:ext cx="3606698" cy="600000"/>
+          </a:xfrm>
+          <a:prstGeom prst="roundRect">
+            <a:avLst>
+              <a:gd name="adj" fmla="val 8000"/>
+            </a:avLst>
+          </a:prstGeom>
+          <a:solidFill>
+            <a:srgbClr val="E87B00"/>
+          </a:solidFill>
+          <a:ln>
+            <a:noFill/>
+          </a:ln>
+          <a:effectLst/>
+        </p:spPr>
+        <p:style>
+          <a:lnRef idx="1">
+            <a:schemeClr val="accent1"/>
+          </a:lnRef>
+          <a:fillRef idx="3">
+            <a:schemeClr val="accent1"/>
+          </a:fillRef>
+          <a:effectRef idx="2">
+            <a:schemeClr val="accent1"/>
+          </a:effectRef>
+          <a:fontRef idx="minor">
+            <a:schemeClr val="lt1"/>
+          </a:fontRef>
+        </p:style>
+        <p:txBody>
+          <a:bodyPr rtlCol="0" anchor="ctr" wrap="square" lIns="76200" rIns="76200" tIns="50800" bIns="50800"/>
+          <a:lstStyle/>
+          <a:p>
+            <a:pPr algn="ctr"/>
+            <a:r>
+              <a:rPr sz="1400" b="1">
+                <a:solidFill>
+                  <a:srgbClr val="FFFFFF"/>
+                </a:solidFill>
+                <a:latin typeface="Calibri"/>
+              </a:rPr>
+              <a:t>PHASE 02</a:t>
+            </a:r>
+          </a:p>
+          <a:p>
+            <a:pPr algn="ctr">
+              <a:spcBef>
+                <a:spcPts val="200"/>
+              </a:spcBef>
+            </a:pPr>
+            <a:r>
+              <a:rPr sz="1000" b="0">
+                <a:solidFill>
+                  <a:srgbClr val="E6EEF6"/>
+                </a:solidFill>
+                <a:latin typeface="Calibri"/>
+              </a:rPr>
+              <a:t>AWS Cloud Deployment (Bedrock AgentCore)</a:t>
+            </a:r>
+          </a:p>
+        </p:txBody>
+      </p:sp>
+      <p:sp>
+        <p:nvSpPr>
+          <p:cNvPr id="204" name="Phase Pill 1"/>
+          <p:cNvSpPr/>
+          <p:nvPr/>
+        </p:nvSpPr>
+        <p:spPr>
+          <a:xfrm>
+            <a:off x="4445847" y="2234480"/>
+            <a:ext cx="3300000" cy="302640"/>
+          </a:xfrm>
+          <a:prstGeom prst="roundRect">
+            <a:avLst>
+              <a:gd name="adj" fmla="val 50000"/>
+            </a:avLst>
+          </a:prstGeom>
+          <a:solidFill>
+            <a:srgbClr val="2E7D32"/>
+          </a:solidFill>
+          <a:ln>
+            <a:noFill/>
+          </a:ln>
+          <a:effectLst/>
+        </p:spPr>
+        <p:style>
+          <a:lnRef idx="1">
+            <a:schemeClr val="accent1"/>
+          </a:lnRef>
+          <a:fillRef idx="3">
+            <a:schemeClr val="accent1"/>
+          </a:fillRef>
+          <a:effectRef idx="2">
+            <a:schemeClr val="accent1"/>
+          </a:effectRef>
+          <a:fontRef idx="minor">
+            <a:schemeClr val="lt1"/>
+          </a:fontRef>
+        </p:style>
+        <p:txBody>
+          <a:bodyPr rtlCol="0" anchor="ctr" wrap="square" lIns="50800" rIns="50800" tIns="38100" bIns="38100"/>
+          <a:lstStyle/>
+          <a:p>
+            <a:pPr algn="ctr">
+              <a:lnSpc>
+                <a:spcPct val="100000"/>
+              </a:lnSpc>
+            </a:pPr>
+            <a:r>
+              <a:rPr sz="800" b="1">
+                <a:solidFill>
+                  <a:srgbClr val="FFFFFF"/>
+                </a:solidFill>
+                <a:latin typeface="Calibri"/>
+              </a:rPr>
+              <a:t>Dev live-verified, then torn down</a:t>
+            </a:r>
+          </a:p>
+        </p:txBody>
+      </p:sp>
+      <p:sp>
+        <p:nvSpPr>
+          <p:cNvPr id="205" name="Phase Bullets 1"/>
+          <p:cNvSpPr txBox="1"/>
+          <p:nvPr/>
+        </p:nvSpPr>
+        <p:spPr>
+          <a:xfrm>
+            <a:off x="4292498" y="2687120"/>
+            <a:ext cx="3606698" cy="3200000"/>
+          </a:xfrm>
+          <a:prstGeom prst="rect">
+            <a:avLst/>
+          </a:prstGeom>
+          <a:noFill/>
+        </p:spPr>
+        <p:txBody>
+          <a:bodyPr wrap="square">
+            <a:spAutoFit/>
+          </a:bodyPr>
+          <a:lstStyle/>
+          <a:p>
+            <a:pPr>
+              <a:lnSpc>
+                <a:spcPct val="105000"/>
+              </a:lnSpc>
+              <a:spcAft>
+                <a:spcPts val="500"/>
+              </a:spcAft>
+            </a:pPr>
+            <a:r>
+              <a:rPr sz="1000" b="0">
+                <a:solidFill>
+                  <a:srgbClr val="22272B"/>
+                </a:solidFill>
+                <a:latin typeface="Calibri"/>
+              </a:rPr>
+              <a:t>▪  Terraform IaC — AgentCore Runtime/Gateway/Memory, ECR, DynamoDB, OpenSearch/S3 Vectors, Bedrock KB</a:t>
+            </a:r>
+          </a:p>
+          <a:p>
+            <a:pPr>
+              <a:lnSpc>
+                <a:spcPct val="105000"/>
+              </a:lnSpc>
+              <a:spcAft>
+                <a:spcPts val="500"/>
+              </a:spcAft>
+            </a:pPr>
+            <a:r>
+              <a:rPr sz="1000" b="0">
+                <a:solidFill>
+                  <a:srgbClr val="22272B"/>
+                </a:solidFill>
+                <a:latin typeface="Calibri"/>
+              </a:rPr>
+              <a:t>▪  AgentCore-compliant entrypoint + DynamoDB/Knowledge-Base data-layer swap, Dockerfile</a:t>
+            </a:r>
+          </a:p>
+          <a:p>
+            <a:pPr>
+              <a:lnSpc>
+                <a:spcPct val="105000"/>
+              </a:lnSpc>
+              <a:spcAft>
+                <a:spcPts val="500"/>
+              </a:spcAft>
+            </a:pPr>
+            <a:r>
+              <a:rPr sz="1000" b="0">
+                <a:solidFill>
+                  <a:srgbClr val="22272B"/>
+                </a:solidFill>
+                <a:latin typeface="Calibri"/>
+              </a:rPr>
+              <a:t>▪  Live end-to-end proof — all 4 mock funds APPROVED on real AWS</a:t>
+            </a:r>
+          </a:p>
+          <a:p>
+            <a:pPr>
+              <a:lnSpc>
+                <a:spcPct val="105000"/>
+              </a:lnSpc>
+              <a:spcAft>
+                <a:spcPts val="500"/>
+              </a:spcAft>
+            </a:pPr>
+            <a:r>
+              <a:rPr sz="1000" b="0">
+                <a:solidFill>
+                  <a:srgbClr val="22272B"/>
+                </a:solidFill>
+                <a:latin typeface="Calibri"/>
+              </a:rPr>
+              <a:t>▪  Auto-sync RAG ingestion pipeline (S3 → SQS → Lambda → Knowledge Base)</a:t>
+            </a:r>
+          </a:p>
+          <a:p>
+            <a:pPr>
+              <a:lnSpc>
+                <a:spcPct val="105000"/>
+              </a:lnSpc>
+              <a:spcAft>
+                <a:spcPts val="500"/>
+              </a:spcAft>
+            </a:pPr>
+            <a:r>
+              <a:rPr sz="1000" b="0">
+                <a:solidFill>
+                  <a:srgbClr val="22272B"/>
+                </a:solidFill>
+                <a:latin typeface="Calibri"/>
+              </a:rPr>
+              <a:t>▪  Streamlit UI extended with a SigV4-signed “Deployed Runtime” mode</a:t>
+            </a:r>
+          </a:p>
+        </p:txBody>
+      </p:sp>
+      <p:sp>
+        <p:nvSpPr>
+          <p:cNvPr id="206" name="Phase Header 2"/>
+          <p:cNvSpPr/>
+          <p:nvPr/>
+        </p:nvSpPr>
+        <p:spPr>
+          <a:xfrm>
+            <a:off x="8127796" y="1554480"/>
+            <a:ext cx="3606698" cy="600000"/>
           </a:xfrm>
           <a:prstGeom prst="roundRect">
             <a:avLst>
@@ -20423,13 +24008,13 @@
           <a:p>
             <a:pPr algn="ctr"/>
             <a:r>
-              <a:rPr sz="1050" b="1">
+              <a:rPr sz="1400" b="1">
                 <a:solidFill>
                   <a:srgbClr val="FFFFFF"/>
                 </a:solidFill>
                 <a:latin typeface="Calibri"/>
               </a:rPr>
-              <a:t>GitHub Actions CI/CD</a:t>
+              <a:t>PHASE 03</a:t>
             </a:r>
           </a:p>
           <a:p>
@@ -20439,683 +24024,31 @@
               </a:spcBef>
             </a:pPr>
             <a:r>
-              <a:rPr sz="800" b="0">
+              <a:rPr sz="1000" b="0">
                 <a:solidFill>
                   <a:srgbClr val="E6EEF6"/>
                 </a:solidFill>
                 <a:latin typeface="Calibri"/>
               </a:rPr>
-              <a:t>OIDC — short-lived AWS credentials</a:t>
-            </a:r>
-          </a:p>
-        </p:txBody>
-      </p:sp>
-      <p:sp>
-        <p:nvSpPr>
-          <p:cNvPr id="9" name="Rounded Rectangle 8"/>
+              <a:t>CI/CD Automation (GitHub Actions)</a:t>
+            </a:r>
+          </a:p>
+        </p:txBody>
+      </p:sp>
+      <p:sp>
+        <p:nvSpPr>
+          <p:cNvPr id="207" name="Phase Pill 2"/>
           <p:cNvSpPr/>
           <p:nvPr/>
         </p:nvSpPr>
         <p:spPr>
           <a:xfrm>
-            <a:off x="9098280" y="1874519"/>
-            <a:ext cx="2788920" cy="502920"/>
+            <a:off x="8281145" y="2234480"/>
+            <a:ext cx="3300000" cy="302640"/>
           </a:xfrm>
           <a:prstGeom prst="roundRect">
             <a:avLst>
-              <a:gd name="adj" fmla="val 8000"/>
-            </a:avLst>
-          </a:prstGeom>
-          <a:solidFill>
-            <a:srgbClr val="2E4157"/>
-          </a:solidFill>
-          <a:ln>
-            <a:noFill/>
-          </a:ln>
-          <a:effectLst/>
-        </p:spPr>
-        <p:style>
-          <a:lnRef idx="1">
-            <a:schemeClr val="accent1"/>
-          </a:lnRef>
-          <a:fillRef idx="3">
-            <a:schemeClr val="accent1"/>
-          </a:fillRef>
-          <a:effectRef idx="2">
-            <a:schemeClr val="accent1"/>
-          </a:effectRef>
-          <a:fontRef idx="minor">
-            <a:schemeClr val="lt1"/>
-          </a:fontRef>
-        </p:style>
-        <p:txBody>
-          <a:bodyPr rtlCol="0" anchor="ctr" wrap="square" lIns="76200" rIns="76200" tIns="50800" bIns="50800"/>
-          <a:lstStyle/>
-          <a:p>
-            <a:pPr algn="ctr"/>
-            <a:r>
-              <a:rPr sz="1050" b="1">
-                <a:solidFill>
-                  <a:srgbClr val="FFFFFF"/>
-                </a:solidFill>
-                <a:latin typeface="Calibri"/>
-              </a:rPr>
-              <a:t>Amazon ECR</a:t>
-            </a:r>
-          </a:p>
-          <a:p>
-            <a:pPr algn="ctr">
-              <a:spcBef>
-                <a:spcPts val="200"/>
-              </a:spcBef>
-            </a:pPr>
-            <a:r>
-              <a:rPr sz="800" b="0">
-                <a:solidFill>
-                  <a:srgbClr val="E6EEF6"/>
-                </a:solidFill>
-                <a:latin typeface="Calibri"/>
-              </a:rPr>
-              <a:t>Container images (build once, promote)</a:t>
-            </a:r>
-          </a:p>
-        </p:txBody>
-      </p:sp>
-      <p:sp>
-        <p:nvSpPr>
-          <p:cNvPr id="10" name="Rounded Rectangle 9"/>
-          <p:cNvSpPr/>
-          <p:nvPr/>
-        </p:nvSpPr>
-        <p:spPr>
-          <a:xfrm>
-            <a:off x="3794760" y="1783080"/>
-            <a:ext cx="4709160" cy="1051560"/>
-          </a:xfrm>
-          <a:prstGeom prst="roundRect">
-            <a:avLst>
-              <a:gd name="adj" fmla="val 8000"/>
-            </a:avLst>
-          </a:prstGeom>
-          <a:solidFill>
-            <a:srgbClr val="E87B00"/>
-          </a:solidFill>
-          <a:ln>
-            <a:noFill/>
-          </a:ln>
-          <a:effectLst/>
-        </p:spPr>
-        <p:style>
-          <a:lnRef idx="1">
-            <a:schemeClr val="accent1"/>
-          </a:lnRef>
-          <a:fillRef idx="3">
-            <a:schemeClr val="accent1"/>
-          </a:fillRef>
-          <a:effectRef idx="2">
-            <a:schemeClr val="accent1"/>
-          </a:effectRef>
-          <a:fontRef idx="minor">
-            <a:schemeClr val="lt1"/>
-          </a:fontRef>
-        </p:style>
-        <p:txBody>
-          <a:bodyPr rtlCol="0" anchor="ctr" wrap="square" lIns="76200" rIns="76200" tIns="50800" bIns="50800"/>
-          <a:lstStyle/>
-          <a:p>
-            <a:pPr algn="ctr"/>
-            <a:r>
-              <a:rPr sz="1300" b="1">
-                <a:solidFill>
-                  <a:srgbClr val="FFFFFF"/>
-                </a:solidFill>
-                <a:latin typeface="Calibri"/>
-              </a:rPr>
-              <a:t>Amazon Bedrock AgentCore Runtime</a:t>
-            </a:r>
-          </a:p>
-          <a:p>
-            <a:pPr algn="ctr">
-              <a:spcBef>
-                <a:spcPts val="200"/>
-              </a:spcBef>
-            </a:pPr>
-            <a:r>
-              <a:rPr sz="950" b="0">
-                <a:solidFill>
-                  <a:srgbClr val="E6EEF6"/>
-                </a:solidFill>
-                <a:latin typeface="Calibri"/>
-              </a:rPr>
-              <a:t>5-agent graph  ·  Public network mode  ·  IAM (SigV4) secured</a:t>
-            </a:r>
-          </a:p>
-        </p:txBody>
-      </p:sp>
-      <p:cxnSp>
-        <p:nvCxnSpPr>
-          <p:cNvPr id="11" name="Connector 10"/>
-          <p:cNvCxnSpPr/>
-          <p:nvPr/>
-        </p:nvCxnSpPr>
-        <p:spPr>
-          <a:xfrm>
-            <a:off x="3108960" y="1453896"/>
-            <a:ext cx="685800" cy="854964"/>
-          </a:xfrm>
-          <a:prstGeom prst="line">
-            <a:avLst/>
-          </a:prstGeom>
-          <a:ln w="22225">
-            <a:solidFill>
-              <a:srgbClr val="146EB4"/>
-            </a:solidFill>
-            <a:tailEnd type="triangle" w="med" len="med"/>
-          </a:ln>
-        </p:spPr>
-        <p:style>
-          <a:lnRef idx="2">
-            <a:schemeClr val="accent1"/>
-          </a:lnRef>
-          <a:fillRef idx="0">
-            <a:schemeClr val="accent1"/>
-          </a:fillRef>
-          <a:effectRef idx="1">
-            <a:schemeClr val="accent1"/>
-          </a:effectRef>
-          <a:fontRef idx="minor">
-            <a:schemeClr val="tx1"/>
-          </a:fontRef>
-        </p:style>
-      </p:cxnSp>
-      <p:sp>
-        <p:nvSpPr>
-          <p:cNvPr id="12" name="TextBox 11"/>
-          <p:cNvSpPr txBox="1"/>
-          <p:nvPr/>
-        </p:nvSpPr>
-        <p:spPr>
-          <a:xfrm>
-            <a:off x="1188720" y="1737360"/>
-            <a:ext cx="2651760" cy="228600"/>
-          </a:xfrm>
-          <a:prstGeom prst="rect">
-            <a:avLst/>
-          </a:prstGeom>
-          <a:noFill/>
-        </p:spPr>
-        <p:txBody>
-          <a:bodyPr wrap="square" anchor="ctr" lIns="0" rIns="0" tIns="0" bIns="0">
-            <a:spAutoFit/>
-          </a:bodyPr>
-          <a:lstStyle/>
-          <a:p>
-            <a:pPr algn="l">
-              <a:lnSpc>
-                <a:spcPct val="100000"/>
-              </a:lnSpc>
-            </a:pPr>
-            <a:r>
-              <a:rPr sz="850" b="1" i="0">
-                <a:solidFill>
-                  <a:srgbClr val="146EB4"/>
-                </a:solidFill>
-                <a:latin typeface="Calibri"/>
-              </a:rPr>
-              <a:t>SigV4 / IAM auth</a:t>
-            </a:r>
-          </a:p>
-        </p:txBody>
-      </p:sp>
-      <p:cxnSp>
-        <p:nvCxnSpPr>
-          <p:cNvPr id="13" name="Connector 12"/>
-          <p:cNvCxnSpPr/>
-          <p:nvPr/>
-        </p:nvCxnSpPr>
-        <p:spPr>
-          <a:xfrm>
-            <a:off x="9098280" y="1421892"/>
-            <a:ext cx="0" cy="704087"/>
-          </a:xfrm>
-          <a:prstGeom prst="line">
-            <a:avLst/>
-          </a:prstGeom>
-          <a:ln w="19050">
-            <a:solidFill>
-              <a:srgbClr val="2E4157"/>
-            </a:solidFill>
-            <a:tailEnd type="triangle" w="med" len="med"/>
-          </a:ln>
-        </p:spPr>
-        <p:style>
-          <a:lnRef idx="2">
-            <a:schemeClr val="accent1"/>
-          </a:lnRef>
-          <a:fillRef idx="0">
-            <a:schemeClr val="accent1"/>
-          </a:fillRef>
-          <a:effectRef idx="1">
-            <a:schemeClr val="accent1"/>
-          </a:effectRef>
-          <a:fontRef idx="minor">
-            <a:schemeClr val="tx1"/>
-          </a:fontRef>
-        </p:style>
-      </p:cxnSp>
-      <p:cxnSp>
-        <p:nvCxnSpPr>
-          <p:cNvPr id="14" name="Connector 13"/>
-          <p:cNvCxnSpPr/>
-          <p:nvPr/>
-        </p:nvCxnSpPr>
-        <p:spPr>
-          <a:xfrm flipH="1">
-            <a:off x="8503920" y="2125979"/>
-            <a:ext cx="594360" cy="182881"/>
-          </a:xfrm>
-          <a:prstGeom prst="line">
-            <a:avLst/>
-          </a:prstGeom>
-          <a:ln w="22225">
-            <a:solidFill>
-              <a:srgbClr val="2E4157"/>
-            </a:solidFill>
-            <a:tailEnd type="triangle" w="med" len="med"/>
-          </a:ln>
-        </p:spPr>
-        <p:style>
-          <a:lnRef idx="2">
-            <a:schemeClr val="accent1"/>
-          </a:lnRef>
-          <a:fillRef idx="0">
-            <a:schemeClr val="accent1"/>
-          </a:fillRef>
-          <a:effectRef idx="1">
-            <a:schemeClr val="accent1"/>
-          </a:effectRef>
-          <a:fontRef idx="minor">
-            <a:schemeClr val="tx1"/>
-          </a:fontRef>
-        </p:style>
-      </p:cxnSp>
-      <p:sp>
-        <p:nvSpPr>
-          <p:cNvPr id="15" name="TextBox 14"/>
-          <p:cNvSpPr txBox="1"/>
-          <p:nvPr/>
-        </p:nvSpPr>
-        <p:spPr>
-          <a:xfrm>
-            <a:off x="7360920" y="2148840"/>
-            <a:ext cx="1691640" cy="228600"/>
-          </a:xfrm>
-          <a:prstGeom prst="rect">
-            <a:avLst/>
-          </a:prstGeom>
-          <a:noFill/>
-        </p:spPr>
-        <p:txBody>
-          <a:bodyPr wrap="square" anchor="ctr" lIns="0" rIns="0" tIns="0" bIns="0">
-            <a:spAutoFit/>
-          </a:bodyPr>
-          <a:lstStyle/>
-          <a:p>
-            <a:pPr algn="r">
-              <a:lnSpc>
-                <a:spcPct val="100000"/>
-              </a:lnSpc>
-            </a:pPr>
-            <a:r>
-              <a:rPr sz="850" b="1" i="0">
-                <a:solidFill>
-                  <a:srgbClr val="2E4157"/>
-                </a:solidFill>
-                <a:latin typeface="Calibri"/>
-              </a:rPr>
-              <a:t>pull image</a:t>
-            </a:r>
-          </a:p>
-        </p:txBody>
-      </p:sp>
-      <p:sp>
-        <p:nvSpPr>
-          <p:cNvPr id="16" name="Rounded Rectangle 15"/>
-          <p:cNvSpPr/>
-          <p:nvPr/>
-        </p:nvSpPr>
-        <p:spPr>
-          <a:xfrm>
-            <a:off x="320040" y="3291840"/>
-            <a:ext cx="2697480" cy="822960"/>
-          </a:xfrm>
-          <a:prstGeom prst="roundRect">
-            <a:avLst>
-              <a:gd name="adj" fmla="val 8000"/>
-            </a:avLst>
-          </a:prstGeom>
-          <a:solidFill>
-            <a:srgbClr val="146EB4"/>
-          </a:solidFill>
-          <a:ln>
-            <a:noFill/>
-          </a:ln>
-          <a:effectLst/>
-        </p:spPr>
-        <p:style>
-          <a:lnRef idx="1">
-            <a:schemeClr val="accent1"/>
-          </a:lnRef>
-          <a:fillRef idx="3">
-            <a:schemeClr val="accent1"/>
-          </a:fillRef>
-          <a:effectRef idx="2">
-            <a:schemeClr val="accent1"/>
-          </a:effectRef>
-          <a:fontRef idx="minor">
-            <a:schemeClr val="lt1"/>
-          </a:fontRef>
-        </p:style>
-        <p:txBody>
-          <a:bodyPr rtlCol="0" anchor="ctr" wrap="square" lIns="76200" rIns="76200" tIns="50800" bIns="50800"/>
-          <a:lstStyle/>
-          <a:p>
-            <a:pPr algn="ctr"/>
-            <a:r>
-              <a:rPr sz="1150" b="1">
-                <a:solidFill>
-                  <a:srgbClr val="FFFFFF"/>
-                </a:solidFill>
-                <a:latin typeface="Calibri"/>
-              </a:rPr>
-              <a:t>Amazon DynamoDB</a:t>
-            </a:r>
-          </a:p>
-          <a:p>
-            <a:pPr algn="ctr">
-              <a:spcBef>
-                <a:spcPts val="200"/>
-              </a:spcBef>
-            </a:pPr>
-            <a:r>
-              <a:rPr sz="850" b="0">
-                <a:solidFill>
-                  <a:srgbClr val="E6EEF6"/>
-                </a:solidFill>
-                <a:latin typeface="Calibri"/>
-              </a:rPr>
-              <a:t>Quantitative fund metrics
-(pay-per-request)</a:t>
-            </a:r>
-          </a:p>
-        </p:txBody>
-      </p:sp>
-      <p:sp>
-        <p:nvSpPr>
-          <p:cNvPr id="17" name="Rounded Rectangle 16"/>
-          <p:cNvSpPr/>
-          <p:nvPr/>
-        </p:nvSpPr>
-        <p:spPr>
-          <a:xfrm>
-            <a:off x="3429000" y="3291840"/>
-            <a:ext cx="5166360" cy="822960"/>
-          </a:xfrm>
-          <a:prstGeom prst="roundRect">
-            <a:avLst>
-              <a:gd name="adj" fmla="val 8000"/>
-            </a:avLst>
-          </a:prstGeom>
-          <a:solidFill>
-            <a:srgbClr val="146EB4"/>
-          </a:solidFill>
-          <a:ln>
-            <a:noFill/>
-          </a:ln>
-          <a:effectLst/>
-        </p:spPr>
-        <p:style>
-          <a:lnRef idx="1">
-            <a:schemeClr val="accent1"/>
-          </a:lnRef>
-          <a:fillRef idx="3">
-            <a:schemeClr val="accent1"/>
-          </a:fillRef>
-          <a:effectRef idx="2">
-            <a:schemeClr val="accent1"/>
-          </a:effectRef>
-          <a:fontRef idx="minor">
-            <a:schemeClr val="lt1"/>
-          </a:fontRef>
-        </p:style>
-        <p:txBody>
-          <a:bodyPr rtlCol="0" anchor="ctr" wrap="square" lIns="76200" rIns="76200" tIns="50800" bIns="50800"/>
-          <a:lstStyle/>
-          <a:p>
-            <a:pPr algn="ctr"/>
-            <a:r>
-              <a:rPr sz="1050" b="1">
-                <a:solidFill>
-                  <a:srgbClr val="FFFFFF"/>
-                </a:solidFill>
-                <a:latin typeface="Calibri"/>
-              </a:rPr>
-              <a:t>OpenSearch Serverless / Amazon S3 Vectors
-+ Amazon Bedrock Knowledge Base</a:t>
-            </a:r>
-          </a:p>
-          <a:p>
-            <a:pPr algn="ctr">
-              <a:spcBef>
-                <a:spcPts val="200"/>
-              </a:spcBef>
-            </a:pPr>
-            <a:r>
-              <a:rPr sz="850" b="0">
-                <a:solidFill>
-                  <a:srgbClr val="E6EEF6"/>
-                </a:solidFill>
-                <a:latin typeface="Calibri"/>
-              </a:rPr>
-              <a:t>RAG — qualitative fund-manager commentary retrieval</a:t>
-            </a:r>
-          </a:p>
-        </p:txBody>
-      </p:sp>
-      <p:sp>
-        <p:nvSpPr>
-          <p:cNvPr id="18" name="Rounded Rectangle 17"/>
-          <p:cNvSpPr/>
-          <p:nvPr/>
-        </p:nvSpPr>
-        <p:spPr>
-          <a:xfrm>
-            <a:off x="9006840" y="3291840"/>
-            <a:ext cx="2880360" cy="822960"/>
-          </a:xfrm>
-          <a:prstGeom prst="roundRect">
-            <a:avLst>
-              <a:gd name="adj" fmla="val 8000"/>
-            </a:avLst>
-          </a:prstGeom>
-          <a:solidFill>
-            <a:srgbClr val="146EB4"/>
-          </a:solidFill>
-          <a:ln>
-            <a:noFill/>
-          </a:ln>
-          <a:effectLst/>
-        </p:spPr>
-        <p:style>
-          <a:lnRef idx="1">
-            <a:schemeClr val="accent1"/>
-          </a:lnRef>
-          <a:fillRef idx="3">
-            <a:schemeClr val="accent1"/>
-          </a:fillRef>
-          <a:effectRef idx="2">
-            <a:schemeClr val="accent1"/>
-          </a:effectRef>
-          <a:fontRef idx="minor">
-            <a:schemeClr val="lt1"/>
-          </a:fontRef>
-        </p:style>
-        <p:txBody>
-          <a:bodyPr rtlCol="0" anchor="ctr" wrap="square" lIns="76200" rIns="76200" tIns="50800" bIns="50800"/>
-          <a:lstStyle/>
-          <a:p>
-            <a:pPr algn="ctr"/>
-            <a:r>
-              <a:rPr sz="1150" b="1">
-                <a:solidFill>
-                  <a:srgbClr val="FFFFFF"/>
-                </a:solidFill>
-                <a:latin typeface="Calibri"/>
-              </a:rPr>
-              <a:t>Amazon Bedrock</a:t>
-            </a:r>
-          </a:p>
-          <a:p>
-            <a:pPr algn="ctr">
-              <a:spcBef>
-                <a:spcPts val="200"/>
-              </a:spcBef>
-            </a:pPr>
-            <a:r>
-              <a:rPr sz="850" b="0">
-                <a:solidFill>
-                  <a:srgbClr val="E6EEF6"/>
-                </a:solidFill>
-                <a:latin typeface="Calibri"/>
-              </a:rPr>
-              <a:t>Foundation models — Claude 3.5
-Sonnet / Amazon Nova Lite</a:t>
-            </a:r>
-          </a:p>
-        </p:txBody>
-      </p:sp>
-      <p:cxnSp>
-        <p:nvCxnSpPr>
-          <p:cNvPr id="19" name="Connector 18"/>
-          <p:cNvCxnSpPr/>
-          <p:nvPr/>
-        </p:nvCxnSpPr>
-        <p:spPr>
-          <a:xfrm flipH="1">
-            <a:off x="1668780" y="2834639"/>
-            <a:ext cx="4480560" cy="457201"/>
-          </a:xfrm>
-          <a:prstGeom prst="line">
-            <a:avLst/>
-          </a:prstGeom>
-          <a:ln w="19050">
-            <a:solidFill>
-              <a:srgbClr val="5A636E"/>
-            </a:solidFill>
-            <a:tailEnd type="triangle" w="med" len="med"/>
-          </a:ln>
-        </p:spPr>
-        <p:style>
-          <a:lnRef idx="2">
-            <a:schemeClr val="accent1"/>
-          </a:lnRef>
-          <a:fillRef idx="0">
-            <a:schemeClr val="accent1"/>
-          </a:fillRef>
-          <a:effectRef idx="1">
-            <a:schemeClr val="accent1"/>
-          </a:effectRef>
-          <a:fontRef idx="minor">
-            <a:schemeClr val="tx1"/>
-          </a:fontRef>
-        </p:style>
-      </p:cxnSp>
-      <p:cxnSp>
-        <p:nvCxnSpPr>
-          <p:cNvPr id="20" name="Connector 19"/>
-          <p:cNvCxnSpPr/>
-          <p:nvPr/>
-        </p:nvCxnSpPr>
-        <p:spPr>
-          <a:xfrm flipH="1">
-            <a:off x="6012180" y="2834639"/>
-            <a:ext cx="137160" cy="457201"/>
-          </a:xfrm>
-          <a:prstGeom prst="line">
-            <a:avLst/>
-          </a:prstGeom>
-          <a:ln w="19050">
-            <a:solidFill>
-              <a:srgbClr val="5A636E"/>
-            </a:solidFill>
-            <a:tailEnd type="triangle" w="med" len="med"/>
-          </a:ln>
-        </p:spPr>
-        <p:style>
-          <a:lnRef idx="2">
-            <a:schemeClr val="accent1"/>
-          </a:lnRef>
-          <a:fillRef idx="0">
-            <a:schemeClr val="accent1"/>
-          </a:fillRef>
-          <a:effectRef idx="1">
-            <a:schemeClr val="accent1"/>
-          </a:effectRef>
-          <a:fontRef idx="minor">
-            <a:schemeClr val="tx1"/>
-          </a:fontRef>
-        </p:style>
-      </p:cxnSp>
-      <p:cxnSp>
-        <p:nvCxnSpPr>
-          <p:cNvPr id="21" name="Connector 20"/>
-          <p:cNvCxnSpPr/>
-          <p:nvPr/>
-        </p:nvCxnSpPr>
-        <p:spPr>
-          <a:xfrm>
-            <a:off x="6149340" y="2834639"/>
-            <a:ext cx="4297679" cy="457201"/>
-          </a:xfrm>
-          <a:prstGeom prst="line">
-            <a:avLst/>
-          </a:prstGeom>
-          <a:ln w="19050">
-            <a:solidFill>
-              <a:srgbClr val="5A636E"/>
-            </a:solidFill>
-            <a:tailEnd type="triangle" w="med" len="med"/>
-          </a:ln>
-        </p:spPr>
-        <p:style>
-          <a:lnRef idx="2">
-            <a:schemeClr val="accent1"/>
-          </a:lnRef>
-          <a:fillRef idx="0">
-            <a:schemeClr val="accent1"/>
-          </a:fillRef>
-          <a:effectRef idx="1">
-            <a:schemeClr val="accent1"/>
-          </a:effectRef>
-          <a:fontRef idx="minor">
-            <a:schemeClr val="tx1"/>
-          </a:fontRef>
-        </p:style>
-      </p:cxnSp>
-      <p:sp>
-        <p:nvSpPr>
-          <p:cNvPr id="22" name="Rounded Rectangle 21"/>
-          <p:cNvSpPr/>
-          <p:nvPr/>
-        </p:nvSpPr>
-        <p:spPr>
-          <a:xfrm>
-            <a:off x="320040" y="4526280"/>
-            <a:ext cx="1737360" cy="731520"/>
-          </a:xfrm>
-          <a:prstGeom prst="roundRect">
-            <a:avLst>
-              <a:gd name="adj" fmla="val 8000"/>
+              <a:gd name="adj" fmla="val 50000"/>
             </a:avLst>
           </a:prstGeom>
           <a:solidFill>
@@ -21141,299 +24074,36 @@
           </a:fontRef>
         </p:style>
         <p:txBody>
-          <a:bodyPr rtlCol="0" anchor="ctr" wrap="square" lIns="76200" rIns="76200" tIns="50800" bIns="50800"/>
-          <a:lstStyle/>
-          <a:p>
-            <a:pPr algn="ctr"/>
-            <a:r>
-              <a:rPr sz="1000" b="1">
+          <a:bodyPr rtlCol="0" anchor="ctr" wrap="square" lIns="50800" rIns="50800" tIns="38100" bIns="38100"/>
+          <a:lstStyle/>
+          <a:p>
+            <a:pPr algn="ctr">
+              <a:lnSpc>
+                <a:spcPct val="100000"/>
+              </a:lnSpc>
+            </a:pPr>
+            <a:r>
+              <a:rPr sz="800" b="1">
                 <a:solidFill>
                   <a:srgbClr val="FFFFFF"/>
                 </a:solidFill>
                 <a:latin typeface="Calibri"/>
               </a:rPr>
-              <a:t>S3 Docs Bucket</a:t>
-            </a:r>
-          </a:p>
-          <a:p>
-            <a:pPr algn="ctr">
-              <a:spcBef>
-                <a:spcPts val="200"/>
-              </a:spcBef>
-            </a:pPr>
-            <a:r>
-              <a:rPr sz="800" b="0">
-                <a:solidFill>
-                  <a:srgbClr val="E6EEF6"/>
-                </a:solidFill>
-                <a:latin typeface="Calibri"/>
-              </a:rPr>
-              <a:t>Source commentary docs</a:t>
-            </a:r>
-          </a:p>
-        </p:txBody>
-      </p:sp>
-      <p:sp>
-        <p:nvSpPr>
-          <p:cNvPr id="23" name="Rounded Rectangle 22"/>
-          <p:cNvSpPr/>
-          <p:nvPr/>
-        </p:nvSpPr>
-        <p:spPr>
-          <a:xfrm>
-            <a:off x="2194560" y="4526280"/>
-            <a:ext cx="1691640" cy="731520"/>
-          </a:xfrm>
-          <a:prstGeom prst="roundRect">
-            <a:avLst>
-              <a:gd name="adj" fmla="val 8000"/>
-            </a:avLst>
-          </a:prstGeom>
-          <a:solidFill>
-            <a:srgbClr val="2E7D32"/>
-          </a:solidFill>
-          <a:ln>
-            <a:noFill/>
-          </a:ln>
-          <a:effectLst/>
-        </p:spPr>
-        <p:style>
-          <a:lnRef idx="1">
-            <a:schemeClr val="accent1"/>
-          </a:lnRef>
-          <a:fillRef idx="3">
-            <a:schemeClr val="accent1"/>
-          </a:fillRef>
-          <a:effectRef idx="2">
-            <a:schemeClr val="accent1"/>
-          </a:effectRef>
-          <a:fontRef idx="minor">
-            <a:schemeClr val="lt1"/>
-          </a:fontRef>
-        </p:style>
-        <p:txBody>
-          <a:bodyPr rtlCol="0" anchor="ctr" wrap="square" lIns="76200" rIns="76200" tIns="50800" bIns="50800"/>
-          <a:lstStyle/>
-          <a:p>
-            <a:pPr algn="ctr"/>
-            <a:r>
-              <a:rPr sz="1000" b="1">
-                <a:solidFill>
-                  <a:srgbClr val="FFFFFF"/>
-                </a:solidFill>
-                <a:latin typeface="Calibri"/>
-              </a:rPr>
-              <a:t>SQS Queue + DLQ</a:t>
-            </a:r>
-          </a:p>
-          <a:p>
-            <a:pPr algn="ctr">
-              <a:spcBef>
-                <a:spcPts val="200"/>
-              </a:spcBef>
-            </a:pPr>
-            <a:r>
-              <a:rPr sz="800" b="0">
-                <a:solidFill>
-                  <a:srgbClr val="E6EEF6"/>
-                </a:solidFill>
-                <a:latin typeface="Calibri"/>
-              </a:rPr>
-              <a:t>Batches change events</a:t>
-            </a:r>
-          </a:p>
-        </p:txBody>
-      </p:sp>
-      <p:sp>
-        <p:nvSpPr>
-          <p:cNvPr id="24" name="Rounded Rectangle 23"/>
-          <p:cNvSpPr/>
-          <p:nvPr/>
-        </p:nvSpPr>
-        <p:spPr>
-          <a:xfrm>
-            <a:off x="4023360" y="4526280"/>
-            <a:ext cx="1965960" cy="731520"/>
-          </a:xfrm>
-          <a:prstGeom prst="roundRect">
-            <a:avLst>
-              <a:gd name="adj" fmla="val 8000"/>
-            </a:avLst>
-          </a:prstGeom>
-          <a:solidFill>
-            <a:srgbClr val="2E7D32"/>
-          </a:solidFill>
-          <a:ln>
-            <a:noFill/>
-          </a:ln>
-          <a:effectLst/>
-        </p:spPr>
-        <p:style>
-          <a:lnRef idx="1">
-            <a:schemeClr val="accent1"/>
-          </a:lnRef>
-          <a:fillRef idx="3">
-            <a:schemeClr val="accent1"/>
-          </a:fillRef>
-          <a:effectRef idx="2">
-            <a:schemeClr val="accent1"/>
-          </a:effectRef>
-          <a:fontRef idx="minor">
-            <a:schemeClr val="lt1"/>
-          </a:fontRef>
-        </p:style>
-        <p:txBody>
-          <a:bodyPr rtlCol="0" anchor="ctr" wrap="square" lIns="76200" rIns="76200" tIns="50800" bIns="50800"/>
-          <a:lstStyle/>
-          <a:p>
-            <a:pPr algn="ctr"/>
-            <a:r>
-              <a:rPr sz="1000" b="1">
-                <a:solidFill>
-                  <a:srgbClr val="FFFFFF"/>
-                </a:solidFill>
-                <a:latin typeface="Calibri"/>
-              </a:rPr>
-              <a:t>AWS Lambda</a:t>
-            </a:r>
-          </a:p>
-          <a:p>
-            <a:pPr algn="ctr">
-              <a:spcBef>
-                <a:spcPts val="200"/>
-              </a:spcBef>
-            </a:pPr>
-            <a:r>
-              <a:rPr sz="800" b="0">
-                <a:solidFill>
-                  <a:srgbClr val="E6EEF6"/>
-                </a:solidFill>
-                <a:latin typeface="Calibri"/>
-              </a:rPr>
-              <a:t>Triggers StartIngestionJob</a:t>
-            </a:r>
-          </a:p>
-        </p:txBody>
-      </p:sp>
-      <p:cxnSp>
-        <p:nvCxnSpPr>
-          <p:cNvPr id="25" name="Connector 24"/>
-          <p:cNvCxnSpPr/>
-          <p:nvPr/>
-        </p:nvCxnSpPr>
-        <p:spPr>
-          <a:xfrm>
-            <a:off x="2057400" y="4892040"/>
-            <a:ext cx="137160" cy="0"/>
-          </a:xfrm>
-          <a:prstGeom prst="line">
-            <a:avLst/>
-          </a:prstGeom>
-          <a:ln w="19050">
-            <a:solidFill>
-              <a:srgbClr val="2E7D32"/>
-            </a:solidFill>
-            <a:tailEnd type="triangle" w="med" len="med"/>
-          </a:ln>
-        </p:spPr>
-        <p:style>
-          <a:lnRef idx="2">
-            <a:schemeClr val="accent1"/>
-          </a:lnRef>
-          <a:fillRef idx="0">
-            <a:schemeClr val="accent1"/>
-          </a:fillRef>
-          <a:effectRef idx="1">
-            <a:schemeClr val="accent1"/>
-          </a:effectRef>
-          <a:fontRef idx="minor">
-            <a:schemeClr val="tx1"/>
-          </a:fontRef>
-        </p:style>
-      </p:cxnSp>
-      <p:cxnSp>
-        <p:nvCxnSpPr>
-          <p:cNvPr id="26" name="Connector 25"/>
-          <p:cNvCxnSpPr/>
-          <p:nvPr/>
-        </p:nvCxnSpPr>
-        <p:spPr>
-          <a:xfrm>
-            <a:off x="3886200" y="4892040"/>
-            <a:ext cx="137160" cy="0"/>
-          </a:xfrm>
-          <a:prstGeom prst="line">
-            <a:avLst/>
-          </a:prstGeom>
-          <a:ln w="19050">
-            <a:solidFill>
-              <a:srgbClr val="2E7D32"/>
-            </a:solidFill>
-            <a:tailEnd type="triangle" w="med" len="med"/>
-          </a:ln>
-        </p:spPr>
-        <p:style>
-          <a:lnRef idx="2">
-            <a:schemeClr val="accent1"/>
-          </a:lnRef>
-          <a:fillRef idx="0">
-            <a:schemeClr val="accent1"/>
-          </a:fillRef>
-          <a:effectRef idx="1">
-            <a:schemeClr val="accent1"/>
-          </a:effectRef>
-          <a:fontRef idx="minor">
-            <a:schemeClr val="tx1"/>
-          </a:fontRef>
-        </p:style>
-      </p:cxnSp>
-      <p:cxnSp>
-        <p:nvCxnSpPr>
-          <p:cNvPr id="27" name="Connector 26"/>
-          <p:cNvCxnSpPr/>
-          <p:nvPr/>
-        </p:nvCxnSpPr>
-        <p:spPr>
-          <a:xfrm flipH="1" flipV="1">
-            <a:off x="4526280" y="4114800"/>
-            <a:ext cx="480060" cy="411480"/>
-          </a:xfrm>
-          <a:prstGeom prst="line">
-            <a:avLst/>
-          </a:prstGeom>
-          <a:ln w="19050">
-            <a:solidFill>
-              <a:srgbClr val="2E7D32"/>
-            </a:solidFill>
-            <a:prstDash val="dash"/>
-            <a:tailEnd type="triangle" w="med" len="med"/>
-          </a:ln>
-        </p:spPr>
-        <p:style>
-          <a:lnRef idx="2">
-            <a:schemeClr val="accent1"/>
-          </a:lnRef>
-          <a:fillRef idx="0">
-            <a:schemeClr val="accent1"/>
-          </a:fillRef>
-          <a:effectRef idx="1">
-            <a:schemeClr val="accent1"/>
-          </a:effectRef>
-          <a:fontRef idx="minor">
-            <a:schemeClr val="tx1"/>
-          </a:fontRef>
-        </p:style>
-      </p:cxnSp>
-      <p:sp>
-        <p:nvSpPr>
-          <p:cNvPr id="28" name="TextBox 27"/>
+              <a:t>Proven end-to-end on real AWS (Dev)</a:t>
+            </a:r>
+          </a:p>
+        </p:txBody>
+      </p:sp>
+      <p:sp>
+        <p:nvSpPr>
+          <p:cNvPr id="208" name="Phase Bullets 2"/>
           <p:cNvSpPr txBox="1"/>
           <p:nvPr/>
         </p:nvSpPr>
         <p:spPr>
           <a:xfrm>
-            <a:off x="320040" y="5303520"/>
-            <a:ext cx="3840480" cy="228600"/>
+            <a:off x="8127796" y="2687120"/>
+            <a:ext cx="3606698" cy="3200000"/>
           </a:xfrm>
           <a:prstGeom prst="rect">
             <a:avLst/>
@@ -21441,253 +24111,183 @@
           <a:noFill/>
         </p:spPr>
         <p:txBody>
-          <a:bodyPr wrap="square" anchor="ctr" lIns="0" rIns="0" tIns="0" bIns="0">
+          <a:bodyPr wrap="square">
             <a:spAutoFit/>
           </a:bodyPr>
           <a:lstStyle/>
           <a:p>
-            <a:pPr algn="l">
-              <a:lnSpc>
-                <a:spcPct val="100000"/>
-              </a:lnSpc>
-            </a:pPr>
-            <a:r>
-              <a:rPr sz="850" b="1" i="0">
-                <a:solidFill>
-                  <a:srgbClr val="2E7D32"/>
-                </a:solidFill>
-                <a:latin typeface="Calibri"/>
-              </a:rPr>
-              <a:t>auto-sync ingestion (batched, async)</a:t>
-            </a:r>
-          </a:p>
-        </p:txBody>
-      </p:sp>
-      <p:sp>
-        <p:nvSpPr>
-          <p:cNvPr id="29" name="Rounded Rectangle 28"/>
-          <p:cNvSpPr/>
-          <p:nvPr/>
-        </p:nvSpPr>
-        <p:spPr>
-          <a:xfrm>
-            <a:off x="6446520" y="4526280"/>
-            <a:ext cx="2514600" cy="731520"/>
-          </a:xfrm>
-          <a:prstGeom prst="roundRect">
-            <a:avLst>
-              <a:gd name="adj" fmla="val 10000"/>
-            </a:avLst>
-          </a:prstGeom>
-          <a:solidFill>
-            <a:srgbClr val="FFFFFF"/>
-          </a:solidFill>
-          <a:ln w="15875">
-            <a:solidFill>
-              <a:srgbClr val="2E4157"/>
-            </a:solidFill>
-            <a:prstDash val="dash"/>
-          </a:ln>
-          <a:effectLst/>
-        </p:spPr>
-        <p:style>
-          <a:lnRef idx="1">
-            <a:schemeClr val="accent1"/>
-          </a:lnRef>
-          <a:fillRef idx="3">
-            <a:schemeClr val="accent1"/>
-          </a:fillRef>
-          <a:effectRef idx="2">
-            <a:schemeClr val="accent1"/>
-          </a:effectRef>
-          <a:fontRef idx="minor">
-            <a:schemeClr val="lt1"/>
-          </a:fontRef>
-        </p:style>
-        <p:txBody>
-          <a:bodyPr rtlCol="0" anchor="ctr" wrap="square" lIns="50800" rIns="50800" tIns="38100" bIns="38100"/>
-          <a:lstStyle/>
-          <a:p>
-            <a:pPr algn="ctr">
-              <a:lnSpc>
-                <a:spcPct val="100000"/>
-              </a:lnSpc>
-            </a:pPr>
-            <a:r>
-              <a:rPr sz="950" b="1">
-                <a:solidFill>
-                  <a:srgbClr val="2E4157"/>
-                </a:solidFill>
-                <a:latin typeface="Calibri"/>
-              </a:rPr>
-              <a:t>AgentCore Gateway + Lambda Targets</a:t>
-            </a:r>
-          </a:p>
-          <a:p>
-            <a:pPr algn="ctr">
-              <a:lnSpc>
-                <a:spcPct val="100000"/>
-              </a:lnSpc>
-            </a:pPr>
-            <a:r>
-              <a:rPr sz="950" b="1">
-                <a:solidFill>
-                  <a:srgbClr val="2E4157"/>
-                </a:solidFill>
-                <a:latin typeface="Calibri"/>
-              </a:rPr>
-              <a:t>(provisioned, not yet wired in)</a:t>
-            </a:r>
-          </a:p>
-        </p:txBody>
-      </p:sp>
-      <p:sp>
-        <p:nvSpPr>
-          <p:cNvPr id="30" name="Rounded Rectangle 29"/>
-          <p:cNvSpPr/>
-          <p:nvPr/>
-        </p:nvSpPr>
-        <p:spPr>
-          <a:xfrm>
-            <a:off x="9189720" y="4526280"/>
-            <a:ext cx="2697480" cy="731520"/>
-          </a:xfrm>
-          <a:prstGeom prst="roundRect">
-            <a:avLst>
-              <a:gd name="adj" fmla="val 10000"/>
-            </a:avLst>
-          </a:prstGeom>
-          <a:solidFill>
-            <a:srgbClr val="FFFFFF"/>
-          </a:solidFill>
-          <a:ln w="15875">
-            <a:solidFill>
-              <a:srgbClr val="2E4157"/>
-            </a:solidFill>
-            <a:prstDash val="dash"/>
-          </a:ln>
-          <a:effectLst/>
-        </p:spPr>
-        <p:style>
-          <a:lnRef idx="1">
-            <a:schemeClr val="accent1"/>
-          </a:lnRef>
-          <a:fillRef idx="3">
-            <a:schemeClr val="accent1"/>
-          </a:fillRef>
-          <a:effectRef idx="2">
-            <a:schemeClr val="accent1"/>
-          </a:effectRef>
-          <a:fontRef idx="minor">
-            <a:schemeClr val="lt1"/>
-          </a:fontRef>
-        </p:style>
-        <p:txBody>
-          <a:bodyPr rtlCol="0" anchor="ctr" wrap="square" lIns="50800" rIns="50800" tIns="38100" bIns="38100"/>
-          <a:lstStyle/>
-          <a:p>
-            <a:pPr algn="ctr">
-              <a:lnSpc>
-                <a:spcPct val="100000"/>
-              </a:lnSpc>
-            </a:pPr>
-            <a:r>
-              <a:rPr sz="950" b="1">
-                <a:solidFill>
-                  <a:srgbClr val="2E4157"/>
-                </a:solidFill>
-                <a:latin typeface="Calibri"/>
-              </a:rPr>
-              <a:t>AgentCore Memory</a:t>
-            </a:r>
-          </a:p>
-          <a:p>
-            <a:pPr algn="ctr">
-              <a:lnSpc>
-                <a:spcPct val="100000"/>
-              </a:lnSpc>
-            </a:pPr>
-            <a:r>
-              <a:rPr sz="950" b="1">
-                <a:solidFill>
-                  <a:srgbClr val="2E4157"/>
-                </a:solidFill>
-                <a:latin typeface="Calibri"/>
-              </a:rPr>
-              <a:t>(provisioned, not yet wired in)</a:t>
-            </a:r>
-          </a:p>
-        </p:txBody>
-      </p:sp>
-      <p:sp>
-        <p:nvSpPr>
-          <p:cNvPr id="31" name="Rounded Rectangle 30"/>
-          <p:cNvSpPr/>
-          <p:nvPr/>
-        </p:nvSpPr>
-        <p:spPr>
-          <a:xfrm>
-            <a:off x="320040" y="5623560"/>
-            <a:ext cx="11567160" cy="566928"/>
-          </a:xfrm>
-          <a:prstGeom prst="roundRect">
-            <a:avLst>
-              <a:gd name="adj" fmla="val 12000"/>
-            </a:avLst>
-          </a:prstGeom>
-          <a:solidFill>
-            <a:srgbClr val="232F3E"/>
-          </a:solidFill>
-          <a:ln>
-            <a:noFill/>
-          </a:ln>
-          <a:effectLst/>
-        </p:spPr>
-        <p:style>
-          <a:lnRef idx="1">
-            <a:schemeClr val="accent1"/>
-          </a:lnRef>
-          <a:fillRef idx="3">
-            <a:schemeClr val="accent1"/>
-          </a:fillRef>
-          <a:effectRef idx="2">
-            <a:schemeClr val="accent1"/>
-          </a:effectRef>
-          <a:fontRef idx="minor">
-            <a:schemeClr val="lt1"/>
-          </a:fontRef>
-        </p:style>
-        <p:txBody>
-          <a:bodyPr rtlCol="0" anchor="ctr" wrap="square" lIns="50800" rIns="50800" tIns="38100" bIns="38100"/>
-          <a:lstStyle/>
-          <a:p>
-            <a:pPr algn="ctr">
-              <a:lnSpc>
-                <a:spcPct val="100000"/>
-              </a:lnSpc>
-            </a:pPr>
-            <a:r>
-              <a:rPr sz="1050" b="0">
-                <a:solidFill>
-                  <a:srgbClr val="FFFFFF"/>
-                </a:solidFill>
-                <a:latin typeface="Calibri"/>
-              </a:rPr>
-              <a:t>Amazon CloudWatch — log groups, dashboard, error/throttle alarms      |      AWS IAM — one least-privilege role per component (Runtime, Knowledge Base, Lambda, CI/CD)</a:t>
-            </a:r>
-          </a:p>
-        </p:txBody>
-      </p:sp>
-      <p:sp>
-        <p:nvSpPr>
-          <p:cNvPr id="32" name="TextBox 31"/>
+            <a:pPr>
+              <a:lnSpc>
+                <a:spcPct val="105000"/>
+              </a:lnSpc>
+              <a:spcAft>
+                <a:spcPts val="500"/>
+              </a:spcAft>
+            </a:pPr>
+            <a:r>
+              <a:rPr sz="1000" b="0">
+                <a:solidFill>
+                  <a:srgbClr val="22272B"/>
+                </a:solidFill>
+                <a:latin typeface="Calibri"/>
+              </a:rPr>
+              <a:t>▪  OIDC federated auth — no long-lived AWS keys, least-privilege per-environment roles</a:t>
+            </a:r>
+          </a:p>
+          <a:p>
+            <a:pPr>
+              <a:lnSpc>
+                <a:spcPct val="105000"/>
+              </a:lnSpc>
+              <a:spcAft>
+                <a:spcPts val="500"/>
+              </a:spcAft>
+            </a:pPr>
+            <a:r>
+              <a:rPr sz="1000" b="0">
+                <a:solidFill>
+                  <a:srgbClr val="22272B"/>
+                </a:solidFill>
+                <a:latin typeface="Calibri"/>
+              </a:rPr>
+              <a:t>▪  pr-validate.yml — automatic lint/test/Docker-sanity/Terraform-plan on every PR</a:t>
+            </a:r>
+          </a:p>
+          <a:p>
+            <a:pPr>
+              <a:lnSpc>
+                <a:spcPct val="105000"/>
+              </a:lnSpc>
+              <a:spcAft>
+                <a:spcPts val="500"/>
+              </a:spcAft>
+            </a:pPr>
+            <a:r>
+              <a:rPr sz="1000" b="0">
+                <a:solidFill>
+                  <a:srgbClr val="22272B"/>
+                </a:solidFill>
+                <a:latin typeface="Calibri"/>
+              </a:rPr>
+              <a:t>▪  deploy.yml — manual trigger, build-once, promote the same image across environments</a:t>
+            </a:r>
+          </a:p>
+          <a:p>
+            <a:pPr>
+              <a:lnSpc>
+                <a:spcPct val="105000"/>
+              </a:lnSpc>
+              <a:spcAft>
+                <a:spcPts val="500"/>
+              </a:spcAft>
+            </a:pPr>
+            <a:r>
+              <a:rPr sz="1000" b="0">
+                <a:solidFill>
+                  <a:srgbClr val="22272B"/>
+                </a:solidFill>
+                <a:latin typeface="Calibri"/>
+              </a:rPr>
+              <a:t>▪  Proven via a real cold-start dev redeploy — 7 rounds of real IAM gaps found &amp; fixed</a:t>
+            </a:r>
+          </a:p>
+          <a:p>
+            <a:pPr>
+              <a:lnSpc>
+                <a:spcPct val="105000"/>
+              </a:lnSpc>
+              <a:spcAft>
+                <a:spcPts val="500"/>
+              </a:spcAft>
+            </a:pPr>
+            <a:r>
+              <a:rPr sz="1000" b="0">
+                <a:solidFill>
+                  <a:srgbClr val="22272B"/>
+                </a:solidFill>
+                <a:latin typeface="Calibri"/>
+              </a:rPr>
+              <a:t>▪  Staging/Production rollout designed, not yet executed</a:t>
+            </a:r>
+          </a:p>
+        </p:txBody>
+      </p:sp>
+      <p:sp>
+        <p:nvSpPr>
+          <p:cNvPr id="209" name="Flow Arrow 0"/>
           <p:cNvSpPr txBox="1"/>
           <p:nvPr/>
         </p:nvSpPr>
         <p:spPr>
           <a:xfrm>
-            <a:off x="320040" y="6309360"/>
-            <a:ext cx="11567160" cy="256032"/>
+            <a:off x="4063898" y="1554480"/>
+            <a:ext cx="228600" cy="600000"/>
+          </a:xfrm>
+          <a:prstGeom prst="rect">
+            <a:avLst/>
+          </a:prstGeom>
+          <a:noFill/>
+        </p:spPr>
+        <p:txBody>
+          <a:bodyPr wrap="square" anchor="ctr" lIns="0" rIns="0" tIns="0" bIns="0"/>
+          <a:lstStyle/>
+          <a:p>
+            <a:pPr algn="ctr"/>
+            <a:r>
+              <a:rPr sz="2000" b="1">
+                <a:solidFill>
+                  <a:srgbClr val="5A636E"/>
+                </a:solidFill>
+                <a:latin typeface="Calibri"/>
+              </a:rPr>
+              <a:t>→</a:t>
+            </a:r>
+          </a:p>
+        </p:txBody>
+      </p:sp>
+      <p:sp>
+        <p:nvSpPr>
+          <p:cNvPr id="210" name="Flow Arrow 1"/>
+          <p:cNvSpPr txBox="1"/>
+          <p:nvPr/>
+        </p:nvSpPr>
+        <p:spPr>
+          <a:xfrm>
+            <a:off x="7899196" y="1554480"/>
+            <a:ext cx="228600" cy="600000"/>
+          </a:xfrm>
+          <a:prstGeom prst="rect">
+            <a:avLst/>
+          </a:prstGeom>
+          <a:noFill/>
+        </p:spPr>
+        <p:txBody>
+          <a:bodyPr wrap="square" anchor="ctr" lIns="0" rIns="0" tIns="0" bIns="0"/>
+          <a:lstStyle/>
+          <a:p>
+            <a:pPr algn="ctr"/>
+            <a:r>
+              <a:rPr sz="2000" b="1">
+                <a:solidFill>
+                  <a:srgbClr val="5A636E"/>
+                </a:solidFill>
+                <a:latin typeface="Calibri"/>
+              </a:rPr>
+              <a:t>→</a:t>
+            </a:r>
+          </a:p>
+        </p:txBody>
+      </p:sp>
+      <p:sp>
+        <p:nvSpPr>
+          <p:cNvPr id="299" name="TextBox Caption"/>
+          <p:cNvSpPr txBox="1"/>
+          <p:nvPr/>
+        </p:nvSpPr>
+        <p:spPr>
+          <a:xfrm>
+            <a:off x="457200" y="6180000"/>
+            <a:ext cx="11277295" cy="256032"/>
           </a:xfrm>
           <a:prstGeom prst="rect">
             <a:avLst/>
@@ -21712,14 +24312,14 @@
                 </a:solidFill>
                 <a:latin typeface="Calibri"/>
               </a:rPr>
-              <a:t>Every resource is a reusable Terraform module, instantiated per environment (Dev / Staging / Prod) from identical code — only configuration differs.</a:t>
-            </a:r>
-          </a:p>
-        </p:txBody>
-      </p:sp>
-      <p:sp>
-        <p:nvSpPr>
-          <p:cNvPr id="33" name="TextBox 32"/>
+              <a:t>Each phase builds directly on the previous one — the agent and tool code never changes, only the deployment target and automation layer.</a:t>
+            </a:r>
+          </a:p>
+        </p:txBody>
+      </p:sp>
+      <p:sp>
+        <p:nvSpPr>
+          <p:cNvPr id="28" name="TextBox 27"/>
           <p:cNvSpPr txBox="1"/>
           <p:nvPr/>
         </p:nvSpPr>
@@ -21758,7 +24358,7 @@
       </p:sp>
       <p:sp>
         <p:nvSpPr>
-          <p:cNvPr id="34" name="TextBox 33"/>
+          <p:cNvPr id="29" name="TextBox 28"/>
           <p:cNvSpPr txBox="1"/>
           <p:nvPr/>
         </p:nvSpPr>
@@ -21790,7 +24390,7 @@
                 </a:solidFill>
                 <a:latin typeface="Calibri"/>
               </a:rPr>
-              <a:t>9 / 15</a:t>
+              <a:t>09 / 17</a:t>
             </a:r>
           </a:p>
         </p:txBody>
